--- a/tv/packaging/lg/Suvo_Player_UX_Scenario.pptx
+++ b/tv/packaging/lg/Suvo_Player_UX_Scenario.pptx
@@ -4,9 +4,6 @@
   <p:sldMasterIdLst>
     <p:sldMasterId id="2147483648" r:id="rId1"/>
   </p:sldMasterIdLst>
-  <p:notesMasterIdLst>
-    <p:notesMasterId r:id="rId19"/>
-  </p:notesMasterIdLst>
   <p:sldIdLst>
     <p:sldId id="256" r:id="rId2"/>
     <p:sldId id="257" r:id="rId3"/>
@@ -26,6 +23,9 @@
     <p:sldId id="271" r:id="rId17"/>
     <p:sldId id="272" r:id="rId18"/>
   </p:sldIdLst>
+  <p:notesMasterIdLst>
+    <p:notesMasterId r:id="rId19"/>
+  </p:notesMasterIdLst>
   <p:sldSz cx="12192000" cy="6858000"/>
   <p:notesSz cx="6858000" cy="12192000"/>
   <p:defaultTextStyle>
@@ -120,11 +120,6 @@
       </a:defRPr>
     </a:lvl9pPr>
   </p:defaultTextStyle>
-  <p:extLst>
-    <p:ext uri="{EFAFB233-063F-42B5-8137-9DF3F51BA10A}">
-      <p15:sldGuideLst xmlns:p15="http://schemas.microsoft.com/office/powerpoint/2012/main"/>
-    </p:ext>
-  </p:extLst>
 </p:presentation>
 </file>
 
@@ -150,10 +145,234 @@
           <a:chExt cx="0" cy="0"/>
         </a:xfrm>
       </p:grpSpPr>
+      <p:sp>
+        <p:nvSpPr>
+          <p:cNvPr id="2" name="Header Placeholder 1"/>
+          <p:cNvSpPr>
+            <a:spLocks noGrp="1"/>
+          </p:cNvSpPr>
+          <p:nvPr>
+            <p:ph type="hdr" sz="quarter"/>
+          </p:nvPr>
+        </p:nvSpPr>
+        <p:spPr>
+          <a:xfrm>
+            <a:off x="0" y="0"/>
+            <a:ext cx="2971800" cy="458788"/>
+          </a:xfrm>
+          <a:prstGeom prst="rect">
+            <a:avLst/>
+          </a:prstGeom>
+        </p:spPr>
+        <p:txBody>
+          <a:bodyPr vert="horz" lIns="91440" tIns="45720" rIns="91440" bIns="45720" rtlCol="0"/>
+          <a:lstStyle>
+            <a:lvl1pPr algn="l">
+              <a:defRPr sz="1200"/>
+            </a:lvl1pPr>
+          </a:lstStyle>
+          <a:p>
+            <a:endParaRPr lang="en-US"/>
+          </a:p>
+        </p:txBody>
+      </p:sp>
+      <p:sp>
+        <p:nvSpPr>
+          <p:cNvPr id="3" name="Date Placeholder 2"/>
+          <p:cNvSpPr>
+            <a:spLocks noGrp="1"/>
+          </p:cNvSpPr>
+          <p:nvPr>
+            <p:ph type="dt" idx="1"/>
+          </p:nvPr>
+        </p:nvSpPr>
+        <p:spPr>
+          <a:xfrm>
+            <a:off x="3884613" y="0"/>
+            <a:ext cx="2971800" cy="458788"/>
+          </a:xfrm>
+          <a:prstGeom prst="rect">
+            <a:avLst/>
+          </a:prstGeom>
+        </p:spPr>
+        <p:txBody>
+          <a:bodyPr vert="horz" lIns="91440" tIns="45720" rIns="91440" bIns="45720" rtlCol="0"/>
+          <a:lstStyle>
+            <a:lvl1pPr algn="r">
+              <a:defRPr sz="1200"/>
+            </a:lvl1pPr>
+          </a:lstStyle>
+          <a:p>
+            <a:fld id="{5282F153-3F37-0F45-9E97-73ACFA13230C}" type="datetimeFigureOut">
+              <a:rPr lang="en-US"/>
+              <a:t>7/23/19</a:t>
+            </a:fld>
+            <a:endParaRPr lang="en-US"/>
+          </a:p>
+        </p:txBody>
+      </p:sp>
+      <p:sp>
+        <p:nvSpPr>
+          <p:cNvPr id="4" name="Slide Image Placeholder 3"/>
+          <p:cNvSpPr>
+            <a:spLocks noGrp="1" noRot="1" noChangeAspect="1"/>
+          </p:cNvSpPr>
+          <p:nvPr>
+            <p:ph type="sldImg" idx="2"/>
+          </p:nvPr>
+        </p:nvSpPr>
+        <p:spPr>
+          <a:xfrm>
+            <a:off x="685800" y="1143000"/>
+            <a:ext cx="5486400" cy="3086100"/>
+          </a:xfrm>
+          <a:prstGeom prst="rect">
+            <a:avLst/>
+          </a:prstGeom>
+          <a:noFill/>
+          <a:ln w="12700">
+            <a:solidFill>
+              <a:prstClr val="black"/>
+            </a:solidFill>
+          </a:ln>
+        </p:spPr>
+        <p:txBody>
+          <a:bodyPr vert="horz" lIns="91440" tIns="45720" rIns="91440" bIns="45720" rtlCol="0" anchor="ctr"/>
+          <a:lstStyle/>
+          <a:p>
+            <a:endParaRPr lang="en-US"/>
+          </a:p>
+        </p:txBody>
+      </p:sp>
+      <p:sp>
+        <p:nvSpPr>
+          <p:cNvPr id="5" name="Notes Placeholder 4"/>
+          <p:cNvSpPr>
+            <a:spLocks noGrp="1"/>
+          </p:cNvSpPr>
+          <p:nvPr>
+            <p:ph type="body" sz="quarter" idx="3"/>
+          </p:nvPr>
+        </p:nvSpPr>
+        <p:spPr>
+          <a:xfrm>
+            <a:off x="685800" y="4400550"/>
+            <a:ext cx="5486400" cy="3600450"/>
+          </a:xfrm>
+          <a:prstGeom prst="rect">
+            <a:avLst/>
+          </a:prstGeom>
+        </p:spPr>
+        <p:txBody>
+          <a:bodyPr vert="horz" lIns="91440" tIns="45720" rIns="91440" bIns="45720" rtlCol="0"/>
+          <a:lstStyle/>
+          <a:p>
+            <a:pPr lvl="0"/>
+            <a:r>
+              <a:rPr lang="en-US"/>
+              <a:t>Click to edit Master text styles</a:t>
+            </a:r>
+          </a:p>
+          <a:p>
+            <a:pPr lvl="1"/>
+            <a:r>
+              <a:rPr lang="en-US"/>
+              <a:t>Second level</a:t>
+            </a:r>
+          </a:p>
+          <a:p>
+            <a:pPr lvl="2"/>
+            <a:r>
+              <a:rPr lang="en-US"/>
+              <a:t>Third level</a:t>
+            </a:r>
+          </a:p>
+          <a:p>
+            <a:pPr lvl="3"/>
+            <a:r>
+              <a:rPr lang="en-US"/>
+              <a:t>Fourth level</a:t>
+            </a:r>
+          </a:p>
+          <a:p>
+            <a:pPr lvl="4"/>
+            <a:r>
+              <a:rPr lang="en-US"/>
+              <a:t>Fifth level</a:t>
+            </a:r>
+          </a:p>
+        </p:txBody>
+      </p:sp>
+      <p:sp>
+        <p:nvSpPr>
+          <p:cNvPr id="6" name="Footer Placeholder 5"/>
+          <p:cNvSpPr>
+            <a:spLocks noGrp="1"/>
+          </p:cNvSpPr>
+          <p:nvPr>
+            <p:ph type="ftr" sz="quarter" idx="4"/>
+          </p:nvPr>
+        </p:nvSpPr>
+        <p:spPr>
+          <a:xfrm>
+            <a:off x="0" y="8685213"/>
+            <a:ext cx="2971800" cy="458787"/>
+          </a:xfrm>
+          <a:prstGeom prst="rect">
+            <a:avLst/>
+          </a:prstGeom>
+        </p:spPr>
+        <p:txBody>
+          <a:bodyPr vert="horz" lIns="91440" tIns="45720" rIns="91440" bIns="45720" rtlCol="0" anchor="b"/>
+          <a:lstStyle>
+            <a:lvl1pPr algn="l">
+              <a:defRPr sz="1200"/>
+            </a:lvl1pPr>
+          </a:lstStyle>
+          <a:p>
+            <a:endParaRPr lang="en-US"/>
+          </a:p>
+        </p:txBody>
+      </p:sp>
+      <p:sp>
+        <p:nvSpPr>
+          <p:cNvPr id="7" name="Slide Number Placeholder 6"/>
+          <p:cNvSpPr>
+            <a:spLocks noGrp="1"/>
+          </p:cNvSpPr>
+          <p:nvPr>
+            <p:ph type="sldNum" sz="quarter" idx="5"/>
+          </p:nvPr>
+        </p:nvSpPr>
+        <p:spPr>
+          <a:xfrm>
+            <a:off x="3884613" y="8685213"/>
+            <a:ext cx="2971800" cy="458787"/>
+          </a:xfrm>
+          <a:prstGeom prst="rect">
+            <a:avLst/>
+          </a:prstGeom>
+        </p:spPr>
+        <p:txBody>
+          <a:bodyPr vert="horz" lIns="91440" tIns="45720" rIns="91440" bIns="45720" rtlCol="0" anchor="b"/>
+          <a:lstStyle>
+            <a:lvl1pPr algn="r">
+              <a:defRPr sz="1200"/>
+            </a:lvl1pPr>
+          </a:lstStyle>
+          <a:p>
+            <a:fld id="{CE5E9CC1-C706-0F49-92D6-E571CC5EEA8F}" type="slidenum">
+              <a:rPr lang="en-US"/>
+              <a:t>‹#›</a:t>
+            </a:fld>
+            <a:endParaRPr lang="en-US"/>
+          </a:p>
+        </p:txBody>
+      </p:sp>
     </p:spTree>
     <p:extLst>
       <p:ext uri="{BB962C8B-B14F-4D97-AF65-F5344CB8AC3E}">
-        <p14:creationId xmlns:p14="http://schemas.microsoft.com/office/powerpoint/2010/main" val="4046156730"/>
+        <p14:creationId xmlns:p14="http://schemas.microsoft.com/office/powerpoint/2010/main" val="1024086991"/>
       </p:ext>
     </p:extLst>
   </p:cSld>
@@ -297,6 +516,10 @@
           <a:bodyPr/>
           <a:lstStyle/>
           <a:p>
+            <a:r>
+              <a:rPr lang="en-US" dirty="0"/>
+              <a:t/>
+            </a:r>
             <a:endParaRPr lang="en-US" dirty="0"/>
           </a:p>
         </p:txBody>
@@ -381,6 +604,10 @@
           <a:bodyPr/>
           <a:lstStyle/>
           <a:p>
+            <a:r>
+              <a:rPr lang="en-US" dirty="0"/>
+              <a:t/>
+            </a:r>
             <a:endParaRPr lang="en-US" dirty="0"/>
           </a:p>
         </p:txBody>
@@ -465,6 +692,10 @@
           <a:bodyPr/>
           <a:lstStyle/>
           <a:p>
+            <a:r>
+              <a:rPr lang="en-US" dirty="0"/>
+              <a:t/>
+            </a:r>
             <a:endParaRPr lang="en-US" dirty="0"/>
           </a:p>
         </p:txBody>
@@ -549,6 +780,10 @@
           <a:bodyPr/>
           <a:lstStyle/>
           <a:p>
+            <a:r>
+              <a:rPr lang="en-US" dirty="0"/>
+              <a:t/>
+            </a:r>
             <a:endParaRPr lang="en-US" dirty="0"/>
           </a:p>
         </p:txBody>
@@ -633,6 +868,10 @@
           <a:bodyPr/>
           <a:lstStyle/>
           <a:p>
+            <a:r>
+              <a:rPr lang="en-US" dirty="0"/>
+              <a:t/>
+            </a:r>
             <a:endParaRPr lang="en-US" dirty="0"/>
           </a:p>
         </p:txBody>
@@ -717,6 +956,10 @@
           <a:bodyPr/>
           <a:lstStyle/>
           <a:p>
+            <a:r>
+              <a:rPr lang="en-US" dirty="0"/>
+              <a:t/>
+            </a:r>
             <a:endParaRPr lang="en-US" dirty="0"/>
           </a:p>
         </p:txBody>
@@ -801,6 +1044,10 @@
           <a:bodyPr/>
           <a:lstStyle/>
           <a:p>
+            <a:r>
+              <a:rPr lang="en-US" dirty="0"/>
+              <a:t/>
+            </a:r>
             <a:endParaRPr lang="en-US" dirty="0"/>
           </a:p>
         </p:txBody>
@@ -885,6 +1132,10 @@
           <a:bodyPr/>
           <a:lstStyle/>
           <a:p>
+            <a:r>
+              <a:rPr lang="en-US" dirty="0"/>
+              <a:t/>
+            </a:r>
             <a:endParaRPr lang="en-US" dirty="0"/>
           </a:p>
         </p:txBody>
@@ -969,6 +1220,10 @@
           <a:bodyPr/>
           <a:lstStyle/>
           <a:p>
+            <a:r>
+              <a:rPr lang="en-US" dirty="0"/>
+              <a:t/>
+            </a:r>
             <a:endParaRPr lang="en-US" dirty="0"/>
           </a:p>
         </p:txBody>
@@ -1053,6 +1308,10 @@
           <a:bodyPr/>
           <a:lstStyle/>
           <a:p>
+            <a:r>
+              <a:rPr lang="en-US" dirty="0"/>
+              <a:t/>
+            </a:r>
             <a:endParaRPr lang="en-US" dirty="0"/>
           </a:p>
         </p:txBody>
@@ -1137,6 +1396,10 @@
           <a:bodyPr/>
           <a:lstStyle/>
           <a:p>
+            <a:r>
+              <a:rPr lang="en-US" dirty="0"/>
+              <a:t/>
+            </a:r>
             <a:endParaRPr lang="en-US" dirty="0"/>
           </a:p>
         </p:txBody>
@@ -1221,6 +1484,10 @@
           <a:bodyPr/>
           <a:lstStyle/>
           <a:p>
+            <a:r>
+              <a:rPr lang="en-US" dirty="0"/>
+              <a:t/>
+            </a:r>
             <a:endParaRPr lang="en-US" dirty="0"/>
           </a:p>
         </p:txBody>
@@ -1305,6 +1572,10 @@
           <a:bodyPr/>
           <a:lstStyle/>
           <a:p>
+            <a:r>
+              <a:rPr lang="en-US" dirty="0"/>
+              <a:t/>
+            </a:r>
             <a:endParaRPr lang="en-US" dirty="0"/>
           </a:p>
         </p:txBody>
@@ -1389,6 +1660,10 @@
           <a:bodyPr/>
           <a:lstStyle/>
           <a:p>
+            <a:r>
+              <a:rPr lang="en-US" dirty="0"/>
+              <a:t/>
+            </a:r>
             <a:endParaRPr lang="en-US" dirty="0"/>
           </a:p>
         </p:txBody>
@@ -1473,6 +1748,10 @@
           <a:bodyPr/>
           <a:lstStyle/>
           <a:p>
+            <a:r>
+              <a:rPr lang="en-US" dirty="0"/>
+              <a:t/>
+            </a:r>
             <a:endParaRPr lang="en-US" dirty="0"/>
           </a:p>
         </p:txBody>
@@ -1557,6 +1836,10 @@
           <a:bodyPr/>
           <a:lstStyle/>
           <a:p>
+            <a:r>
+              <a:rPr lang="en-US" dirty="0"/>
+              <a:t/>
+            </a:r>
             <a:endParaRPr lang="en-US" dirty="0"/>
           </a:p>
         </p:txBody>
@@ -1641,6 +1924,10 @@
           <a:bodyPr/>
           <a:lstStyle/>
           <a:p>
+            <a:r>
+              <a:rPr lang="en-US" dirty="0"/>
+              <a:t/>
+            </a:r>
             <a:endParaRPr lang="en-US" dirty="0"/>
           </a:p>
         </p:txBody>
@@ -1714,11 +2001,6 @@
 <file path=ppt/slideMasters/slideMaster1.xml><?xml version="1.0" encoding="utf-8"?>
 <p:sldMaster xmlns:a="http://schemas.openxmlformats.org/drawingml/2006/main" xmlns:r="http://schemas.openxmlformats.org/officeDocument/2006/relationships" xmlns:p="http://schemas.openxmlformats.org/presentationml/2006/main">
   <p:cSld>
-    <p:bg>
-      <p:bgRef idx="1001">
-        <a:schemeClr val="bg1"/>
-      </p:bgRef>
-    </p:bg>
     <p:spTree>
       <p:nvGrpSpPr>
         <p:cNvPr id="1" name=""/>
@@ -2001,7 +2283,6 @@
         <a:solidFill>
           <a:srgbClr val="0F1320"/>
         </a:solidFill>
-        <a:effectLst/>
       </p:bgPr>
     </p:bg>
     <p:spTree>
@@ -2037,13 +2318,6 @@
           </a:solidFill>
           <a:ln/>
         </p:spPr>
-        <p:txBody>
-          <a:bodyPr/>
-          <a:lstStyle/>
-          <a:p>
-            <a:endParaRPr lang="en-EG"/>
-          </a:p>
-        </p:txBody>
       </p:sp>
       <p:sp>
         <p:nvSpPr>
@@ -2064,24 +2338,17 @@
           </a:solidFill>
           <a:ln/>
         </p:spPr>
-        <p:txBody>
-          <a:bodyPr/>
-          <a:lstStyle/>
-          <a:p>
-            <a:endParaRPr lang="en-EG"/>
-          </a:p>
-        </p:txBody>
       </p:sp>
       <p:pic>
         <p:nvPicPr>
-          <p:cNvPr id="4" name="Image 0" descr="Lumen Player logo"/>
+          <p:cNvPr id="4" name="Image 0" descr="Suvo logo">    </p:cNvPr>
           <p:cNvPicPr>
             <a:picLocks noChangeAspect="1"/>
           </p:cNvPicPr>
           <p:nvPr/>
         </p:nvPicPr>
         <p:blipFill>
-          <a:blip r:embed="rId3"/>
+          <a:blip r:embed="rId1"/>
           <a:stretch>
             <a:fillRect/>
           </a:stretch>
@@ -2117,7 +2384,7 @@
           <a:bodyPr wrap="square" lIns="0" tIns="0" rIns="0" bIns="0" rtlCol="0" anchor="ctr"/>
           <a:lstStyle/>
           <a:p>
-            <a:pPr marL="0" indent="0">
+            <a:pPr indent="0" marL="0">
               <a:buNone/>
             </a:pPr>
             <a:r>
@@ -2156,7 +2423,7 @@
           <a:bodyPr wrap="square" lIns="0" tIns="0" rIns="0" bIns="0" rtlCol="0" anchor="ctr"/>
           <a:lstStyle/>
           <a:p>
-            <a:pPr marL="0" indent="0">
+            <a:pPr indent="0" marL="0">
               <a:buNone/>
             </a:pPr>
             <a:r>
@@ -2200,20 +2467,13 @@
             <a:prstDash val="solid"/>
           </a:ln>
           <a:effectLst>
-            <a:outerShdw blurRad="101600" dist="38100" dir="8100000" algn="bl" rotWithShape="0">
+            <a:outerShdw sx="100000" sy="100000" kx="0" ky="0" algn="bl" rotWithShape="0" blurRad="101600" dist="38100" dir="8100000">
               <a:srgbClr val="0F1320">
                 <a:alpha val="18000"/>
               </a:srgbClr>
             </a:outerShdw>
           </a:effectLst>
         </p:spPr>
-        <p:txBody>
-          <a:bodyPr/>
-          <a:lstStyle/>
-          <a:p>
-            <a:endParaRPr lang="en-EG"/>
-          </a:p>
-        </p:txBody>
       </p:sp>
       <p:sp>
         <p:nvSpPr>
@@ -2236,11 +2496,11 @@
           <a:bodyPr wrap="square" lIns="0" tIns="0" rIns="0" bIns="0" rtlCol="0" anchor="ctr"/>
           <a:lstStyle/>
           <a:p>
-            <a:pPr marL="0" indent="0">
-              <a:buNone/>
-            </a:pPr>
-            <a:r>
-              <a:rPr lang="en-US" sz="900" b="1" kern="0" spc="100" dirty="0">
+            <a:pPr indent="0" marL="0">
+              <a:buNone/>
+            </a:pPr>
+            <a:r>
+              <a:rPr lang="en-US" sz="900" b="1" spc="100" kern="0" dirty="0">
                 <a:solidFill>
                   <a:srgbClr val="56C6E6"/>
                 </a:solidFill>
@@ -2275,7 +2535,7 @@
           <a:bodyPr wrap="square" lIns="0" tIns="0" rIns="0" bIns="0" rtlCol="0" anchor="ctr"/>
           <a:lstStyle/>
           <a:p>
-            <a:pPr marL="0" indent="0">
+            <a:pPr indent="0" marL="0">
               <a:buNone/>
             </a:pPr>
             <a:r>
@@ -2287,7 +2547,7 @@
                 <a:ea typeface="Arial" pitchFamily="34" charset="-122"/>
                 <a:cs typeface="Arial" pitchFamily="34" charset="-120"/>
               </a:rPr>
-              <a:t>Lumen Player</a:t>
+              <a:t>Suvo</a:t>
             </a:r>
             <a:endParaRPr lang="en-US" sz="1350" dirty="0"/>
           </a:p>
@@ -2314,11 +2574,11 @@
           <a:bodyPr wrap="square" lIns="0" tIns="0" rIns="0" bIns="0" rtlCol="0" anchor="ctr"/>
           <a:lstStyle/>
           <a:p>
-            <a:pPr marL="0" indent="0">
-              <a:buNone/>
-            </a:pPr>
-            <a:r>
-              <a:rPr lang="en-US" sz="900" b="1" kern="0" spc="100" dirty="0">
+            <a:pPr indent="0" marL="0">
+              <a:buNone/>
+            </a:pPr>
+            <a:r>
+              <a:rPr lang="en-US" sz="900" b="1" spc="100" kern="0" dirty="0">
                 <a:solidFill>
                   <a:srgbClr val="56C6E6"/>
                 </a:solidFill>
@@ -2353,7 +2613,7 @@
           <a:bodyPr wrap="square" lIns="0" tIns="0" rIns="0" bIns="0" rtlCol="0" anchor="ctr"/>
           <a:lstStyle/>
           <a:p>
-            <a:pPr marL="0" indent="0">
+            <a:pPr indent="0" marL="0">
               <a:buNone/>
             </a:pPr>
             <a:r>
@@ -2365,7 +2625,7 @@
                 <a:ea typeface="Arial" pitchFamily="34" charset="-122"/>
                 <a:cs typeface="Arial" pitchFamily="34" charset="-120"/>
               </a:rPr>
-              <a:t>com.andrew1h1.lumenplayer</a:t>
+              <a:t>com.andrew1h1.suvo</a:t>
             </a:r>
             <a:endParaRPr lang="en-US" sz="1350" dirty="0"/>
           </a:p>
@@ -2392,11 +2652,11 @@
           <a:bodyPr wrap="square" lIns="0" tIns="0" rIns="0" bIns="0" rtlCol="0" anchor="ctr"/>
           <a:lstStyle/>
           <a:p>
-            <a:pPr marL="0" indent="0">
-              <a:buNone/>
-            </a:pPr>
-            <a:r>
-              <a:rPr lang="en-US" sz="900" b="1" kern="0" spc="100" dirty="0">
+            <a:pPr indent="0" marL="0">
+              <a:buNone/>
+            </a:pPr>
+            <a:r>
+              <a:rPr lang="en-US" sz="900" b="1" spc="100" kern="0" dirty="0">
                 <a:solidFill>
                   <a:srgbClr val="56C6E6"/>
                 </a:solidFill>
@@ -2431,7 +2691,7 @@
           <a:bodyPr wrap="square" lIns="0" tIns="0" rIns="0" bIns="0" rtlCol="0" anchor="ctr"/>
           <a:lstStyle/>
           <a:p>
-            <a:pPr marL="0" indent="0">
+            <a:pPr indent="0" marL="0">
               <a:buNone/>
             </a:pPr>
             <a:r>
@@ -2470,11 +2730,11 @@
           <a:bodyPr wrap="square" lIns="0" tIns="0" rIns="0" bIns="0" rtlCol="0" anchor="ctr"/>
           <a:lstStyle/>
           <a:p>
-            <a:pPr marL="0" indent="0">
-              <a:buNone/>
-            </a:pPr>
-            <a:r>
-              <a:rPr lang="en-US" sz="900" b="1" kern="0" spc="100" dirty="0">
+            <a:pPr indent="0" marL="0">
+              <a:buNone/>
+            </a:pPr>
+            <a:r>
+              <a:rPr lang="en-US" sz="900" b="1" spc="100" kern="0" dirty="0">
                 <a:solidFill>
                   <a:srgbClr val="56C6E6"/>
                 </a:solidFill>
@@ -2509,7 +2769,7 @@
           <a:bodyPr wrap="square" lIns="0" tIns="0" rIns="0" bIns="0" rtlCol="0" anchor="ctr"/>
           <a:lstStyle/>
           <a:p>
-            <a:pPr marL="0" indent="0">
+            <a:pPr indent="0" marL="0">
               <a:buNone/>
             </a:pPr>
             <a:r>
@@ -2548,11 +2808,11 @@
           <a:bodyPr wrap="square" lIns="0" tIns="0" rIns="0" bIns="0" rtlCol="0" anchor="ctr"/>
           <a:lstStyle/>
           <a:p>
-            <a:pPr marL="0" indent="0">
-              <a:buNone/>
-            </a:pPr>
-            <a:r>
-              <a:rPr lang="en-US" sz="900" b="1" kern="0" spc="100" dirty="0">
+            <a:pPr indent="0" marL="0">
+              <a:buNone/>
+            </a:pPr>
+            <a:r>
+              <a:rPr lang="en-US" sz="900" b="1" spc="100" kern="0" dirty="0">
                 <a:solidFill>
                   <a:srgbClr val="56C6E6"/>
                 </a:solidFill>
@@ -2587,7 +2847,7 @@
           <a:bodyPr wrap="square" lIns="0" tIns="0" rIns="0" bIns="0" rtlCol="0" anchor="ctr"/>
           <a:lstStyle/>
           <a:p>
-            <a:pPr marL="0" indent="0">
+            <a:pPr indent="0" marL="0">
               <a:buNone/>
             </a:pPr>
             <a:r>
@@ -2626,7 +2886,7 @@
           <a:bodyPr wrap="square" lIns="0" tIns="0" rIns="0" bIns="0" rtlCol="0" anchor="ctr"/>
           <a:lstStyle/>
           <a:p>
-            <a:pPr marL="0" indent="0">
+            <a:pPr indent="0" marL="0">
               <a:buNone/>
             </a:pPr>
             <a:r>
@@ -2660,7 +2920,6 @@
         <a:solidFill>
           <a:srgbClr val="F5F7FB"/>
         </a:solidFill>
-        <a:effectLst/>
       </p:bgPr>
     </p:bg>
     <p:spTree>
@@ -2698,20 +2957,13 @@
           </a:solidFill>
           <a:ln/>
           <a:effectLst>
-            <a:outerShdw blurRad="127000" dist="38100" dir="8100000" algn="bl" rotWithShape="0">
+            <a:outerShdw sx="100000" sy="100000" kx="0" ky="0" algn="bl" rotWithShape="0" blurRad="127000" dist="38100" dir="8100000">
               <a:srgbClr val="9AA6BC">
                 <a:alpha val="28000"/>
               </a:srgbClr>
             </a:outerShdw>
           </a:effectLst>
         </p:spPr>
-        <p:txBody>
-          <a:bodyPr/>
-          <a:lstStyle/>
-          <a:p>
-            <a:endParaRPr lang="en-EG"/>
-          </a:p>
-        </p:txBody>
       </p:sp>
       <p:sp>
         <p:nvSpPr>
@@ -2734,7 +2986,7 @@
           <a:bodyPr wrap="square" lIns="0" tIns="0" rIns="0" bIns="0" rtlCol="0" anchor="ctr"/>
           <a:lstStyle/>
           <a:p>
-            <a:pPr marL="0" indent="0" algn="ctr">
+            <a:pPr algn="ctr" indent="0" marL="0">
               <a:buNone/>
             </a:pPr>
             <a:r>
@@ -2773,7 +3025,7 @@
           <a:bodyPr wrap="square" lIns="0" tIns="0" rIns="0" bIns="0" rtlCol="0" anchor="ctr"/>
           <a:lstStyle/>
           <a:p>
-            <a:pPr marL="0" indent="0" algn="l">
+            <a:pPr algn="l" indent="0" marL="0">
               <a:buNone/>
             </a:pPr>
             <a:r>
@@ -2812,7 +3064,7 @@
           <a:bodyPr wrap="square" lIns="0" tIns="0" rIns="0" bIns="0" rtlCol="0" anchor="ctr"/>
           <a:lstStyle/>
           <a:p>
-            <a:pPr marL="0" indent="0" algn="l">
+            <a:pPr algn="l" indent="0" marL="0">
               <a:buNone/>
             </a:pPr>
             <a:r>
@@ -2856,20 +3108,13 @@
             <a:prstDash val="solid"/>
           </a:ln>
           <a:effectLst>
-            <a:outerShdw blurRad="101600" dist="38100" dir="8100000" algn="bl" rotWithShape="0">
+            <a:outerShdw sx="100000" sy="100000" kx="0" ky="0" algn="bl" rotWithShape="0" blurRad="101600" dist="38100" dir="8100000">
               <a:srgbClr val="0F1320">
                 <a:alpha val="18000"/>
               </a:srgbClr>
             </a:outerShdw>
           </a:effectLst>
         </p:spPr>
-        <p:txBody>
-          <a:bodyPr/>
-          <a:lstStyle/>
-          <a:p>
-            <a:endParaRPr lang="en-EG"/>
-          </a:p>
-        </p:txBody>
       </p:sp>
       <p:sp>
         <p:nvSpPr>
@@ -2892,7 +3137,7 @@
           <a:bodyPr wrap="square" lIns="0" tIns="0" rIns="0" bIns="0" rtlCol="0" anchor="ctr"/>
           <a:lstStyle/>
           <a:p>
-            <a:pPr marL="0" indent="0">
+            <a:pPr indent="0" marL="0">
               <a:buNone/>
             </a:pPr>
             <a:r>
@@ -2904,7 +3149,7 @@
                 <a:ea typeface="Trebuchet MS" pitchFamily="34" charset="-122"/>
                 <a:cs typeface="Trebuchet MS" pitchFamily="34" charset="-120"/>
               </a:rPr>
-              <a:t>Lumen</a:t>
+              <a:t>Suvo</a:t>
             </a:r>
             <a:endParaRPr lang="en-US" sz="1400" dirty="0"/>
           </a:p>
@@ -2931,7 +3176,7 @@
           <a:bodyPr wrap="square" lIns="0" tIns="0" rIns="0" bIns="0" rtlCol="0" anchor="ctr"/>
           <a:lstStyle/>
           <a:p>
-            <a:pPr marL="0" indent="0" algn="ctr">
+            <a:pPr algn="ctr" indent="0" marL="0">
               <a:buNone/>
             </a:pPr>
             <a:r>
@@ -2970,13 +3215,6 @@
           </a:solidFill>
           <a:ln/>
         </p:spPr>
-        <p:txBody>
-          <a:bodyPr/>
-          <a:lstStyle/>
-          <a:p>
-            <a:endParaRPr lang="en-EG"/>
-          </a:p>
-        </p:txBody>
       </p:sp>
       <p:sp>
         <p:nvSpPr>
@@ -2999,7 +3237,7 @@
           <a:bodyPr wrap="square" lIns="0" tIns="0" rIns="0" bIns="0" rtlCol="0" anchor="ctr"/>
           <a:lstStyle/>
           <a:p>
-            <a:pPr marL="0" indent="0" algn="ctr">
+            <a:pPr algn="ctr" indent="0" marL="0">
               <a:buNone/>
             </a:pPr>
             <a:r>
@@ -3038,7 +3276,7 @@
           <a:bodyPr wrap="square" lIns="0" tIns="0" rIns="0" bIns="0" rtlCol="0" anchor="ctr"/>
           <a:lstStyle/>
           <a:p>
-            <a:pPr marL="0" indent="0" algn="ctr">
+            <a:pPr algn="ctr" indent="0" marL="0">
               <a:buNone/>
             </a:pPr>
             <a:r>
@@ -3077,7 +3315,7 @@
           <a:bodyPr wrap="square" lIns="0" tIns="0" rIns="0" bIns="0" rtlCol="0" anchor="ctr"/>
           <a:lstStyle/>
           <a:p>
-            <a:pPr marL="0" indent="0" algn="ctr">
+            <a:pPr algn="ctr" indent="0" marL="0">
               <a:buNone/>
             </a:pPr>
             <a:r>
@@ -3116,7 +3354,7 @@
           <a:bodyPr wrap="square" lIns="0" tIns="0" rIns="0" bIns="0" rtlCol="0" anchor="ctr"/>
           <a:lstStyle/>
           <a:p>
-            <a:pPr marL="0" indent="0" algn="ctr">
+            <a:pPr algn="ctr" indent="0" marL="0">
               <a:buNone/>
             </a:pPr>
             <a:r>
@@ -3155,7 +3393,7 @@
           <a:bodyPr wrap="square" lIns="0" tIns="0" rIns="0" bIns="0" rtlCol="0" anchor="ctr"/>
           <a:lstStyle/>
           <a:p>
-            <a:pPr marL="0" indent="0" algn="ctr">
+            <a:pPr algn="ctr" indent="0" marL="0">
               <a:buNone/>
             </a:pPr>
             <a:r>
@@ -3194,13 +3432,6 @@
           </a:solidFill>
           <a:ln/>
         </p:spPr>
-        <p:txBody>
-          <a:bodyPr/>
-          <a:lstStyle/>
-          <a:p>
-            <a:endParaRPr lang="en-EG"/>
-          </a:p>
-        </p:txBody>
       </p:sp>
       <p:sp>
         <p:nvSpPr>
@@ -3223,7 +3454,7 @@
           <a:bodyPr wrap="square" lIns="0" tIns="0" rIns="0" bIns="0" rtlCol="0" anchor="ctr"/>
           <a:lstStyle/>
           <a:p>
-            <a:pPr marL="0" indent="0">
+            <a:pPr indent="0" marL="0">
               <a:buNone/>
             </a:pPr>
             <a:r>
@@ -3262,7 +3493,7 @@
           <a:bodyPr wrap="square" lIns="0" tIns="0" rIns="0" bIns="0" rtlCol="0" anchor="ctr"/>
           <a:lstStyle/>
           <a:p>
-            <a:pPr marL="0" indent="0">
+            <a:pPr indent="0" marL="0">
               <a:buNone/>
             </a:pPr>
             <a:r>
@@ -3306,13 +3537,6 @@
             <a:prstDash val="solid"/>
           </a:ln>
         </p:spPr>
-        <p:txBody>
-          <a:bodyPr/>
-          <a:lstStyle/>
-          <a:p>
-            <a:endParaRPr lang="en-EG"/>
-          </a:p>
-        </p:txBody>
       </p:sp>
       <p:sp>
         <p:nvSpPr>
@@ -3340,13 +3564,6 @@
             <a:prstDash val="solid"/>
           </a:ln>
         </p:spPr>
-        <p:txBody>
-          <a:bodyPr/>
-          <a:lstStyle/>
-          <a:p>
-            <a:endParaRPr lang="en-EG"/>
-          </a:p>
-        </p:txBody>
       </p:sp>
       <p:sp>
         <p:nvSpPr>
@@ -3374,13 +3591,6 @@
             <a:prstDash val="solid"/>
           </a:ln>
         </p:spPr>
-        <p:txBody>
-          <a:bodyPr/>
-          <a:lstStyle/>
-          <a:p>
-            <a:endParaRPr lang="en-EG"/>
-          </a:p>
-        </p:txBody>
       </p:sp>
       <p:sp>
         <p:nvSpPr>
@@ -3408,13 +3618,6 @@
             <a:prstDash val="solid"/>
           </a:ln>
         </p:spPr>
-        <p:txBody>
-          <a:bodyPr/>
-          <a:lstStyle/>
-          <a:p>
-            <a:endParaRPr lang="en-EG"/>
-          </a:p>
-        </p:txBody>
       </p:sp>
       <p:sp>
         <p:nvSpPr>
@@ -3437,7 +3640,7 @@
           <a:bodyPr wrap="square" lIns="0" tIns="0" rIns="0" bIns="0" rtlCol="0" anchor="ctr"/>
           <a:lstStyle/>
           <a:p>
-            <a:pPr marL="0" indent="0">
+            <a:pPr indent="0" marL="0">
               <a:buNone/>
             </a:pPr>
             <a:r>
@@ -3481,13 +3684,6 @@
             <a:prstDash val="solid"/>
           </a:ln>
         </p:spPr>
-        <p:txBody>
-          <a:bodyPr/>
-          <a:lstStyle/>
-          <a:p>
-            <a:endParaRPr lang="en-EG"/>
-          </a:p>
-        </p:txBody>
       </p:sp>
       <p:sp>
         <p:nvSpPr>
@@ -3510,13 +3706,6 @@
           </a:solidFill>
           <a:ln/>
         </p:spPr>
-        <p:txBody>
-          <a:bodyPr/>
-          <a:lstStyle/>
-          <a:p>
-            <a:endParaRPr lang="en-EG"/>
-          </a:p>
-        </p:txBody>
       </p:sp>
       <p:sp>
         <p:nvSpPr>
@@ -3539,13 +3728,6 @@
           </a:solidFill>
           <a:ln/>
         </p:spPr>
-        <p:txBody>
-          <a:bodyPr/>
-          <a:lstStyle/>
-          <a:p>
-            <a:endParaRPr lang="en-EG"/>
-          </a:p>
-        </p:txBody>
       </p:sp>
       <p:sp>
         <p:nvSpPr>
@@ -3573,13 +3755,6 @@
             <a:prstDash val="solid"/>
           </a:ln>
         </p:spPr>
-        <p:txBody>
-          <a:bodyPr/>
-          <a:lstStyle/>
-          <a:p>
-            <a:endParaRPr lang="en-EG"/>
-          </a:p>
-        </p:txBody>
       </p:sp>
       <p:sp>
         <p:nvSpPr>
@@ -3602,13 +3777,6 @@
           </a:solidFill>
           <a:ln/>
         </p:spPr>
-        <p:txBody>
-          <a:bodyPr/>
-          <a:lstStyle/>
-          <a:p>
-            <a:endParaRPr lang="en-EG"/>
-          </a:p>
-        </p:txBody>
       </p:sp>
       <p:sp>
         <p:nvSpPr>
@@ -3631,13 +3799,6 @@
           </a:solidFill>
           <a:ln/>
         </p:spPr>
-        <p:txBody>
-          <a:bodyPr/>
-          <a:lstStyle/>
-          <a:p>
-            <a:endParaRPr lang="en-EG"/>
-          </a:p>
-        </p:txBody>
       </p:sp>
       <p:sp>
         <p:nvSpPr>
@@ -3665,13 +3826,6 @@
             <a:prstDash val="solid"/>
           </a:ln>
         </p:spPr>
-        <p:txBody>
-          <a:bodyPr/>
-          <a:lstStyle/>
-          <a:p>
-            <a:endParaRPr lang="en-EG"/>
-          </a:p>
-        </p:txBody>
       </p:sp>
       <p:sp>
         <p:nvSpPr>
@@ -3694,13 +3848,6 @@
           </a:solidFill>
           <a:ln/>
         </p:spPr>
-        <p:txBody>
-          <a:bodyPr/>
-          <a:lstStyle/>
-          <a:p>
-            <a:endParaRPr lang="en-EG"/>
-          </a:p>
-        </p:txBody>
       </p:sp>
       <p:sp>
         <p:nvSpPr>
@@ -3723,13 +3870,6 @@
           </a:solidFill>
           <a:ln/>
         </p:spPr>
-        <p:txBody>
-          <a:bodyPr/>
-          <a:lstStyle/>
-          <a:p>
-            <a:endParaRPr lang="en-EG"/>
-          </a:p>
-        </p:txBody>
       </p:sp>
       <p:sp>
         <p:nvSpPr>
@@ -3757,13 +3897,6 @@
             <a:prstDash val="solid"/>
           </a:ln>
         </p:spPr>
-        <p:txBody>
-          <a:bodyPr/>
-          <a:lstStyle/>
-          <a:p>
-            <a:endParaRPr lang="en-EG"/>
-          </a:p>
-        </p:txBody>
       </p:sp>
       <p:sp>
         <p:nvSpPr>
@@ -3786,13 +3919,6 @@
           </a:solidFill>
           <a:ln/>
         </p:spPr>
-        <p:txBody>
-          <a:bodyPr/>
-          <a:lstStyle/>
-          <a:p>
-            <a:endParaRPr lang="en-EG"/>
-          </a:p>
-        </p:txBody>
       </p:sp>
       <p:sp>
         <p:nvSpPr>
@@ -3815,13 +3941,6 @@
           </a:solidFill>
           <a:ln/>
         </p:spPr>
-        <p:txBody>
-          <a:bodyPr/>
-          <a:lstStyle/>
-          <a:p>
-            <a:endParaRPr lang="en-EG"/>
-          </a:p>
-        </p:txBody>
       </p:sp>
       <p:sp>
         <p:nvSpPr>
@@ -3847,20 +3966,13 @@
             <a:prstDash val="solid"/>
           </a:ln>
           <a:effectLst>
-            <a:outerShdw blurRad="101600" dist="38100" dir="8100000" algn="bl" rotWithShape="0">
+            <a:outerShdw sx="100000" sy="100000" kx="0" ky="0" algn="bl" rotWithShape="0" blurRad="101600" dist="38100" dir="8100000">
               <a:srgbClr val="0F1320">
                 <a:alpha val="18000"/>
               </a:srgbClr>
             </a:outerShdw>
           </a:effectLst>
         </p:spPr>
-        <p:txBody>
-          <a:bodyPr/>
-          <a:lstStyle/>
-          <a:p>
-            <a:endParaRPr lang="en-EG"/>
-          </a:p>
-        </p:txBody>
       </p:sp>
       <p:sp>
         <p:nvSpPr>
@@ -3883,7 +3995,7 @@
           <a:bodyPr wrap="square" lIns="0" tIns="0" rIns="0" bIns="0" rtlCol="0" anchor="ctr"/>
           <a:lstStyle/>
           <a:p>
-            <a:pPr marL="0" indent="0" algn="ctr">
+            <a:pPr algn="ctr" indent="0" marL="0">
               <a:buNone/>
             </a:pPr>
             <a:r>
@@ -3925,20 +4037,13 @@
             <a:prstDash val="solid"/>
           </a:ln>
           <a:effectLst>
-            <a:outerShdw blurRad="101600" dist="38100" dir="8100000" algn="bl" rotWithShape="0">
+            <a:outerShdw sx="100000" sy="100000" kx="0" ky="0" algn="bl" rotWithShape="0" blurRad="101600" dist="38100" dir="8100000">
               <a:srgbClr val="0F1320">
                 <a:alpha val="18000"/>
               </a:srgbClr>
             </a:outerShdw>
           </a:effectLst>
         </p:spPr>
-        <p:txBody>
-          <a:bodyPr/>
-          <a:lstStyle/>
-          <a:p>
-            <a:endParaRPr lang="en-EG"/>
-          </a:p>
-        </p:txBody>
       </p:sp>
       <p:sp>
         <p:nvSpPr>
@@ -3961,7 +4066,7 @@
           <a:bodyPr wrap="square" lIns="0" tIns="0" rIns="0" bIns="0" rtlCol="0" anchor="ctr"/>
           <a:lstStyle/>
           <a:p>
-            <a:pPr marL="0" indent="0" algn="ctr">
+            <a:pPr algn="ctr" indent="0" marL="0">
               <a:buNone/>
             </a:pPr>
             <a:r>
@@ -4003,20 +4108,13 @@
             <a:prstDash val="solid"/>
           </a:ln>
           <a:effectLst>
-            <a:outerShdw blurRad="101600" dist="38100" dir="8100000" algn="bl" rotWithShape="0">
+            <a:outerShdw sx="100000" sy="100000" kx="0" ky="0" algn="bl" rotWithShape="0" blurRad="101600" dist="38100" dir="8100000">
               <a:srgbClr val="0F1320">
                 <a:alpha val="18000"/>
               </a:srgbClr>
             </a:outerShdw>
           </a:effectLst>
         </p:spPr>
-        <p:txBody>
-          <a:bodyPr/>
-          <a:lstStyle/>
-          <a:p>
-            <a:endParaRPr lang="en-EG"/>
-          </a:p>
-        </p:txBody>
       </p:sp>
       <p:sp>
         <p:nvSpPr>
@@ -4039,7 +4137,7 @@
           <a:bodyPr wrap="square" lIns="0" tIns="0" rIns="0" bIns="0" rtlCol="0" anchor="ctr"/>
           <a:lstStyle/>
           <a:p>
-            <a:pPr marL="0" indent="0" algn="ctr">
+            <a:pPr algn="ctr" indent="0" marL="0">
               <a:buNone/>
             </a:pPr>
             <a:r>
@@ -4081,20 +4179,13 @@
             <a:prstDash val="solid"/>
           </a:ln>
           <a:effectLst>
-            <a:outerShdw blurRad="101600" dist="38100" dir="8100000" algn="bl" rotWithShape="0">
+            <a:outerShdw sx="100000" sy="100000" kx="0" ky="0" algn="bl" rotWithShape="0" blurRad="101600" dist="38100" dir="8100000">
               <a:srgbClr val="0F1320">
                 <a:alpha val="18000"/>
               </a:srgbClr>
             </a:outerShdw>
           </a:effectLst>
         </p:spPr>
-        <p:txBody>
-          <a:bodyPr/>
-          <a:lstStyle/>
-          <a:p>
-            <a:endParaRPr lang="en-EG"/>
-          </a:p>
-        </p:txBody>
       </p:sp>
       <p:sp>
         <p:nvSpPr>
@@ -4117,7 +4208,7 @@
           <a:bodyPr wrap="square" lIns="0" tIns="0" rIns="0" bIns="0" rtlCol="0" anchor="ctr"/>
           <a:lstStyle/>
           <a:p>
-            <a:pPr marL="0" indent="0" algn="ctr">
+            <a:pPr algn="ctr" indent="0" marL="0">
               <a:buNone/>
             </a:pPr>
             <a:r>
@@ -4154,13 +4245,6 @@
           </a:solidFill>
           <a:ln/>
         </p:spPr>
-        <p:txBody>
-          <a:bodyPr/>
-          <a:lstStyle/>
-          <a:p>
-            <a:endParaRPr lang="en-EG"/>
-          </a:p>
-        </p:txBody>
       </p:sp>
       <p:sp>
         <p:nvSpPr>
@@ -4183,7 +4267,7 @@
           <a:bodyPr wrap="square" lIns="0" tIns="0" rIns="0" bIns="0" rtlCol="0" anchor="ctr"/>
           <a:lstStyle/>
           <a:p>
-            <a:pPr marL="0" indent="0" algn="ctr">
+            <a:pPr algn="ctr" indent="0" marL="0">
               <a:buNone/>
             </a:pPr>
             <a:r>
@@ -4222,7 +4306,7 @@
           <a:bodyPr wrap="square" lIns="0" tIns="0" rIns="0" bIns="0" rtlCol="0" anchor="t"/>
           <a:lstStyle/>
           <a:p>
-            <a:pPr marL="0" indent="0" algn="l">
+            <a:pPr algn="l" indent="0" marL="0">
               <a:lnSpc>
                 <a:spcPct val="102000"/>
               </a:lnSpc>
@@ -4239,6 +4323,12 @@
               </a:rPr>
               <a:t>Top navigation  </a:t>
             </a:r>
+            <a:pPr algn="l" indent="0" marL="0">
+              <a:lnSpc>
+                <a:spcPct val="102000"/>
+              </a:lnSpc>
+              <a:buNone/>
+            </a:pPr>
             <a:r>
               <a:rPr lang="en-US" sz="1250" dirty="0">
                 <a:solidFill>
@@ -4273,13 +4363,6 @@
           </a:solidFill>
           <a:ln/>
         </p:spPr>
-        <p:txBody>
-          <a:bodyPr/>
-          <a:lstStyle/>
-          <a:p>
-            <a:endParaRPr lang="en-EG"/>
-          </a:p>
-        </p:txBody>
       </p:sp>
       <p:sp>
         <p:nvSpPr>
@@ -4302,7 +4385,7 @@
           <a:bodyPr wrap="square" lIns="0" tIns="0" rIns="0" bIns="0" rtlCol="0" anchor="ctr"/>
           <a:lstStyle/>
           <a:p>
-            <a:pPr marL="0" indent="0" algn="ctr">
+            <a:pPr algn="ctr" indent="0" marL="0">
               <a:buNone/>
             </a:pPr>
             <a:r>
@@ -4341,7 +4424,7 @@
           <a:bodyPr wrap="square" lIns="0" tIns="0" rIns="0" bIns="0" rtlCol="0" anchor="t"/>
           <a:lstStyle/>
           <a:p>
-            <a:pPr marL="0" indent="0" algn="l">
+            <a:pPr algn="l" indent="0" marL="0">
               <a:lnSpc>
                 <a:spcPct val="102000"/>
               </a:lnSpc>
@@ -4358,6 +4441,12 @@
               </a:rPr>
               <a:t>Account / menu  </a:t>
             </a:r>
+            <a:pPr algn="l" indent="0" marL="0">
+              <a:lnSpc>
+                <a:spcPct val="102000"/>
+              </a:lnSpc>
+              <a:buNone/>
+            </a:pPr>
             <a:r>
               <a:rPr lang="en-US" sz="1250" dirty="0">
                 <a:solidFill>
@@ -4392,13 +4481,6 @@
           </a:solidFill>
           <a:ln/>
         </p:spPr>
-        <p:txBody>
-          <a:bodyPr/>
-          <a:lstStyle/>
-          <a:p>
-            <a:endParaRPr lang="en-EG"/>
-          </a:p>
-        </p:txBody>
       </p:sp>
       <p:sp>
         <p:nvSpPr>
@@ -4421,7 +4503,7 @@
           <a:bodyPr wrap="square" lIns="0" tIns="0" rIns="0" bIns="0" rtlCol="0" anchor="ctr"/>
           <a:lstStyle/>
           <a:p>
-            <a:pPr marL="0" indent="0" algn="ctr">
+            <a:pPr algn="ctr" indent="0" marL="0">
               <a:buNone/>
             </a:pPr>
             <a:r>
@@ -4460,7 +4542,7 @@
           <a:bodyPr wrap="square" lIns="0" tIns="0" rIns="0" bIns="0" rtlCol="0" anchor="t"/>
           <a:lstStyle/>
           <a:p>
-            <a:pPr marL="0" indent="0" algn="l">
+            <a:pPr algn="l" indent="0" marL="0">
               <a:lnSpc>
                 <a:spcPct val="102000"/>
               </a:lnSpc>
@@ -4477,6 +4559,12 @@
               </a:rPr>
               <a:t>Favourites  </a:t>
             </a:r>
+            <a:pPr algn="l" indent="0" marL="0">
+              <a:lnSpc>
+                <a:spcPct val="102000"/>
+              </a:lnSpc>
+              <a:buNone/>
+            </a:pPr>
             <a:r>
               <a:rPr lang="en-US" sz="1250" dirty="0">
                 <a:solidFill>
@@ -4511,13 +4599,6 @@
           </a:solidFill>
           <a:ln/>
         </p:spPr>
-        <p:txBody>
-          <a:bodyPr/>
-          <a:lstStyle/>
-          <a:p>
-            <a:endParaRPr lang="en-EG"/>
-          </a:p>
-        </p:txBody>
       </p:sp>
       <p:sp>
         <p:nvSpPr>
@@ -4540,7 +4621,7 @@
           <a:bodyPr wrap="square" lIns="0" tIns="0" rIns="0" bIns="0" rtlCol="0" anchor="ctr"/>
           <a:lstStyle/>
           <a:p>
-            <a:pPr marL="0" indent="0" algn="ctr">
+            <a:pPr algn="ctr" indent="0" marL="0">
               <a:buNone/>
             </a:pPr>
             <a:r>
@@ -4579,7 +4660,7 @@
           <a:bodyPr wrap="square" lIns="0" tIns="0" rIns="0" bIns="0" rtlCol="0" anchor="t"/>
           <a:lstStyle/>
           <a:p>
-            <a:pPr marL="0" indent="0" algn="l">
+            <a:pPr algn="l" indent="0" marL="0">
               <a:lnSpc>
                 <a:spcPct val="102000"/>
               </a:lnSpc>
@@ -4596,6 +4677,12 @@
               </a:rPr>
               <a:t>Watch History  </a:t>
             </a:r>
+            <a:pPr algn="l" indent="0" marL="0">
+              <a:lnSpc>
+                <a:spcPct val="102000"/>
+              </a:lnSpc>
+              <a:buNone/>
+            </a:pPr>
             <a:r>
               <a:rPr lang="en-US" sz="1250" dirty="0">
                 <a:solidFill>
@@ -4632,7 +4719,7 @@
           <a:bodyPr wrap="square" lIns="0" tIns="0" rIns="0" bIns="0" rtlCol="0" anchor="t"/>
           <a:lstStyle/>
           <a:p>
-            <a:pPr marL="0" indent="0">
+            <a:pPr indent="0" marL="0">
               <a:lnSpc>
                 <a:spcPct val="103000"/>
               </a:lnSpc>
@@ -4674,7 +4761,7 @@
           <a:bodyPr wrap="square" lIns="0" tIns="0" rIns="0" bIns="0" rtlCol="0" anchor="ctr"/>
           <a:lstStyle/>
           <a:p>
-            <a:pPr marL="0" indent="0" algn="r">
+            <a:pPr algn="r" indent="0" marL="0">
               <a:buNone/>
             </a:pPr>
             <a:r>
@@ -4713,7 +4800,7 @@
           <a:bodyPr wrap="square" lIns="0" tIns="0" rIns="0" bIns="0" rtlCol="0" anchor="ctr"/>
           <a:lstStyle/>
           <a:p>
-            <a:pPr marL="0" indent="0" algn="l">
+            <a:pPr algn="l" indent="0" marL="0">
               <a:buNone/>
             </a:pPr>
             <a:r>
@@ -4725,7 +4812,7 @@
                 <a:ea typeface="Arial" pitchFamily="34" charset="-122"/>
                 <a:cs typeface="Arial" pitchFamily="34" charset="-120"/>
               </a:rPr>
-              <a:t>Lumen Player · UX Scenario Document</a:t>
+              <a:t>Suvo · UX Scenario Document</a:t>
             </a:r>
             <a:endParaRPr lang="en-US" sz="900" dirty="0"/>
           </a:p>
@@ -4747,7 +4834,6 @@
         <a:solidFill>
           <a:srgbClr val="F5F7FB"/>
         </a:solidFill>
-        <a:effectLst/>
       </p:bgPr>
     </p:bg>
     <p:spTree>
@@ -4785,20 +4871,13 @@
           </a:solidFill>
           <a:ln/>
           <a:effectLst>
-            <a:outerShdw blurRad="127000" dist="38100" dir="8100000" algn="bl" rotWithShape="0">
+            <a:outerShdw sx="100000" sy="100000" kx="0" ky="0" algn="bl" rotWithShape="0" blurRad="127000" dist="38100" dir="8100000">
               <a:srgbClr val="9AA6BC">
                 <a:alpha val="28000"/>
               </a:srgbClr>
             </a:outerShdw>
           </a:effectLst>
         </p:spPr>
-        <p:txBody>
-          <a:bodyPr/>
-          <a:lstStyle/>
-          <a:p>
-            <a:endParaRPr lang="en-EG"/>
-          </a:p>
-        </p:txBody>
       </p:sp>
       <p:sp>
         <p:nvSpPr>
@@ -4821,7 +4900,7 @@
           <a:bodyPr wrap="square" lIns="0" tIns="0" rIns="0" bIns="0" rtlCol="0" anchor="ctr"/>
           <a:lstStyle/>
           <a:p>
-            <a:pPr marL="0" indent="0" algn="ctr">
+            <a:pPr algn="ctr" indent="0" marL="0">
               <a:buNone/>
             </a:pPr>
             <a:r>
@@ -4860,7 +4939,7 @@
           <a:bodyPr wrap="square" lIns="0" tIns="0" rIns="0" bIns="0" rtlCol="0" anchor="ctr"/>
           <a:lstStyle/>
           <a:p>
-            <a:pPr marL="0" indent="0" algn="l">
+            <a:pPr algn="l" indent="0" marL="0">
               <a:buNone/>
             </a:pPr>
             <a:r>
@@ -4899,7 +4978,7 @@
           <a:bodyPr wrap="square" lIns="0" tIns="0" rIns="0" bIns="0" rtlCol="0" anchor="ctr"/>
           <a:lstStyle/>
           <a:p>
-            <a:pPr marL="0" indent="0" algn="l">
+            <a:pPr algn="l" indent="0" marL="0">
               <a:buNone/>
             </a:pPr>
             <a:r>
@@ -4943,20 +5022,13 @@
             <a:prstDash val="solid"/>
           </a:ln>
           <a:effectLst>
-            <a:outerShdw blurRad="101600" dist="38100" dir="8100000" algn="bl" rotWithShape="0">
+            <a:outerShdw sx="100000" sy="100000" kx="0" ky="0" algn="bl" rotWithShape="0" blurRad="101600" dist="38100" dir="8100000">
               <a:srgbClr val="0F1320">
                 <a:alpha val="18000"/>
               </a:srgbClr>
             </a:outerShdw>
           </a:effectLst>
         </p:spPr>
-        <p:txBody>
-          <a:bodyPr/>
-          <a:lstStyle/>
-          <a:p>
-            <a:endParaRPr lang="en-EG"/>
-          </a:p>
-        </p:txBody>
       </p:sp>
       <p:sp>
         <p:nvSpPr>
@@ -4979,7 +5051,7 @@
           <a:bodyPr wrap="square" lIns="0" tIns="0" rIns="0" bIns="0" rtlCol="0" anchor="ctr"/>
           <a:lstStyle/>
           <a:p>
-            <a:pPr marL="0" indent="0">
+            <a:pPr indent="0" marL="0">
               <a:buNone/>
             </a:pPr>
             <a:r>
@@ -4991,7 +5063,7 @@
                 <a:ea typeface="Trebuchet MS" pitchFamily="34" charset="-122"/>
                 <a:cs typeface="Trebuchet MS" pitchFamily="34" charset="-120"/>
               </a:rPr>
-              <a:t>Lumen</a:t>
+              <a:t>Suvo</a:t>
             </a:r>
             <a:endParaRPr lang="en-US" sz="1400" dirty="0"/>
           </a:p>
@@ -5018,7 +5090,7 @@
           <a:bodyPr wrap="square" lIns="0" tIns="0" rIns="0" bIns="0" rtlCol="0" anchor="ctr"/>
           <a:lstStyle/>
           <a:p>
-            <a:pPr marL="0" indent="0" algn="ctr">
+            <a:pPr algn="ctr" indent="0" marL="0">
               <a:buNone/>
             </a:pPr>
             <a:r>
@@ -5057,7 +5129,7 @@
           <a:bodyPr wrap="square" lIns="0" tIns="0" rIns="0" bIns="0" rtlCol="0" anchor="ctr"/>
           <a:lstStyle/>
           <a:p>
-            <a:pPr marL="0" indent="0" algn="ctr">
+            <a:pPr algn="ctr" indent="0" marL="0">
               <a:buNone/>
             </a:pPr>
             <a:r>
@@ -5096,7 +5168,7 @@
           <a:bodyPr wrap="square" lIns="0" tIns="0" rIns="0" bIns="0" rtlCol="0" anchor="ctr"/>
           <a:lstStyle/>
           <a:p>
-            <a:pPr marL="0" indent="0" algn="ctr">
+            <a:pPr algn="ctr" indent="0" marL="0">
               <a:buNone/>
             </a:pPr>
             <a:r>
@@ -5135,13 +5207,6 @@
           </a:solidFill>
           <a:ln/>
         </p:spPr>
-        <p:txBody>
-          <a:bodyPr/>
-          <a:lstStyle/>
-          <a:p>
-            <a:endParaRPr lang="en-EG"/>
-          </a:p>
-        </p:txBody>
       </p:sp>
       <p:sp>
         <p:nvSpPr>
@@ -5164,7 +5229,7 @@
           <a:bodyPr wrap="square" lIns="0" tIns="0" rIns="0" bIns="0" rtlCol="0" anchor="ctr"/>
           <a:lstStyle/>
           <a:p>
-            <a:pPr marL="0" indent="0" algn="ctr">
+            <a:pPr algn="ctr" indent="0" marL="0">
               <a:buNone/>
             </a:pPr>
             <a:r>
@@ -5203,7 +5268,7 @@
           <a:bodyPr wrap="square" lIns="0" tIns="0" rIns="0" bIns="0" rtlCol="0" anchor="ctr"/>
           <a:lstStyle/>
           <a:p>
-            <a:pPr marL="0" indent="0" algn="ctr">
+            <a:pPr algn="ctr" indent="0" marL="0">
               <a:buNone/>
             </a:pPr>
             <a:r>
@@ -5242,7 +5307,7 @@
           <a:bodyPr wrap="square" lIns="0" tIns="0" rIns="0" bIns="0" rtlCol="0" anchor="ctr"/>
           <a:lstStyle/>
           <a:p>
-            <a:pPr marL="0" indent="0" algn="ctr">
+            <a:pPr algn="ctr" indent="0" marL="0">
               <a:buNone/>
             </a:pPr>
             <a:r>
@@ -5281,13 +5346,6 @@
           </a:solidFill>
           <a:ln/>
         </p:spPr>
-        <p:txBody>
-          <a:bodyPr/>
-          <a:lstStyle/>
-          <a:p>
-            <a:endParaRPr lang="en-EG"/>
-          </a:p>
-        </p:txBody>
       </p:sp>
       <p:sp>
         <p:nvSpPr>
@@ -5310,7 +5368,7 @@
           <a:bodyPr wrap="square" lIns="0" tIns="0" rIns="0" bIns="0" rtlCol="0" anchor="ctr"/>
           <a:lstStyle/>
           <a:p>
-            <a:pPr marL="0" indent="0">
+            <a:pPr indent="0" marL="0">
               <a:buNone/>
             </a:pPr>
             <a:r>
@@ -5354,13 +5412,6 @@
             <a:prstDash val="solid"/>
           </a:ln>
         </p:spPr>
-        <p:txBody>
-          <a:bodyPr/>
-          <a:lstStyle/>
-          <a:p>
-            <a:endParaRPr lang="en-EG"/>
-          </a:p>
-        </p:txBody>
       </p:sp>
       <p:sp>
         <p:nvSpPr>
@@ -5383,7 +5434,7 @@
           <a:bodyPr wrap="square" lIns="0" tIns="0" rIns="0" bIns="0" rtlCol="0" anchor="ctr"/>
           <a:lstStyle/>
           <a:p>
-            <a:pPr marL="0" indent="0" algn="ctr">
+            <a:pPr algn="ctr" indent="0" marL="0">
               <a:buNone/>
             </a:pPr>
             <a:r>
@@ -5422,7 +5473,7 @@
           <a:bodyPr wrap="square" lIns="0" tIns="0" rIns="0" bIns="0" rtlCol="0" anchor="ctr"/>
           <a:lstStyle/>
           <a:p>
-            <a:pPr marL="0" indent="0">
+            <a:pPr indent="0" marL="0">
               <a:buNone/>
             </a:pPr>
             <a:r>
@@ -5466,13 +5517,6 @@
             <a:prstDash val="solid"/>
           </a:ln>
         </p:spPr>
-        <p:txBody>
-          <a:bodyPr/>
-          <a:lstStyle/>
-          <a:p>
-            <a:endParaRPr lang="en-EG"/>
-          </a:p>
-        </p:txBody>
       </p:sp>
       <p:sp>
         <p:nvSpPr>
@@ -5500,13 +5544,6 @@
             <a:prstDash val="solid"/>
           </a:ln>
         </p:spPr>
-        <p:txBody>
-          <a:bodyPr/>
-          <a:lstStyle/>
-          <a:p>
-            <a:endParaRPr lang="en-EG"/>
-          </a:p>
-        </p:txBody>
       </p:sp>
       <p:sp>
         <p:nvSpPr>
@@ -5534,13 +5571,6 @@
             <a:prstDash val="solid"/>
           </a:ln>
         </p:spPr>
-        <p:txBody>
-          <a:bodyPr/>
-          <a:lstStyle/>
-          <a:p>
-            <a:endParaRPr lang="en-EG"/>
-          </a:p>
-        </p:txBody>
       </p:sp>
       <p:sp>
         <p:nvSpPr>
@@ -5568,13 +5598,6 @@
             <a:prstDash val="solid"/>
           </a:ln>
         </p:spPr>
-        <p:txBody>
-          <a:bodyPr/>
-          <a:lstStyle/>
-          <a:p>
-            <a:endParaRPr lang="en-EG"/>
-          </a:p>
-        </p:txBody>
       </p:sp>
       <p:sp>
         <p:nvSpPr>
@@ -5602,13 +5625,6 @@
             <a:prstDash val="solid"/>
           </a:ln>
         </p:spPr>
-        <p:txBody>
-          <a:bodyPr/>
-          <a:lstStyle/>
-          <a:p>
-            <a:endParaRPr lang="en-EG"/>
-          </a:p>
-        </p:txBody>
       </p:sp>
       <p:sp>
         <p:nvSpPr>
@@ -5631,7 +5647,7 @@
           <a:bodyPr wrap="square" lIns="0" tIns="0" rIns="0" bIns="0" rtlCol="0" anchor="ctr"/>
           <a:lstStyle/>
           <a:p>
-            <a:pPr marL="0" indent="0">
+            <a:pPr indent="0" marL="0">
               <a:buNone/>
             </a:pPr>
             <a:r>
@@ -5675,13 +5691,6 @@
             <a:prstDash val="solid"/>
           </a:ln>
         </p:spPr>
-        <p:txBody>
-          <a:bodyPr/>
-          <a:lstStyle/>
-          <a:p>
-            <a:endParaRPr lang="en-EG"/>
-          </a:p>
-        </p:txBody>
       </p:sp>
       <p:sp>
         <p:nvSpPr>
@@ -5709,13 +5718,6 @@
             <a:prstDash val="solid"/>
           </a:ln>
         </p:spPr>
-        <p:txBody>
-          <a:bodyPr/>
-          <a:lstStyle/>
-          <a:p>
-            <a:endParaRPr lang="en-EG"/>
-          </a:p>
-        </p:txBody>
       </p:sp>
       <p:sp>
         <p:nvSpPr>
@@ -5743,13 +5745,6 @@
             <a:prstDash val="solid"/>
           </a:ln>
         </p:spPr>
-        <p:txBody>
-          <a:bodyPr/>
-          <a:lstStyle/>
-          <a:p>
-            <a:endParaRPr lang="en-EG"/>
-          </a:p>
-        </p:txBody>
       </p:sp>
       <p:sp>
         <p:nvSpPr>
@@ -5777,13 +5772,6 @@
             <a:prstDash val="solid"/>
           </a:ln>
         </p:spPr>
-        <p:txBody>
-          <a:bodyPr/>
-          <a:lstStyle/>
-          <a:p>
-            <a:endParaRPr lang="en-EG"/>
-          </a:p>
-        </p:txBody>
       </p:sp>
       <p:sp>
         <p:nvSpPr>
@@ -5811,13 +5799,6 @@
             <a:prstDash val="solid"/>
           </a:ln>
         </p:spPr>
-        <p:txBody>
-          <a:bodyPr/>
-          <a:lstStyle/>
-          <a:p>
-            <a:endParaRPr lang="en-EG"/>
-          </a:p>
-        </p:txBody>
       </p:sp>
       <p:sp>
         <p:nvSpPr>
@@ -5843,20 +5824,13 @@
             <a:prstDash val="solid"/>
           </a:ln>
           <a:effectLst>
-            <a:outerShdw blurRad="101600" dist="38100" dir="8100000" algn="bl" rotWithShape="0">
+            <a:outerShdw sx="100000" sy="100000" kx="0" ky="0" algn="bl" rotWithShape="0" blurRad="101600" dist="38100" dir="8100000">
               <a:srgbClr val="0F1320">
                 <a:alpha val="18000"/>
               </a:srgbClr>
             </a:outerShdw>
           </a:effectLst>
         </p:spPr>
-        <p:txBody>
-          <a:bodyPr/>
-          <a:lstStyle/>
-          <a:p>
-            <a:endParaRPr lang="en-EG"/>
-          </a:p>
-        </p:txBody>
       </p:sp>
       <p:sp>
         <p:nvSpPr>
@@ -5879,7 +5853,7 @@
           <a:bodyPr wrap="square" lIns="0" tIns="0" rIns="0" bIns="0" rtlCol="0" anchor="ctr"/>
           <a:lstStyle/>
           <a:p>
-            <a:pPr marL="0" indent="0" algn="ctr">
+            <a:pPr algn="ctr" indent="0" marL="0">
               <a:buNone/>
             </a:pPr>
             <a:r>
@@ -5921,20 +5895,13 @@
             <a:prstDash val="solid"/>
           </a:ln>
           <a:effectLst>
-            <a:outerShdw blurRad="101600" dist="38100" dir="8100000" algn="bl" rotWithShape="0">
+            <a:outerShdw sx="100000" sy="100000" kx="0" ky="0" algn="bl" rotWithShape="0" blurRad="101600" dist="38100" dir="8100000">
               <a:srgbClr val="0F1320">
                 <a:alpha val="18000"/>
               </a:srgbClr>
             </a:outerShdw>
           </a:effectLst>
         </p:spPr>
-        <p:txBody>
-          <a:bodyPr/>
-          <a:lstStyle/>
-          <a:p>
-            <a:endParaRPr lang="en-EG"/>
-          </a:p>
-        </p:txBody>
       </p:sp>
       <p:sp>
         <p:nvSpPr>
@@ -5957,7 +5924,7 @@
           <a:bodyPr wrap="square" lIns="0" tIns="0" rIns="0" bIns="0" rtlCol="0" anchor="ctr"/>
           <a:lstStyle/>
           <a:p>
-            <a:pPr marL="0" indent="0" algn="ctr">
+            <a:pPr algn="ctr" indent="0" marL="0">
               <a:buNone/>
             </a:pPr>
             <a:r>
@@ -5999,20 +5966,13 @@
             <a:prstDash val="solid"/>
           </a:ln>
           <a:effectLst>
-            <a:outerShdw blurRad="101600" dist="38100" dir="8100000" algn="bl" rotWithShape="0">
+            <a:outerShdw sx="100000" sy="100000" kx="0" ky="0" algn="bl" rotWithShape="0" blurRad="101600" dist="38100" dir="8100000">
               <a:srgbClr val="0F1320">
                 <a:alpha val="18000"/>
               </a:srgbClr>
             </a:outerShdw>
           </a:effectLst>
         </p:spPr>
-        <p:txBody>
-          <a:bodyPr/>
-          <a:lstStyle/>
-          <a:p>
-            <a:endParaRPr lang="en-EG"/>
-          </a:p>
-        </p:txBody>
       </p:sp>
       <p:sp>
         <p:nvSpPr>
@@ -6035,7 +5995,7 @@
           <a:bodyPr wrap="square" lIns="0" tIns="0" rIns="0" bIns="0" rtlCol="0" anchor="ctr"/>
           <a:lstStyle/>
           <a:p>
-            <a:pPr marL="0" indent="0" algn="ctr">
+            <a:pPr algn="ctr" indent="0" marL="0">
               <a:buNone/>
             </a:pPr>
             <a:r>
@@ -6077,20 +6037,13 @@
             <a:prstDash val="solid"/>
           </a:ln>
           <a:effectLst>
-            <a:outerShdw blurRad="101600" dist="38100" dir="8100000" algn="bl" rotWithShape="0">
+            <a:outerShdw sx="100000" sy="100000" kx="0" ky="0" algn="bl" rotWithShape="0" blurRad="101600" dist="38100" dir="8100000">
               <a:srgbClr val="0F1320">
                 <a:alpha val="18000"/>
               </a:srgbClr>
             </a:outerShdw>
           </a:effectLst>
         </p:spPr>
-        <p:txBody>
-          <a:bodyPr/>
-          <a:lstStyle/>
-          <a:p>
-            <a:endParaRPr lang="en-EG"/>
-          </a:p>
-        </p:txBody>
       </p:sp>
       <p:sp>
         <p:nvSpPr>
@@ -6113,7 +6066,7 @@
           <a:bodyPr wrap="square" lIns="0" tIns="0" rIns="0" bIns="0" rtlCol="0" anchor="ctr"/>
           <a:lstStyle/>
           <a:p>
-            <a:pPr marL="0" indent="0" algn="ctr">
+            <a:pPr algn="ctr" indent="0" marL="0">
               <a:buNone/>
             </a:pPr>
             <a:r>
@@ -6150,13 +6103,6 @@
           </a:solidFill>
           <a:ln/>
         </p:spPr>
-        <p:txBody>
-          <a:bodyPr/>
-          <a:lstStyle/>
-          <a:p>
-            <a:endParaRPr lang="en-EG"/>
-          </a:p>
-        </p:txBody>
       </p:sp>
       <p:sp>
         <p:nvSpPr>
@@ -6179,7 +6125,7 @@
           <a:bodyPr wrap="square" lIns="0" tIns="0" rIns="0" bIns="0" rtlCol="0" anchor="ctr"/>
           <a:lstStyle/>
           <a:p>
-            <a:pPr marL="0" indent="0" algn="ctr">
+            <a:pPr algn="ctr" indent="0" marL="0">
               <a:buNone/>
             </a:pPr>
             <a:r>
@@ -6218,7 +6164,7 @@
           <a:bodyPr wrap="square" lIns="0" tIns="0" rIns="0" bIns="0" rtlCol="0" anchor="t"/>
           <a:lstStyle/>
           <a:p>
-            <a:pPr marL="0" indent="0" algn="l">
+            <a:pPr algn="l" indent="0" marL="0">
               <a:lnSpc>
                 <a:spcPct val="102000"/>
               </a:lnSpc>
@@ -6235,6 +6181,12 @@
               </a:rPr>
               <a:t>Section tab  </a:t>
             </a:r>
+            <a:pPr algn="l" indent="0" marL="0">
+              <a:lnSpc>
+                <a:spcPct val="102000"/>
+              </a:lnSpc>
+              <a:buNone/>
+            </a:pPr>
             <a:r>
               <a:rPr lang="en-US" sz="1250" dirty="0">
                 <a:solidFill>
@@ -6269,13 +6221,6 @@
           </a:solidFill>
           <a:ln/>
         </p:spPr>
-        <p:txBody>
-          <a:bodyPr/>
-          <a:lstStyle/>
-          <a:p>
-            <a:endParaRPr lang="en-EG"/>
-          </a:p>
-        </p:txBody>
       </p:sp>
       <p:sp>
         <p:nvSpPr>
@@ -6298,7 +6243,7 @@
           <a:bodyPr wrap="square" lIns="0" tIns="0" rIns="0" bIns="0" rtlCol="0" anchor="ctr"/>
           <a:lstStyle/>
           <a:p>
-            <a:pPr marL="0" indent="0" algn="ctr">
+            <a:pPr algn="ctr" indent="0" marL="0">
               <a:buNone/>
             </a:pPr>
             <a:r>
@@ -6337,7 +6282,7 @@
           <a:bodyPr wrap="square" lIns="0" tIns="0" rIns="0" bIns="0" rtlCol="0" anchor="t"/>
           <a:lstStyle/>
           <a:p>
-            <a:pPr marL="0" indent="0" algn="l">
+            <a:pPr algn="l" indent="0" marL="0">
               <a:lnSpc>
                 <a:spcPct val="102000"/>
               </a:lnSpc>
@@ -6354,6 +6299,12 @@
               </a:rPr>
               <a:t>All Movies  </a:t>
             </a:r>
+            <a:pPr algn="l" indent="0" marL="0">
+              <a:lnSpc>
+                <a:spcPct val="102000"/>
+              </a:lnSpc>
+              <a:buNone/>
+            </a:pPr>
             <a:r>
               <a:rPr lang="en-US" sz="1250" dirty="0">
                 <a:solidFill>
@@ -6388,13 +6339,6 @@
           </a:solidFill>
           <a:ln/>
         </p:spPr>
-        <p:txBody>
-          <a:bodyPr/>
-          <a:lstStyle/>
-          <a:p>
-            <a:endParaRPr lang="en-EG"/>
-          </a:p>
-        </p:txBody>
       </p:sp>
       <p:sp>
         <p:nvSpPr>
@@ -6417,7 +6361,7 @@
           <a:bodyPr wrap="square" lIns="0" tIns="0" rIns="0" bIns="0" rtlCol="0" anchor="ctr"/>
           <a:lstStyle/>
           <a:p>
-            <a:pPr marL="0" indent="0" algn="ctr">
+            <a:pPr algn="ctr" indent="0" marL="0">
               <a:buNone/>
             </a:pPr>
             <a:r>
@@ -6456,7 +6400,7 @@
           <a:bodyPr wrap="square" lIns="0" tIns="0" rIns="0" bIns="0" rtlCol="0" anchor="t"/>
           <a:lstStyle/>
           <a:p>
-            <a:pPr marL="0" indent="0" algn="l">
+            <a:pPr algn="l" indent="0" marL="0">
               <a:lnSpc>
                 <a:spcPct val="102000"/>
               </a:lnSpc>
@@ -6473,6 +6417,12 @@
               </a:rPr>
               <a:t>Poster (focused)  </a:t>
             </a:r>
+            <a:pPr algn="l" indent="0" marL="0">
+              <a:lnSpc>
+                <a:spcPct val="102000"/>
+              </a:lnSpc>
+              <a:buNone/>
+            </a:pPr>
             <a:r>
               <a:rPr lang="en-US" sz="1250" dirty="0">
                 <a:solidFill>
@@ -6507,13 +6457,6 @@
           </a:solidFill>
           <a:ln/>
         </p:spPr>
-        <p:txBody>
-          <a:bodyPr/>
-          <a:lstStyle/>
-          <a:p>
-            <a:endParaRPr lang="en-EG"/>
-          </a:p>
-        </p:txBody>
       </p:sp>
       <p:sp>
         <p:nvSpPr>
@@ -6536,7 +6479,7 @@
           <a:bodyPr wrap="square" lIns="0" tIns="0" rIns="0" bIns="0" rtlCol="0" anchor="ctr"/>
           <a:lstStyle/>
           <a:p>
-            <a:pPr marL="0" indent="0" algn="ctr">
+            <a:pPr algn="ctr" indent="0" marL="0">
               <a:buNone/>
             </a:pPr>
             <a:r>
@@ -6575,7 +6518,7 @@
           <a:bodyPr wrap="square" lIns="0" tIns="0" rIns="0" bIns="0" rtlCol="0" anchor="t"/>
           <a:lstStyle/>
           <a:p>
-            <a:pPr marL="0" indent="0" algn="l">
+            <a:pPr algn="l" indent="0" marL="0">
               <a:lnSpc>
                 <a:spcPct val="102000"/>
               </a:lnSpc>
@@ -6592,6 +6535,12 @@
               </a:rPr>
               <a:t>More shelves  </a:t>
             </a:r>
+            <a:pPr algn="l" indent="0" marL="0">
+              <a:lnSpc>
+                <a:spcPct val="102000"/>
+              </a:lnSpc>
+              <a:buNone/>
+            </a:pPr>
             <a:r>
               <a:rPr lang="en-US" sz="1250" dirty="0">
                 <a:solidFill>
@@ -6628,7 +6577,7 @@
           <a:bodyPr wrap="square" lIns="0" tIns="0" rIns="0" bIns="0" rtlCol="0" anchor="t"/>
           <a:lstStyle/>
           <a:p>
-            <a:pPr marL="0" indent="0">
+            <a:pPr indent="0" marL="0">
               <a:lnSpc>
                 <a:spcPct val="105000"/>
               </a:lnSpc>
@@ -6645,6 +6594,12 @@
               </a:rPr>
               <a:t>Live </a:t>
             </a:r>
+            <a:pPr indent="0" marL="0">
+              <a:lnSpc>
+                <a:spcPct val="105000"/>
+              </a:lnSpc>
+              <a:buNone/>
+            </a:pPr>
             <a:r>
               <a:rPr lang="en-US" sz="1100" dirty="0">
                 <a:solidFill>
@@ -6681,7 +6636,7 @@
           <a:bodyPr wrap="square" lIns="0" tIns="0" rIns="0" bIns="0" rtlCol="0" anchor="ctr"/>
           <a:lstStyle/>
           <a:p>
-            <a:pPr marL="0" indent="0" algn="r">
+            <a:pPr algn="r" indent="0" marL="0">
               <a:buNone/>
             </a:pPr>
             <a:r>
@@ -6720,7 +6675,7 @@
           <a:bodyPr wrap="square" lIns="0" tIns="0" rIns="0" bIns="0" rtlCol="0" anchor="ctr"/>
           <a:lstStyle/>
           <a:p>
-            <a:pPr marL="0" indent="0" algn="l">
+            <a:pPr algn="l" indent="0" marL="0">
               <a:buNone/>
             </a:pPr>
             <a:r>
@@ -6732,7 +6687,7 @@
                 <a:ea typeface="Arial" pitchFamily="34" charset="-122"/>
                 <a:cs typeface="Arial" pitchFamily="34" charset="-120"/>
               </a:rPr>
-              <a:t>Lumen Player · UX Scenario Document</a:t>
+              <a:t>Suvo · UX Scenario Document</a:t>
             </a:r>
             <a:endParaRPr lang="en-US" sz="900" dirty="0"/>
           </a:p>
@@ -6754,7 +6709,6 @@
         <a:solidFill>
           <a:srgbClr val="F5F7FB"/>
         </a:solidFill>
-        <a:effectLst/>
       </p:bgPr>
     </p:bg>
     <p:spTree>
@@ -6792,20 +6746,13 @@
           </a:solidFill>
           <a:ln/>
           <a:effectLst>
-            <a:outerShdw blurRad="127000" dist="38100" dir="8100000" algn="bl" rotWithShape="0">
+            <a:outerShdw sx="100000" sy="100000" kx="0" ky="0" algn="bl" rotWithShape="0" blurRad="127000" dist="38100" dir="8100000">
               <a:srgbClr val="9AA6BC">
                 <a:alpha val="28000"/>
               </a:srgbClr>
             </a:outerShdw>
           </a:effectLst>
         </p:spPr>
-        <p:txBody>
-          <a:bodyPr/>
-          <a:lstStyle/>
-          <a:p>
-            <a:endParaRPr lang="en-EG"/>
-          </a:p>
-        </p:txBody>
       </p:sp>
       <p:sp>
         <p:nvSpPr>
@@ -6828,7 +6775,7 @@
           <a:bodyPr wrap="square" lIns="0" tIns="0" rIns="0" bIns="0" rtlCol="0" anchor="ctr"/>
           <a:lstStyle/>
           <a:p>
-            <a:pPr marL="0" indent="0" algn="ctr">
+            <a:pPr algn="ctr" indent="0" marL="0">
               <a:buNone/>
             </a:pPr>
             <a:r>
@@ -6867,7 +6814,7 @@
           <a:bodyPr wrap="square" lIns="0" tIns="0" rIns="0" bIns="0" rtlCol="0" anchor="ctr"/>
           <a:lstStyle/>
           <a:p>
-            <a:pPr marL="0" indent="0" algn="l">
+            <a:pPr algn="l" indent="0" marL="0">
               <a:buNone/>
             </a:pPr>
             <a:r>
@@ -6906,7 +6853,7 @@
           <a:bodyPr wrap="square" lIns="0" tIns="0" rIns="0" bIns="0" rtlCol="0" anchor="ctr"/>
           <a:lstStyle/>
           <a:p>
-            <a:pPr marL="0" indent="0" algn="l">
+            <a:pPr algn="l" indent="0" marL="0">
               <a:buNone/>
             </a:pPr>
             <a:r>
@@ -6950,20 +6897,13 @@
             <a:prstDash val="solid"/>
           </a:ln>
           <a:effectLst>
-            <a:outerShdw blurRad="101600" dist="38100" dir="8100000" algn="bl" rotWithShape="0">
+            <a:outerShdw sx="100000" sy="100000" kx="0" ky="0" algn="bl" rotWithShape="0" blurRad="101600" dist="38100" dir="8100000">
               <a:srgbClr val="0F1320">
                 <a:alpha val="18000"/>
               </a:srgbClr>
             </a:outerShdw>
           </a:effectLst>
         </p:spPr>
-        <p:txBody>
-          <a:bodyPr/>
-          <a:lstStyle/>
-          <a:p>
-            <a:endParaRPr lang="en-EG"/>
-          </a:p>
-        </p:txBody>
       </p:sp>
       <p:sp>
         <p:nvSpPr>
@@ -6986,7 +6926,7 @@
           <a:bodyPr wrap="square" lIns="0" tIns="0" rIns="0" bIns="0" rtlCol="0" anchor="ctr"/>
           <a:lstStyle/>
           <a:p>
-            <a:pPr marL="0" indent="0">
+            <a:pPr indent="0" marL="0">
               <a:buNone/>
             </a:pPr>
             <a:r>
@@ -6998,7 +6938,7 @@
                 <a:ea typeface="Trebuchet MS" pitchFamily="34" charset="-122"/>
                 <a:cs typeface="Trebuchet MS" pitchFamily="34" charset="-120"/>
               </a:rPr>
-              <a:t>Lumen</a:t>
+              <a:t>Suvo</a:t>
             </a:r>
             <a:endParaRPr lang="en-US" sz="1400" dirty="0"/>
           </a:p>
@@ -7025,7 +6965,7 @@
           <a:bodyPr wrap="square" lIns="0" tIns="0" rIns="0" bIns="0" rtlCol="0" anchor="ctr"/>
           <a:lstStyle/>
           <a:p>
-            <a:pPr marL="0" indent="0" algn="ctr">
+            <a:pPr algn="ctr" indent="0" marL="0">
               <a:buNone/>
             </a:pPr>
             <a:r>
@@ -7064,7 +7004,7 @@
           <a:bodyPr wrap="square" lIns="0" tIns="0" rIns="0" bIns="0" rtlCol="0" anchor="ctr"/>
           <a:lstStyle/>
           <a:p>
-            <a:pPr marL="0" indent="0" algn="ctr">
+            <a:pPr algn="ctr" indent="0" marL="0">
               <a:buNone/>
             </a:pPr>
             <a:r>
@@ -7103,7 +7043,7 @@
           <a:bodyPr wrap="square" lIns="0" tIns="0" rIns="0" bIns="0" rtlCol="0" anchor="ctr"/>
           <a:lstStyle/>
           <a:p>
-            <a:pPr marL="0" indent="0" algn="ctr">
+            <a:pPr algn="ctr" indent="0" marL="0">
               <a:buNone/>
             </a:pPr>
             <a:r>
@@ -7142,13 +7082,6 @@
           </a:solidFill>
           <a:ln/>
         </p:spPr>
-        <p:txBody>
-          <a:bodyPr/>
-          <a:lstStyle/>
-          <a:p>
-            <a:endParaRPr lang="en-EG"/>
-          </a:p>
-        </p:txBody>
       </p:sp>
       <p:sp>
         <p:nvSpPr>
@@ -7171,7 +7104,7 @@
           <a:bodyPr wrap="square" lIns="0" tIns="0" rIns="0" bIns="0" rtlCol="0" anchor="ctr"/>
           <a:lstStyle/>
           <a:p>
-            <a:pPr marL="0" indent="0" algn="ctr">
+            <a:pPr algn="ctr" indent="0" marL="0">
               <a:buNone/>
             </a:pPr>
             <a:r>
@@ -7210,7 +7143,7 @@
           <a:bodyPr wrap="square" lIns="0" tIns="0" rIns="0" bIns="0" rtlCol="0" anchor="ctr"/>
           <a:lstStyle/>
           <a:p>
-            <a:pPr marL="0" indent="0" algn="ctr">
+            <a:pPr algn="ctr" indent="0" marL="0">
               <a:buNone/>
             </a:pPr>
             <a:r>
@@ -7249,7 +7182,7 @@
           <a:bodyPr wrap="square" lIns="0" tIns="0" rIns="0" bIns="0" rtlCol="0" anchor="ctr"/>
           <a:lstStyle/>
           <a:p>
-            <a:pPr marL="0" indent="0" algn="ctr">
+            <a:pPr algn="ctr" indent="0" marL="0">
               <a:buNone/>
             </a:pPr>
             <a:r>
@@ -7288,13 +7221,6 @@
           </a:solidFill>
           <a:ln/>
         </p:spPr>
-        <p:txBody>
-          <a:bodyPr/>
-          <a:lstStyle/>
-          <a:p>
-            <a:endParaRPr lang="en-EG"/>
-          </a:p>
-        </p:txBody>
       </p:sp>
       <p:sp>
         <p:nvSpPr>
@@ -7317,7 +7243,7 @@
           <a:bodyPr wrap="square" lIns="0" tIns="0" rIns="0" bIns="0" rtlCol="0" anchor="ctr"/>
           <a:lstStyle/>
           <a:p>
-            <a:pPr marL="0" indent="0">
+            <a:pPr indent="0" marL="0">
               <a:buNone/>
             </a:pPr>
             <a:r>
@@ -7356,7 +7282,7 @@
           <a:bodyPr wrap="square" lIns="0" tIns="0" rIns="0" bIns="0" rtlCol="0" anchor="ctr"/>
           <a:lstStyle/>
           <a:p>
-            <a:pPr marL="0" indent="0">
+            <a:pPr indent="0" marL="0">
               <a:buNone/>
             </a:pPr>
             <a:r>
@@ -7395,7 +7321,7 @@
           <a:bodyPr wrap="square" lIns="0" tIns="0" rIns="0" bIns="0" rtlCol="0" anchor="ctr"/>
           <a:lstStyle/>
           <a:p>
-            <a:pPr marL="0" indent="0" algn="r">
+            <a:pPr algn="r" indent="0" marL="0">
               <a:buNone/>
             </a:pPr>
             <a:r>
@@ -7439,13 +7365,6 @@
             <a:prstDash val="solid"/>
           </a:ln>
         </p:spPr>
-        <p:txBody>
-          <a:bodyPr/>
-          <a:lstStyle/>
-          <a:p>
-            <a:endParaRPr lang="en-EG"/>
-          </a:p>
-        </p:txBody>
       </p:sp>
       <p:sp>
         <p:nvSpPr>
@@ -7468,7 +7387,7 @@
           <a:bodyPr wrap="square" lIns="0" tIns="0" rIns="0" bIns="0" rtlCol="0" anchor="ctr"/>
           <a:lstStyle/>
           <a:p>
-            <a:pPr marL="0" indent="0">
+            <a:pPr indent="0" marL="0">
               <a:buNone/>
             </a:pPr>
             <a:r>
@@ -7507,7 +7426,7 @@
           <a:bodyPr wrap="square" lIns="0" tIns="0" rIns="0" bIns="0" rtlCol="0" anchor="ctr"/>
           <a:lstStyle/>
           <a:p>
-            <a:pPr marL="0" indent="0">
+            <a:pPr indent="0" marL="0">
               <a:buNone/>
             </a:pPr>
             <a:r>
@@ -7521,6 +7440,9 @@
               </a:rPr>
               <a:t>ALL   </a:t>
             </a:r>
+            <a:pPr indent="0" marL="0">
+              <a:buNone/>
+            </a:pPr>
             <a:r>
               <a:rPr lang="en-US" sz="1000" dirty="0">
                 <a:solidFill>
@@ -7530,7 +7452,357 @@
                 <a:ea typeface="Arial" pitchFamily="34" charset="-122"/>
                 <a:cs typeface="Arial" pitchFamily="34" charset="-120"/>
               </a:rPr>
-              <a:t>A   B   C   D   E   F   G   H   I   J   K   L   M   N   O   P   Q   R   S   T   U   V   W   X   Y   Z</a:t>
+              <a:t>A   </a:t>
+            </a:r>
+            <a:pPr indent="0" marL="0">
+              <a:buNone/>
+            </a:pPr>
+            <a:r>
+              <a:rPr lang="en-US" sz="1000" dirty="0">
+                <a:solidFill>
+                  <a:srgbClr val="7A879E"/>
+                </a:solidFill>
+                <a:latin typeface="Arial" pitchFamily="34" charset="0"/>
+                <a:ea typeface="Arial" pitchFamily="34" charset="-122"/>
+                <a:cs typeface="Arial" pitchFamily="34" charset="-120"/>
+              </a:rPr>
+              <a:t>B   </a:t>
+            </a:r>
+            <a:pPr indent="0" marL="0">
+              <a:buNone/>
+            </a:pPr>
+            <a:r>
+              <a:rPr lang="en-US" sz="1000" dirty="0">
+                <a:solidFill>
+                  <a:srgbClr val="7A879E"/>
+                </a:solidFill>
+                <a:latin typeface="Arial" pitchFamily="34" charset="0"/>
+                <a:ea typeface="Arial" pitchFamily="34" charset="-122"/>
+                <a:cs typeface="Arial" pitchFamily="34" charset="-120"/>
+              </a:rPr>
+              <a:t>C   </a:t>
+            </a:r>
+            <a:pPr indent="0" marL="0">
+              <a:buNone/>
+            </a:pPr>
+            <a:r>
+              <a:rPr lang="en-US" sz="1000" dirty="0">
+                <a:solidFill>
+                  <a:srgbClr val="7A879E"/>
+                </a:solidFill>
+                <a:latin typeface="Arial" pitchFamily="34" charset="0"/>
+                <a:ea typeface="Arial" pitchFamily="34" charset="-122"/>
+                <a:cs typeface="Arial" pitchFamily="34" charset="-120"/>
+              </a:rPr>
+              <a:t>D   </a:t>
+            </a:r>
+            <a:pPr indent="0" marL="0">
+              <a:buNone/>
+            </a:pPr>
+            <a:r>
+              <a:rPr lang="en-US" sz="1000" dirty="0">
+                <a:solidFill>
+                  <a:srgbClr val="7A879E"/>
+                </a:solidFill>
+                <a:latin typeface="Arial" pitchFamily="34" charset="0"/>
+                <a:ea typeface="Arial" pitchFamily="34" charset="-122"/>
+                <a:cs typeface="Arial" pitchFamily="34" charset="-120"/>
+              </a:rPr>
+              <a:t>E   </a:t>
+            </a:r>
+            <a:pPr indent="0" marL="0">
+              <a:buNone/>
+            </a:pPr>
+            <a:r>
+              <a:rPr lang="en-US" sz="1000" dirty="0">
+                <a:solidFill>
+                  <a:srgbClr val="7A879E"/>
+                </a:solidFill>
+                <a:latin typeface="Arial" pitchFamily="34" charset="0"/>
+                <a:ea typeface="Arial" pitchFamily="34" charset="-122"/>
+                <a:cs typeface="Arial" pitchFamily="34" charset="-120"/>
+              </a:rPr>
+              <a:t>F   </a:t>
+            </a:r>
+            <a:pPr indent="0" marL="0">
+              <a:buNone/>
+            </a:pPr>
+            <a:r>
+              <a:rPr lang="en-US" sz="1000" dirty="0">
+                <a:solidFill>
+                  <a:srgbClr val="7A879E"/>
+                </a:solidFill>
+                <a:latin typeface="Arial" pitchFamily="34" charset="0"/>
+                <a:ea typeface="Arial" pitchFamily="34" charset="-122"/>
+                <a:cs typeface="Arial" pitchFamily="34" charset="-120"/>
+              </a:rPr>
+              <a:t>G   </a:t>
+            </a:r>
+            <a:pPr indent="0" marL="0">
+              <a:buNone/>
+            </a:pPr>
+            <a:r>
+              <a:rPr lang="en-US" sz="1000" dirty="0">
+                <a:solidFill>
+                  <a:srgbClr val="7A879E"/>
+                </a:solidFill>
+                <a:latin typeface="Arial" pitchFamily="34" charset="0"/>
+                <a:ea typeface="Arial" pitchFamily="34" charset="-122"/>
+                <a:cs typeface="Arial" pitchFamily="34" charset="-120"/>
+              </a:rPr>
+              <a:t>H   </a:t>
+            </a:r>
+            <a:pPr indent="0" marL="0">
+              <a:buNone/>
+            </a:pPr>
+            <a:r>
+              <a:rPr lang="en-US" sz="1000" dirty="0">
+                <a:solidFill>
+                  <a:srgbClr val="7A879E"/>
+                </a:solidFill>
+                <a:latin typeface="Arial" pitchFamily="34" charset="0"/>
+                <a:ea typeface="Arial" pitchFamily="34" charset="-122"/>
+                <a:cs typeface="Arial" pitchFamily="34" charset="-120"/>
+              </a:rPr>
+              <a:t>I   </a:t>
+            </a:r>
+            <a:pPr indent="0" marL="0">
+              <a:buNone/>
+            </a:pPr>
+            <a:r>
+              <a:rPr lang="en-US" sz="1000" dirty="0">
+                <a:solidFill>
+                  <a:srgbClr val="7A879E"/>
+                </a:solidFill>
+                <a:latin typeface="Arial" pitchFamily="34" charset="0"/>
+                <a:ea typeface="Arial" pitchFamily="34" charset="-122"/>
+                <a:cs typeface="Arial" pitchFamily="34" charset="-120"/>
+              </a:rPr>
+              <a:t>J   </a:t>
+            </a:r>
+            <a:pPr indent="0" marL="0">
+              <a:buNone/>
+            </a:pPr>
+            <a:r>
+              <a:rPr lang="en-US" sz="1000" dirty="0">
+                <a:solidFill>
+                  <a:srgbClr val="7A879E"/>
+                </a:solidFill>
+                <a:latin typeface="Arial" pitchFamily="34" charset="0"/>
+                <a:ea typeface="Arial" pitchFamily="34" charset="-122"/>
+                <a:cs typeface="Arial" pitchFamily="34" charset="-120"/>
+              </a:rPr>
+              <a:t>K   </a:t>
+            </a:r>
+            <a:pPr indent="0" marL="0">
+              <a:buNone/>
+            </a:pPr>
+            <a:r>
+              <a:rPr lang="en-US" sz="1000" dirty="0">
+                <a:solidFill>
+                  <a:srgbClr val="7A879E"/>
+                </a:solidFill>
+                <a:latin typeface="Arial" pitchFamily="34" charset="0"/>
+                <a:ea typeface="Arial" pitchFamily="34" charset="-122"/>
+                <a:cs typeface="Arial" pitchFamily="34" charset="-120"/>
+              </a:rPr>
+              <a:t>L   </a:t>
+            </a:r>
+            <a:pPr indent="0" marL="0">
+              <a:buNone/>
+            </a:pPr>
+            <a:r>
+              <a:rPr lang="en-US" sz="1000" dirty="0">
+                <a:solidFill>
+                  <a:srgbClr val="7A879E"/>
+                </a:solidFill>
+                <a:latin typeface="Arial" pitchFamily="34" charset="0"/>
+                <a:ea typeface="Arial" pitchFamily="34" charset="-122"/>
+                <a:cs typeface="Arial" pitchFamily="34" charset="-120"/>
+              </a:rPr>
+              <a:t>M   </a:t>
+            </a:r>
+            <a:pPr indent="0" marL="0">
+              <a:buNone/>
+            </a:pPr>
+            <a:r>
+              <a:rPr lang="en-US" sz="1000" dirty="0">
+                <a:solidFill>
+                  <a:srgbClr val="7A879E"/>
+                </a:solidFill>
+                <a:latin typeface="Arial" pitchFamily="34" charset="0"/>
+                <a:ea typeface="Arial" pitchFamily="34" charset="-122"/>
+                <a:cs typeface="Arial" pitchFamily="34" charset="-120"/>
+              </a:rPr>
+              <a:t>N   </a:t>
+            </a:r>
+            <a:pPr indent="0" marL="0">
+              <a:buNone/>
+            </a:pPr>
+            <a:r>
+              <a:rPr lang="en-US" sz="1000" dirty="0">
+                <a:solidFill>
+                  <a:srgbClr val="7A879E"/>
+                </a:solidFill>
+                <a:latin typeface="Arial" pitchFamily="34" charset="0"/>
+                <a:ea typeface="Arial" pitchFamily="34" charset="-122"/>
+                <a:cs typeface="Arial" pitchFamily="34" charset="-120"/>
+              </a:rPr>
+              <a:t>O   </a:t>
+            </a:r>
+            <a:pPr indent="0" marL="0">
+              <a:buNone/>
+            </a:pPr>
+            <a:r>
+              <a:rPr lang="en-US" sz="1000" dirty="0">
+                <a:solidFill>
+                  <a:srgbClr val="7A879E"/>
+                </a:solidFill>
+                <a:latin typeface="Arial" pitchFamily="34" charset="0"/>
+                <a:ea typeface="Arial" pitchFamily="34" charset="-122"/>
+                <a:cs typeface="Arial" pitchFamily="34" charset="-120"/>
+              </a:rPr>
+              <a:t>P   </a:t>
+            </a:r>
+            <a:pPr indent="0" marL="0">
+              <a:buNone/>
+            </a:pPr>
+            <a:r>
+              <a:rPr lang="en-US" sz="1000" dirty="0">
+                <a:solidFill>
+                  <a:srgbClr val="7A879E"/>
+                </a:solidFill>
+                <a:latin typeface="Arial" pitchFamily="34" charset="0"/>
+                <a:ea typeface="Arial" pitchFamily="34" charset="-122"/>
+                <a:cs typeface="Arial" pitchFamily="34" charset="-120"/>
+              </a:rPr>
+              <a:t>Q   </a:t>
+            </a:r>
+            <a:pPr indent="0" marL="0">
+              <a:buNone/>
+            </a:pPr>
+            <a:r>
+              <a:rPr lang="en-US" sz="1000" dirty="0">
+                <a:solidFill>
+                  <a:srgbClr val="7A879E"/>
+                </a:solidFill>
+                <a:latin typeface="Arial" pitchFamily="34" charset="0"/>
+                <a:ea typeface="Arial" pitchFamily="34" charset="-122"/>
+                <a:cs typeface="Arial" pitchFamily="34" charset="-120"/>
+              </a:rPr>
+              <a:t>R   </a:t>
+            </a:r>
+            <a:pPr indent="0" marL="0">
+              <a:buNone/>
+            </a:pPr>
+            <a:r>
+              <a:rPr lang="en-US" sz="1000" dirty="0">
+                <a:solidFill>
+                  <a:srgbClr val="7A879E"/>
+                </a:solidFill>
+                <a:latin typeface="Arial" pitchFamily="34" charset="0"/>
+                <a:ea typeface="Arial" pitchFamily="34" charset="-122"/>
+                <a:cs typeface="Arial" pitchFamily="34" charset="-120"/>
+              </a:rPr>
+              <a:t>S   </a:t>
+            </a:r>
+            <a:pPr indent="0" marL="0">
+              <a:buNone/>
+            </a:pPr>
+            <a:r>
+              <a:rPr lang="en-US" sz="1000" dirty="0">
+                <a:solidFill>
+                  <a:srgbClr val="7A879E"/>
+                </a:solidFill>
+                <a:latin typeface="Arial" pitchFamily="34" charset="0"/>
+                <a:ea typeface="Arial" pitchFamily="34" charset="-122"/>
+                <a:cs typeface="Arial" pitchFamily="34" charset="-120"/>
+              </a:rPr>
+              <a:t>T   </a:t>
+            </a:r>
+            <a:pPr indent="0" marL="0">
+              <a:buNone/>
+            </a:pPr>
+            <a:r>
+              <a:rPr lang="en-US" sz="1000" dirty="0">
+                <a:solidFill>
+                  <a:srgbClr val="7A879E"/>
+                </a:solidFill>
+                <a:latin typeface="Arial" pitchFamily="34" charset="0"/>
+                <a:ea typeface="Arial" pitchFamily="34" charset="-122"/>
+                <a:cs typeface="Arial" pitchFamily="34" charset="-120"/>
+              </a:rPr>
+              <a:t>U   </a:t>
+            </a:r>
+            <a:pPr indent="0" marL="0">
+              <a:buNone/>
+            </a:pPr>
+            <a:r>
+              <a:rPr lang="en-US" sz="1000" dirty="0">
+                <a:solidFill>
+                  <a:srgbClr val="7A879E"/>
+                </a:solidFill>
+                <a:latin typeface="Arial" pitchFamily="34" charset="0"/>
+                <a:ea typeface="Arial" pitchFamily="34" charset="-122"/>
+                <a:cs typeface="Arial" pitchFamily="34" charset="-120"/>
+              </a:rPr>
+              <a:t>V   </a:t>
+            </a:r>
+            <a:pPr indent="0" marL="0">
+              <a:buNone/>
+            </a:pPr>
+            <a:r>
+              <a:rPr lang="en-US" sz="1000" dirty="0">
+                <a:solidFill>
+                  <a:srgbClr val="7A879E"/>
+                </a:solidFill>
+                <a:latin typeface="Arial" pitchFamily="34" charset="0"/>
+                <a:ea typeface="Arial" pitchFamily="34" charset="-122"/>
+                <a:cs typeface="Arial" pitchFamily="34" charset="-120"/>
+              </a:rPr>
+              <a:t>W   </a:t>
+            </a:r>
+            <a:pPr indent="0" marL="0">
+              <a:buNone/>
+            </a:pPr>
+            <a:r>
+              <a:rPr lang="en-US" sz="1000" dirty="0">
+                <a:solidFill>
+                  <a:srgbClr val="7A879E"/>
+                </a:solidFill>
+                <a:latin typeface="Arial" pitchFamily="34" charset="0"/>
+                <a:ea typeface="Arial" pitchFamily="34" charset="-122"/>
+                <a:cs typeface="Arial" pitchFamily="34" charset="-120"/>
+              </a:rPr>
+              <a:t>X   </a:t>
+            </a:r>
+            <a:pPr indent="0" marL="0">
+              <a:buNone/>
+            </a:pPr>
+            <a:r>
+              <a:rPr lang="en-US" sz="1000" dirty="0">
+                <a:solidFill>
+                  <a:srgbClr val="7A879E"/>
+                </a:solidFill>
+                <a:latin typeface="Arial" pitchFamily="34" charset="0"/>
+                <a:ea typeface="Arial" pitchFamily="34" charset="-122"/>
+                <a:cs typeface="Arial" pitchFamily="34" charset="-120"/>
+              </a:rPr>
+              <a:t>Y   </a:t>
+            </a:r>
+            <a:pPr indent="0" marL="0">
+              <a:buNone/>
+            </a:pPr>
+            <a:r>
+              <a:rPr lang="en-US" sz="1000" dirty="0">
+                <a:solidFill>
+                  <a:srgbClr val="7A879E"/>
+                </a:solidFill>
+                <a:latin typeface="Arial" pitchFamily="34" charset="0"/>
+                <a:ea typeface="Arial" pitchFamily="34" charset="-122"/>
+                <a:cs typeface="Arial" pitchFamily="34" charset="-120"/>
+              </a:rPr>
+              <a:t>Z</a:t>
             </a:r>
             <a:endParaRPr lang="en-US" sz="1000" dirty="0"/>
           </a:p>
@@ -7562,13 +7834,6 @@
             <a:prstDash val="solid"/>
           </a:ln>
         </p:spPr>
-        <p:txBody>
-          <a:bodyPr/>
-          <a:lstStyle/>
-          <a:p>
-            <a:endParaRPr lang="en-EG"/>
-          </a:p>
-        </p:txBody>
       </p:sp>
       <p:sp>
         <p:nvSpPr>
@@ -7596,13 +7861,6 @@
             <a:prstDash val="solid"/>
           </a:ln>
         </p:spPr>
-        <p:txBody>
-          <a:bodyPr/>
-          <a:lstStyle/>
-          <a:p>
-            <a:endParaRPr lang="en-EG"/>
-          </a:p>
-        </p:txBody>
       </p:sp>
       <p:sp>
         <p:nvSpPr>
@@ -7630,13 +7888,6 @@
             <a:prstDash val="solid"/>
           </a:ln>
         </p:spPr>
-        <p:txBody>
-          <a:bodyPr/>
-          <a:lstStyle/>
-          <a:p>
-            <a:endParaRPr lang="en-EG"/>
-          </a:p>
-        </p:txBody>
       </p:sp>
       <p:sp>
         <p:nvSpPr>
@@ -7664,13 +7915,6 @@
             <a:prstDash val="solid"/>
           </a:ln>
         </p:spPr>
-        <p:txBody>
-          <a:bodyPr/>
-          <a:lstStyle/>
-          <a:p>
-            <a:endParaRPr lang="en-EG"/>
-          </a:p>
-        </p:txBody>
       </p:sp>
       <p:sp>
         <p:nvSpPr>
@@ -7698,13 +7942,6 @@
             <a:prstDash val="solid"/>
           </a:ln>
         </p:spPr>
-        <p:txBody>
-          <a:bodyPr/>
-          <a:lstStyle/>
-          <a:p>
-            <a:endParaRPr lang="en-EG"/>
-          </a:p>
-        </p:txBody>
       </p:sp>
       <p:sp>
         <p:nvSpPr>
@@ -7732,13 +7969,6 @@
             <a:prstDash val="solid"/>
           </a:ln>
         </p:spPr>
-        <p:txBody>
-          <a:bodyPr/>
-          <a:lstStyle/>
-          <a:p>
-            <a:endParaRPr lang="en-EG"/>
-          </a:p>
-        </p:txBody>
       </p:sp>
       <p:sp>
         <p:nvSpPr>
@@ -7766,13 +7996,6 @@
             <a:prstDash val="solid"/>
           </a:ln>
         </p:spPr>
-        <p:txBody>
-          <a:bodyPr/>
-          <a:lstStyle/>
-          <a:p>
-            <a:endParaRPr lang="en-EG"/>
-          </a:p>
-        </p:txBody>
       </p:sp>
       <p:sp>
         <p:nvSpPr>
@@ -7800,13 +8023,6 @@
             <a:prstDash val="solid"/>
           </a:ln>
         </p:spPr>
-        <p:txBody>
-          <a:bodyPr/>
-          <a:lstStyle/>
-          <a:p>
-            <a:endParaRPr lang="en-EG"/>
-          </a:p>
-        </p:txBody>
       </p:sp>
       <p:sp>
         <p:nvSpPr>
@@ -7834,13 +8050,6 @@
             <a:prstDash val="solid"/>
           </a:ln>
         </p:spPr>
-        <p:txBody>
-          <a:bodyPr/>
-          <a:lstStyle/>
-          <a:p>
-            <a:endParaRPr lang="en-EG"/>
-          </a:p>
-        </p:txBody>
       </p:sp>
       <p:sp>
         <p:nvSpPr>
@@ -7868,13 +8077,6 @@
             <a:prstDash val="solid"/>
           </a:ln>
         </p:spPr>
-        <p:txBody>
-          <a:bodyPr/>
-          <a:lstStyle/>
-          <a:p>
-            <a:endParaRPr lang="en-EG"/>
-          </a:p>
-        </p:txBody>
       </p:sp>
       <p:sp>
         <p:nvSpPr>
@@ -7900,20 +8102,13 @@
             <a:prstDash val="solid"/>
           </a:ln>
           <a:effectLst>
-            <a:outerShdw blurRad="101600" dist="38100" dir="8100000" algn="bl" rotWithShape="0">
+            <a:outerShdw sx="100000" sy="100000" kx="0" ky="0" algn="bl" rotWithShape="0" blurRad="101600" dist="38100" dir="8100000">
               <a:srgbClr val="0F1320">
                 <a:alpha val="18000"/>
               </a:srgbClr>
             </a:outerShdw>
           </a:effectLst>
         </p:spPr>
-        <p:txBody>
-          <a:bodyPr/>
-          <a:lstStyle/>
-          <a:p>
-            <a:endParaRPr lang="en-EG"/>
-          </a:p>
-        </p:txBody>
       </p:sp>
       <p:sp>
         <p:nvSpPr>
@@ -7936,7 +8131,7 @@
           <a:bodyPr wrap="square" lIns="0" tIns="0" rIns="0" bIns="0" rtlCol="0" anchor="ctr"/>
           <a:lstStyle/>
           <a:p>
-            <a:pPr marL="0" indent="0" algn="ctr">
+            <a:pPr algn="ctr" indent="0" marL="0">
               <a:buNone/>
             </a:pPr>
             <a:r>
@@ -7978,20 +8173,13 @@
             <a:prstDash val="solid"/>
           </a:ln>
           <a:effectLst>
-            <a:outerShdw blurRad="101600" dist="38100" dir="8100000" algn="bl" rotWithShape="0">
+            <a:outerShdw sx="100000" sy="100000" kx="0" ky="0" algn="bl" rotWithShape="0" blurRad="101600" dist="38100" dir="8100000">
               <a:srgbClr val="0F1320">
                 <a:alpha val="18000"/>
               </a:srgbClr>
             </a:outerShdw>
           </a:effectLst>
         </p:spPr>
-        <p:txBody>
-          <a:bodyPr/>
-          <a:lstStyle/>
-          <a:p>
-            <a:endParaRPr lang="en-EG"/>
-          </a:p>
-        </p:txBody>
       </p:sp>
       <p:sp>
         <p:nvSpPr>
@@ -8014,7 +8202,7 @@
           <a:bodyPr wrap="square" lIns="0" tIns="0" rIns="0" bIns="0" rtlCol="0" anchor="ctr"/>
           <a:lstStyle/>
           <a:p>
-            <a:pPr marL="0" indent="0" algn="ctr">
+            <a:pPr algn="ctr" indent="0" marL="0">
               <a:buNone/>
             </a:pPr>
             <a:r>
@@ -8056,20 +8244,13 @@
             <a:prstDash val="solid"/>
           </a:ln>
           <a:effectLst>
-            <a:outerShdw blurRad="101600" dist="38100" dir="8100000" algn="bl" rotWithShape="0">
+            <a:outerShdw sx="100000" sy="100000" kx="0" ky="0" algn="bl" rotWithShape="0" blurRad="101600" dist="38100" dir="8100000">
               <a:srgbClr val="0F1320">
                 <a:alpha val="18000"/>
               </a:srgbClr>
             </a:outerShdw>
           </a:effectLst>
         </p:spPr>
-        <p:txBody>
-          <a:bodyPr/>
-          <a:lstStyle/>
-          <a:p>
-            <a:endParaRPr lang="en-EG"/>
-          </a:p>
-        </p:txBody>
       </p:sp>
       <p:sp>
         <p:nvSpPr>
@@ -8092,7 +8273,7 @@
           <a:bodyPr wrap="square" lIns="0" tIns="0" rIns="0" bIns="0" rtlCol="0" anchor="ctr"/>
           <a:lstStyle/>
           <a:p>
-            <a:pPr marL="0" indent="0" algn="ctr">
+            <a:pPr algn="ctr" indent="0" marL="0">
               <a:buNone/>
             </a:pPr>
             <a:r>
@@ -8134,20 +8315,13 @@
             <a:prstDash val="solid"/>
           </a:ln>
           <a:effectLst>
-            <a:outerShdw blurRad="101600" dist="38100" dir="8100000" algn="bl" rotWithShape="0">
+            <a:outerShdw sx="100000" sy="100000" kx="0" ky="0" algn="bl" rotWithShape="0" blurRad="101600" dist="38100" dir="8100000">
               <a:srgbClr val="0F1320">
                 <a:alpha val="18000"/>
               </a:srgbClr>
             </a:outerShdw>
           </a:effectLst>
         </p:spPr>
-        <p:txBody>
-          <a:bodyPr/>
-          <a:lstStyle/>
-          <a:p>
-            <a:endParaRPr lang="en-EG"/>
-          </a:p>
-        </p:txBody>
       </p:sp>
       <p:sp>
         <p:nvSpPr>
@@ -8170,7 +8344,7 @@
           <a:bodyPr wrap="square" lIns="0" tIns="0" rIns="0" bIns="0" rtlCol="0" anchor="ctr"/>
           <a:lstStyle/>
           <a:p>
-            <a:pPr marL="0" indent="0" algn="ctr">
+            <a:pPr algn="ctr" indent="0" marL="0">
               <a:buNone/>
             </a:pPr>
             <a:r>
@@ -8207,13 +8381,6 @@
           </a:solidFill>
           <a:ln/>
         </p:spPr>
-        <p:txBody>
-          <a:bodyPr/>
-          <a:lstStyle/>
-          <a:p>
-            <a:endParaRPr lang="en-EG"/>
-          </a:p>
-        </p:txBody>
       </p:sp>
       <p:sp>
         <p:nvSpPr>
@@ -8236,7 +8403,7 @@
           <a:bodyPr wrap="square" lIns="0" tIns="0" rIns="0" bIns="0" rtlCol="0" anchor="ctr"/>
           <a:lstStyle/>
           <a:p>
-            <a:pPr marL="0" indent="0" algn="ctr">
+            <a:pPr algn="ctr" indent="0" marL="0">
               <a:buNone/>
             </a:pPr>
             <a:r>
@@ -8275,7 +8442,7 @@
           <a:bodyPr wrap="square" lIns="0" tIns="0" rIns="0" bIns="0" rtlCol="0" anchor="t"/>
           <a:lstStyle/>
           <a:p>
-            <a:pPr marL="0" indent="0" algn="l">
+            <a:pPr algn="l" indent="0" marL="0">
               <a:lnSpc>
                 <a:spcPct val="102000"/>
               </a:lnSpc>
@@ -8292,6 +8459,12 @@
               </a:rPr>
               <a:t>Back  </a:t>
             </a:r>
+            <a:pPr algn="l" indent="0" marL="0">
+              <a:lnSpc>
+                <a:spcPct val="102000"/>
+              </a:lnSpc>
+              <a:buNone/>
+            </a:pPr>
             <a:r>
               <a:rPr lang="en-US" sz="1250" dirty="0">
                 <a:solidFill>
@@ -8326,13 +8499,6 @@
           </a:solidFill>
           <a:ln/>
         </p:spPr>
-        <p:txBody>
-          <a:bodyPr/>
-          <a:lstStyle/>
-          <a:p>
-            <a:endParaRPr lang="en-EG"/>
-          </a:p>
-        </p:txBody>
       </p:sp>
       <p:sp>
         <p:nvSpPr>
@@ -8355,7 +8521,7 @@
           <a:bodyPr wrap="square" lIns="0" tIns="0" rIns="0" bIns="0" rtlCol="0" anchor="ctr"/>
           <a:lstStyle/>
           <a:p>
-            <a:pPr marL="0" indent="0" algn="ctr">
+            <a:pPr algn="ctr" indent="0" marL="0">
               <a:buNone/>
             </a:pPr>
             <a:r>
@@ -8394,7 +8560,7 @@
           <a:bodyPr wrap="square" lIns="0" tIns="0" rIns="0" bIns="0" rtlCol="0" anchor="t"/>
           <a:lstStyle/>
           <a:p>
-            <a:pPr marL="0" indent="0" algn="l">
+            <a:pPr algn="l" indent="0" marL="0">
               <a:lnSpc>
                 <a:spcPct val="102000"/>
               </a:lnSpc>
@@ -8411,6 +8577,12 @@
               </a:rPr>
               <a:t>Search  </a:t>
             </a:r>
+            <a:pPr algn="l" indent="0" marL="0">
+              <a:lnSpc>
+                <a:spcPct val="102000"/>
+              </a:lnSpc>
+              <a:buNone/>
+            </a:pPr>
             <a:r>
               <a:rPr lang="en-US" sz="1250" dirty="0">
                 <a:solidFill>
@@ -8445,13 +8617,6 @@
           </a:solidFill>
           <a:ln/>
         </p:spPr>
-        <p:txBody>
-          <a:bodyPr/>
-          <a:lstStyle/>
-          <a:p>
-            <a:endParaRPr lang="en-EG"/>
-          </a:p>
-        </p:txBody>
       </p:sp>
       <p:sp>
         <p:nvSpPr>
@@ -8474,7 +8639,7 @@
           <a:bodyPr wrap="square" lIns="0" tIns="0" rIns="0" bIns="0" rtlCol="0" anchor="ctr"/>
           <a:lstStyle/>
           <a:p>
-            <a:pPr marL="0" indent="0" algn="ctr">
+            <a:pPr algn="ctr" indent="0" marL="0">
               <a:buNone/>
             </a:pPr>
             <a:r>
@@ -8513,7 +8678,7 @@
           <a:bodyPr wrap="square" lIns="0" tIns="0" rIns="0" bIns="0" rtlCol="0" anchor="t"/>
           <a:lstStyle/>
           <a:p>
-            <a:pPr marL="0" indent="0" algn="l">
+            <a:pPr algn="l" indent="0" marL="0">
               <a:lnSpc>
                 <a:spcPct val="102000"/>
               </a:lnSpc>
@@ -8530,6 +8695,12 @@
               </a:rPr>
               <a:t>A–Z filter  </a:t>
             </a:r>
+            <a:pPr algn="l" indent="0" marL="0">
+              <a:lnSpc>
+                <a:spcPct val="102000"/>
+              </a:lnSpc>
+              <a:buNone/>
+            </a:pPr>
             <a:r>
               <a:rPr lang="en-US" sz="1250" dirty="0">
                 <a:solidFill>
@@ -8564,13 +8735,6 @@
           </a:solidFill>
           <a:ln/>
         </p:spPr>
-        <p:txBody>
-          <a:bodyPr/>
-          <a:lstStyle/>
-          <a:p>
-            <a:endParaRPr lang="en-EG"/>
-          </a:p>
-        </p:txBody>
       </p:sp>
       <p:sp>
         <p:nvSpPr>
@@ -8593,7 +8757,7 @@
           <a:bodyPr wrap="square" lIns="0" tIns="0" rIns="0" bIns="0" rtlCol="0" anchor="ctr"/>
           <a:lstStyle/>
           <a:p>
-            <a:pPr marL="0" indent="0" algn="ctr">
+            <a:pPr algn="ctr" indent="0" marL="0">
               <a:buNone/>
             </a:pPr>
             <a:r>
@@ -8632,7 +8796,7 @@
           <a:bodyPr wrap="square" lIns="0" tIns="0" rIns="0" bIns="0" rtlCol="0" anchor="t"/>
           <a:lstStyle/>
           <a:p>
-            <a:pPr marL="0" indent="0" algn="l">
+            <a:pPr algn="l" indent="0" marL="0">
               <a:lnSpc>
                 <a:spcPct val="102000"/>
               </a:lnSpc>
@@ -8649,6 +8813,12 @@
               </a:rPr>
               <a:t>Poster (focused)  </a:t>
             </a:r>
+            <a:pPr algn="l" indent="0" marL="0">
+              <a:lnSpc>
+                <a:spcPct val="102000"/>
+              </a:lnSpc>
+              <a:buNone/>
+            </a:pPr>
             <a:r>
               <a:rPr lang="en-US" sz="1250" dirty="0">
                 <a:solidFill>
@@ -8685,7 +8855,7 @@
           <a:bodyPr wrap="square" lIns="0" tIns="0" rIns="0" bIns="0" rtlCol="0" anchor="t"/>
           <a:lstStyle/>
           <a:p>
-            <a:pPr marL="0" indent="0">
+            <a:pPr indent="0" marL="0">
               <a:lnSpc>
                 <a:spcPct val="103000"/>
               </a:lnSpc>
@@ -8727,7 +8897,7 @@
           <a:bodyPr wrap="square" lIns="0" tIns="0" rIns="0" bIns="0" rtlCol="0" anchor="ctr"/>
           <a:lstStyle/>
           <a:p>
-            <a:pPr marL="0" indent="0" algn="r">
+            <a:pPr algn="r" indent="0" marL="0">
               <a:buNone/>
             </a:pPr>
             <a:r>
@@ -8766,7 +8936,7 @@
           <a:bodyPr wrap="square" lIns="0" tIns="0" rIns="0" bIns="0" rtlCol="0" anchor="ctr"/>
           <a:lstStyle/>
           <a:p>
-            <a:pPr marL="0" indent="0" algn="l">
+            <a:pPr algn="l" indent="0" marL="0">
               <a:buNone/>
             </a:pPr>
             <a:r>
@@ -8778,7 +8948,7 @@
                 <a:ea typeface="Arial" pitchFamily="34" charset="-122"/>
                 <a:cs typeface="Arial" pitchFamily="34" charset="-120"/>
               </a:rPr>
-              <a:t>Lumen Player · UX Scenario Document</a:t>
+              <a:t>Suvo · UX Scenario Document</a:t>
             </a:r>
             <a:endParaRPr lang="en-US" sz="900" dirty="0"/>
           </a:p>
@@ -8800,7 +8970,6 @@
         <a:solidFill>
           <a:srgbClr val="F5F7FB"/>
         </a:solidFill>
-        <a:effectLst/>
       </p:bgPr>
     </p:bg>
     <p:spTree>
@@ -8838,20 +9007,13 @@
           </a:solidFill>
           <a:ln/>
           <a:effectLst>
-            <a:outerShdw blurRad="127000" dist="38100" dir="8100000" algn="bl" rotWithShape="0">
+            <a:outerShdw sx="100000" sy="100000" kx="0" ky="0" algn="bl" rotWithShape="0" blurRad="127000" dist="38100" dir="8100000">
               <a:srgbClr val="9AA6BC">
                 <a:alpha val="28000"/>
               </a:srgbClr>
             </a:outerShdw>
           </a:effectLst>
         </p:spPr>
-        <p:txBody>
-          <a:bodyPr/>
-          <a:lstStyle/>
-          <a:p>
-            <a:endParaRPr lang="en-EG"/>
-          </a:p>
-        </p:txBody>
       </p:sp>
       <p:sp>
         <p:nvSpPr>
@@ -8874,7 +9036,7 @@
           <a:bodyPr wrap="square" lIns="0" tIns="0" rIns="0" bIns="0" rtlCol="0" anchor="ctr"/>
           <a:lstStyle/>
           <a:p>
-            <a:pPr marL="0" indent="0" algn="ctr">
+            <a:pPr algn="ctr" indent="0" marL="0">
               <a:buNone/>
             </a:pPr>
             <a:r>
@@ -8913,7 +9075,7 @@
           <a:bodyPr wrap="square" lIns="0" tIns="0" rIns="0" bIns="0" rtlCol="0" anchor="ctr"/>
           <a:lstStyle/>
           <a:p>
-            <a:pPr marL="0" indent="0" algn="l">
+            <a:pPr algn="l" indent="0" marL="0">
               <a:buNone/>
             </a:pPr>
             <a:r>
@@ -8952,7 +9114,7 @@
           <a:bodyPr wrap="square" lIns="0" tIns="0" rIns="0" bIns="0" rtlCol="0" anchor="ctr"/>
           <a:lstStyle/>
           <a:p>
-            <a:pPr marL="0" indent="0" algn="l">
+            <a:pPr algn="l" indent="0" marL="0">
               <a:buNone/>
             </a:pPr>
             <a:r>
@@ -8996,20 +9158,13 @@
             <a:prstDash val="solid"/>
           </a:ln>
           <a:effectLst>
-            <a:outerShdw blurRad="101600" dist="38100" dir="8100000" algn="bl" rotWithShape="0">
+            <a:outerShdw sx="100000" sy="100000" kx="0" ky="0" algn="bl" rotWithShape="0" blurRad="101600" dist="38100" dir="8100000">
               <a:srgbClr val="0F1320">
                 <a:alpha val="18000"/>
               </a:srgbClr>
             </a:outerShdw>
           </a:effectLst>
         </p:spPr>
-        <p:txBody>
-          <a:bodyPr/>
-          <a:lstStyle/>
-          <a:p>
-            <a:endParaRPr lang="en-EG"/>
-          </a:p>
-        </p:txBody>
       </p:sp>
       <p:sp>
         <p:nvSpPr>
@@ -9037,13 +9192,6 @@
             <a:prstDash val="solid"/>
           </a:ln>
         </p:spPr>
-        <p:txBody>
-          <a:bodyPr/>
-          <a:lstStyle/>
-          <a:p>
-            <a:endParaRPr lang="en-EG"/>
-          </a:p>
-        </p:txBody>
       </p:sp>
       <p:sp>
         <p:nvSpPr>
@@ -9066,7 +9214,7 @@
           <a:bodyPr wrap="square" lIns="0" tIns="0" rIns="0" bIns="0" rtlCol="0" anchor="ctr"/>
           <a:lstStyle/>
           <a:p>
-            <a:pPr marL="0" indent="0">
+            <a:pPr indent="0" marL="0">
               <a:buNone/>
             </a:pPr>
             <a:r>
@@ -9110,13 +9258,6 @@
             <a:prstDash val="solid"/>
           </a:ln>
         </p:spPr>
-        <p:txBody>
-          <a:bodyPr/>
-          <a:lstStyle/>
-          <a:p>
-            <a:endParaRPr lang="en-EG"/>
-          </a:p>
-        </p:txBody>
       </p:sp>
       <p:sp>
         <p:nvSpPr>
@@ -9139,7 +9280,7 @@
           <a:bodyPr wrap="square" lIns="0" tIns="0" rIns="0" bIns="0" rtlCol="0" anchor="ctr"/>
           <a:lstStyle/>
           <a:p>
-            <a:pPr marL="0" indent="0" algn="ctr">
+            <a:pPr algn="ctr" indent="0" marL="0">
               <a:buNone/>
             </a:pPr>
             <a:r>
@@ -9178,13 +9319,6 @@
           </a:solidFill>
           <a:ln/>
         </p:spPr>
-        <p:txBody>
-          <a:bodyPr/>
-          <a:lstStyle/>
-          <a:p>
-            <a:endParaRPr lang="en-EG"/>
-          </a:p>
-        </p:txBody>
       </p:sp>
       <p:sp>
         <p:nvSpPr>
@@ -9207,7 +9341,7 @@
           <a:bodyPr wrap="square" lIns="0" tIns="0" rIns="0" bIns="0" rtlCol="0" anchor="t"/>
           <a:lstStyle/>
           <a:p>
-            <a:pPr marL="0" indent="0">
+            <a:pPr indent="0" marL="0">
               <a:lnSpc>
                 <a:spcPct val="105000"/>
               </a:lnSpc>
@@ -9227,7 +9361,7 @@
             <a:endParaRPr lang="en-US" sz="1150" dirty="0"/>
           </a:p>
           <a:p>
-            <a:pPr marL="0" indent="0">
+            <a:pPr indent="0" marL="0">
               <a:lnSpc>
                 <a:spcPct val="105000"/>
               </a:lnSpc>
@@ -9247,7 +9381,7 @@
             <a:endParaRPr lang="en-US" sz="1150" dirty="0"/>
           </a:p>
           <a:p>
-            <a:pPr marL="0" indent="0">
+            <a:pPr indent="0" marL="0">
               <a:lnSpc>
                 <a:spcPct val="105000"/>
               </a:lnSpc>
@@ -9289,13 +9423,6 @@
           </a:solidFill>
           <a:ln/>
         </p:spPr>
-        <p:txBody>
-          <a:bodyPr/>
-          <a:lstStyle/>
-          <a:p>
-            <a:endParaRPr lang="en-EG"/>
-          </a:p>
-        </p:txBody>
       </p:sp>
       <p:sp>
         <p:nvSpPr>
@@ -9318,7 +9445,7 @@
           <a:bodyPr wrap="square" lIns="0" tIns="0" rIns="0" bIns="0" rtlCol="0" anchor="ctr"/>
           <a:lstStyle/>
           <a:p>
-            <a:pPr marL="0" indent="0" algn="ctr">
+            <a:pPr algn="ctr" indent="0" marL="0">
               <a:buNone/>
             </a:pPr>
             <a:r>
@@ -9362,13 +9489,6 @@
             <a:prstDash val="solid"/>
           </a:ln>
         </p:spPr>
-        <p:txBody>
-          <a:bodyPr/>
-          <a:lstStyle/>
-          <a:p>
-            <a:endParaRPr lang="en-EG"/>
-          </a:p>
-        </p:txBody>
       </p:sp>
       <p:sp>
         <p:nvSpPr>
@@ -9391,7 +9511,7 @@
           <a:bodyPr wrap="square" lIns="0" tIns="0" rIns="0" bIns="0" rtlCol="0" anchor="ctr"/>
           <a:lstStyle/>
           <a:p>
-            <a:pPr marL="0" indent="0" algn="ctr">
+            <a:pPr algn="ctr" indent="0" marL="0">
               <a:buNone/>
             </a:pPr>
             <a:r>
@@ -9430,13 +9550,6 @@
           </a:solidFill>
           <a:ln/>
         </p:spPr>
-        <p:txBody>
-          <a:bodyPr/>
-          <a:lstStyle/>
-          <a:p>
-            <a:endParaRPr lang="en-EG"/>
-          </a:p>
-        </p:txBody>
       </p:sp>
       <p:sp>
         <p:nvSpPr>
@@ -9459,7 +9572,7 @@
           <a:bodyPr wrap="square" lIns="0" tIns="0" rIns="0" bIns="0" rtlCol="0" anchor="ctr"/>
           <a:lstStyle/>
           <a:p>
-            <a:pPr marL="0" indent="0">
+            <a:pPr indent="0" marL="0">
               <a:buNone/>
             </a:pPr>
             <a:r>
@@ -9476,7 +9589,7 @@
             <a:endParaRPr lang="en-US" sz="1100" dirty="0"/>
           </a:p>
           <a:p>
-            <a:pPr marL="0" indent="0">
+            <a:pPr indent="0" marL="0">
               <a:buNone/>
             </a:pPr>
             <a:r>
@@ -9515,7 +9628,7 @@
           <a:bodyPr wrap="square" lIns="0" tIns="0" rIns="0" bIns="0" rtlCol="0" anchor="ctr"/>
           <a:lstStyle/>
           <a:p>
-            <a:pPr marL="0" indent="0" algn="r">
+            <a:pPr algn="r" indent="0" marL="0">
               <a:buNone/>
             </a:pPr>
             <a:r>
@@ -9557,20 +9670,13 @@
             <a:prstDash val="solid"/>
           </a:ln>
           <a:effectLst>
-            <a:outerShdw blurRad="101600" dist="38100" dir="8100000" algn="bl" rotWithShape="0">
+            <a:outerShdw sx="100000" sy="100000" kx="0" ky="0" algn="bl" rotWithShape="0" blurRad="101600" dist="38100" dir="8100000">
               <a:srgbClr val="0F1320">
                 <a:alpha val="18000"/>
               </a:srgbClr>
             </a:outerShdw>
           </a:effectLst>
         </p:spPr>
-        <p:txBody>
-          <a:bodyPr/>
-          <a:lstStyle/>
-          <a:p>
-            <a:endParaRPr lang="en-EG"/>
-          </a:p>
-        </p:txBody>
       </p:sp>
       <p:sp>
         <p:nvSpPr>
@@ -9593,7 +9699,7 @@
           <a:bodyPr wrap="square" lIns="0" tIns="0" rIns="0" bIns="0" rtlCol="0" anchor="ctr"/>
           <a:lstStyle/>
           <a:p>
-            <a:pPr marL="0" indent="0" algn="ctr">
+            <a:pPr algn="ctr" indent="0" marL="0">
               <a:buNone/>
             </a:pPr>
             <a:r>
@@ -9635,20 +9741,13 @@
             <a:prstDash val="solid"/>
           </a:ln>
           <a:effectLst>
-            <a:outerShdw blurRad="101600" dist="38100" dir="8100000" algn="bl" rotWithShape="0">
+            <a:outerShdw sx="100000" sy="100000" kx="0" ky="0" algn="bl" rotWithShape="0" blurRad="101600" dist="38100" dir="8100000">
               <a:srgbClr val="0F1320">
                 <a:alpha val="18000"/>
               </a:srgbClr>
             </a:outerShdw>
           </a:effectLst>
         </p:spPr>
-        <p:txBody>
-          <a:bodyPr/>
-          <a:lstStyle/>
-          <a:p>
-            <a:endParaRPr lang="en-EG"/>
-          </a:p>
-        </p:txBody>
       </p:sp>
       <p:sp>
         <p:nvSpPr>
@@ -9671,7 +9770,7 @@
           <a:bodyPr wrap="square" lIns="0" tIns="0" rIns="0" bIns="0" rtlCol="0" anchor="ctr"/>
           <a:lstStyle/>
           <a:p>
-            <a:pPr marL="0" indent="0" algn="ctr">
+            <a:pPr algn="ctr" indent="0" marL="0">
               <a:buNone/>
             </a:pPr>
             <a:r>
@@ -9713,20 +9812,13 @@
             <a:prstDash val="solid"/>
           </a:ln>
           <a:effectLst>
-            <a:outerShdw blurRad="101600" dist="38100" dir="8100000" algn="bl" rotWithShape="0">
+            <a:outerShdw sx="100000" sy="100000" kx="0" ky="0" algn="bl" rotWithShape="0" blurRad="101600" dist="38100" dir="8100000">
               <a:srgbClr val="0F1320">
                 <a:alpha val="18000"/>
               </a:srgbClr>
             </a:outerShdw>
           </a:effectLst>
         </p:spPr>
-        <p:txBody>
-          <a:bodyPr/>
-          <a:lstStyle/>
-          <a:p>
-            <a:endParaRPr lang="en-EG"/>
-          </a:p>
-        </p:txBody>
       </p:sp>
       <p:sp>
         <p:nvSpPr>
@@ -9749,7 +9841,7 @@
           <a:bodyPr wrap="square" lIns="0" tIns="0" rIns="0" bIns="0" rtlCol="0" anchor="ctr"/>
           <a:lstStyle/>
           <a:p>
-            <a:pPr marL="0" indent="0" algn="ctr">
+            <a:pPr algn="ctr" indent="0" marL="0">
               <a:buNone/>
             </a:pPr>
             <a:r>
@@ -9791,20 +9883,13 @@
             <a:prstDash val="solid"/>
           </a:ln>
           <a:effectLst>
-            <a:outerShdw blurRad="101600" dist="38100" dir="8100000" algn="bl" rotWithShape="0">
+            <a:outerShdw sx="100000" sy="100000" kx="0" ky="0" algn="bl" rotWithShape="0" blurRad="101600" dist="38100" dir="8100000">
               <a:srgbClr val="0F1320">
                 <a:alpha val="18000"/>
               </a:srgbClr>
             </a:outerShdw>
           </a:effectLst>
         </p:spPr>
-        <p:txBody>
-          <a:bodyPr/>
-          <a:lstStyle/>
-          <a:p>
-            <a:endParaRPr lang="en-EG"/>
-          </a:p>
-        </p:txBody>
       </p:sp>
       <p:sp>
         <p:nvSpPr>
@@ -9827,7 +9912,7 @@
           <a:bodyPr wrap="square" lIns="0" tIns="0" rIns="0" bIns="0" rtlCol="0" anchor="ctr"/>
           <a:lstStyle/>
           <a:p>
-            <a:pPr marL="0" indent="0" algn="ctr">
+            <a:pPr algn="ctr" indent="0" marL="0">
               <a:buNone/>
             </a:pPr>
             <a:r>
@@ -9864,13 +9949,6 @@
           </a:solidFill>
           <a:ln/>
         </p:spPr>
-        <p:txBody>
-          <a:bodyPr/>
-          <a:lstStyle/>
-          <a:p>
-            <a:endParaRPr lang="en-EG"/>
-          </a:p>
-        </p:txBody>
       </p:sp>
       <p:sp>
         <p:nvSpPr>
@@ -9893,7 +9971,7 @@
           <a:bodyPr wrap="square" lIns="0" tIns="0" rIns="0" bIns="0" rtlCol="0" anchor="ctr"/>
           <a:lstStyle/>
           <a:p>
-            <a:pPr marL="0" indent="0" algn="ctr">
+            <a:pPr algn="ctr" indent="0" marL="0">
               <a:buNone/>
             </a:pPr>
             <a:r>
@@ -9932,7 +10010,7 @@
           <a:bodyPr wrap="square" lIns="0" tIns="0" rIns="0" bIns="0" rtlCol="0" anchor="t"/>
           <a:lstStyle/>
           <a:p>
-            <a:pPr marL="0" indent="0" algn="l">
+            <a:pPr algn="l" indent="0" marL="0">
               <a:lnSpc>
                 <a:spcPct val="102000"/>
               </a:lnSpc>
@@ -9949,6 +10027,12 @@
               </a:rPr>
               <a:t>Add account  </a:t>
             </a:r>
+            <a:pPr algn="l" indent="0" marL="0">
+              <a:lnSpc>
+                <a:spcPct val="102000"/>
+              </a:lnSpc>
+              <a:buNone/>
+            </a:pPr>
             <a:r>
               <a:rPr lang="en-US" sz="1250" dirty="0">
                 <a:solidFill>
@@ -9983,13 +10067,6 @@
           </a:solidFill>
           <a:ln/>
         </p:spPr>
-        <p:txBody>
-          <a:bodyPr/>
-          <a:lstStyle/>
-          <a:p>
-            <a:endParaRPr lang="en-EG"/>
-          </a:p>
-        </p:txBody>
       </p:sp>
       <p:sp>
         <p:nvSpPr>
@@ -10012,7 +10089,7 @@
           <a:bodyPr wrap="square" lIns="0" tIns="0" rIns="0" bIns="0" rtlCol="0" anchor="ctr"/>
           <a:lstStyle/>
           <a:p>
-            <a:pPr marL="0" indent="0" algn="ctr">
+            <a:pPr algn="ctr" indent="0" marL="0">
               <a:buNone/>
             </a:pPr>
             <a:r>
@@ -10051,7 +10128,7 @@
           <a:bodyPr wrap="square" lIns="0" tIns="0" rIns="0" bIns="0" rtlCol="0" anchor="t"/>
           <a:lstStyle/>
           <a:p>
-            <a:pPr marL="0" indent="0" algn="l">
+            <a:pPr algn="l" indent="0" marL="0">
               <a:lnSpc>
                 <a:spcPct val="102000"/>
               </a:lnSpc>
@@ -10068,6 +10145,12 @@
               </a:rPr>
               <a:t>Playlist entry  </a:t>
             </a:r>
+            <a:pPr algn="l" indent="0" marL="0">
+              <a:lnSpc>
+                <a:spcPct val="102000"/>
+              </a:lnSpc>
+              <a:buNone/>
+            </a:pPr>
             <a:r>
               <a:rPr lang="en-US" sz="1250" dirty="0">
                 <a:solidFill>
@@ -10102,13 +10185,6 @@
           </a:solidFill>
           <a:ln/>
         </p:spPr>
-        <p:txBody>
-          <a:bodyPr/>
-          <a:lstStyle/>
-          <a:p>
-            <a:endParaRPr lang="en-EG"/>
-          </a:p>
-        </p:txBody>
       </p:sp>
       <p:sp>
         <p:nvSpPr>
@@ -10131,7 +10207,7 @@
           <a:bodyPr wrap="square" lIns="0" tIns="0" rIns="0" bIns="0" rtlCol="0" anchor="ctr"/>
           <a:lstStyle/>
           <a:p>
-            <a:pPr marL="0" indent="0" algn="ctr">
+            <a:pPr algn="ctr" indent="0" marL="0">
               <a:buNone/>
             </a:pPr>
             <a:r>
@@ -10170,7 +10246,7 @@
           <a:bodyPr wrap="square" lIns="0" tIns="0" rIns="0" bIns="0" rtlCol="0" anchor="t"/>
           <a:lstStyle/>
           <a:p>
-            <a:pPr marL="0" indent="0" algn="l">
+            <a:pPr algn="l" indent="0" marL="0">
               <a:lnSpc>
                 <a:spcPct val="102000"/>
               </a:lnSpc>
@@ -10187,6 +10263,12 @@
               </a:rPr>
               <a:t>Edit / Delete  </a:t>
             </a:r>
+            <a:pPr algn="l" indent="0" marL="0">
+              <a:lnSpc>
+                <a:spcPct val="102000"/>
+              </a:lnSpc>
+              <a:buNone/>
+            </a:pPr>
             <a:r>
               <a:rPr lang="en-US" sz="1250" dirty="0">
                 <a:solidFill>
@@ -10221,13 +10303,6 @@
           </a:solidFill>
           <a:ln/>
         </p:spPr>
-        <p:txBody>
-          <a:bodyPr/>
-          <a:lstStyle/>
-          <a:p>
-            <a:endParaRPr lang="en-EG"/>
-          </a:p>
-        </p:txBody>
       </p:sp>
       <p:sp>
         <p:nvSpPr>
@@ -10250,7 +10325,7 @@
           <a:bodyPr wrap="square" lIns="0" tIns="0" rIns="0" bIns="0" rtlCol="0" anchor="ctr"/>
           <a:lstStyle/>
           <a:p>
-            <a:pPr marL="0" indent="0" algn="ctr">
+            <a:pPr algn="ctr" indent="0" marL="0">
               <a:buNone/>
             </a:pPr>
             <a:r>
@@ -10289,7 +10364,7 @@
           <a:bodyPr wrap="square" lIns="0" tIns="0" rIns="0" bIns="0" rtlCol="0" anchor="t"/>
           <a:lstStyle/>
           <a:p>
-            <a:pPr marL="0" indent="0" algn="l">
+            <a:pPr algn="l" indent="0" marL="0">
               <a:lnSpc>
                 <a:spcPct val="102000"/>
               </a:lnSpc>
@@ -10306,6 +10381,12 @@
               </a:rPr>
               <a:t>TV Layout  </a:t>
             </a:r>
+            <a:pPr algn="l" indent="0" marL="0">
+              <a:lnSpc>
+                <a:spcPct val="102000"/>
+              </a:lnSpc>
+              <a:buNone/>
+            </a:pPr>
             <a:r>
               <a:rPr lang="en-US" sz="1250" dirty="0">
                 <a:solidFill>
@@ -10342,7 +10423,7 @@
           <a:bodyPr wrap="square" lIns="0" tIns="0" rIns="0" bIns="0" rtlCol="0" anchor="t"/>
           <a:lstStyle/>
           <a:p>
-            <a:pPr marL="0" indent="0">
+            <a:pPr indent="0" marL="0">
               <a:lnSpc>
                 <a:spcPct val="103000"/>
               </a:lnSpc>
@@ -10357,7 +10438,7 @@
                 <a:ea typeface="Arial" pitchFamily="34" charset="-122"/>
                 <a:cs typeface="Arial" pitchFamily="34" charset="-120"/>
               </a:rPr>
-              <a:t>Reviewers enter the sample playlist from the Test Accounts page here. Lumen Player stores and supplies no playlists of its own.</a:t>
+              <a:t>Reviewers enter the sample playlist from the Test Accounts page here. Suvo stores and supplies no playlists of its own.</a:t>
             </a:r>
             <a:endParaRPr lang="en-US" sz="1050" dirty="0"/>
           </a:p>
@@ -10384,7 +10465,7 @@
           <a:bodyPr wrap="square" lIns="0" tIns="0" rIns="0" bIns="0" rtlCol="0" anchor="ctr"/>
           <a:lstStyle/>
           <a:p>
-            <a:pPr marL="0" indent="0" algn="r">
+            <a:pPr algn="r" indent="0" marL="0">
               <a:buNone/>
             </a:pPr>
             <a:r>
@@ -10423,7 +10504,7 @@
           <a:bodyPr wrap="square" lIns="0" tIns="0" rIns="0" bIns="0" rtlCol="0" anchor="ctr"/>
           <a:lstStyle/>
           <a:p>
-            <a:pPr marL="0" indent="0" algn="l">
+            <a:pPr algn="l" indent="0" marL="0">
               <a:buNone/>
             </a:pPr>
             <a:r>
@@ -10435,7 +10516,7 @@
                 <a:ea typeface="Arial" pitchFamily="34" charset="-122"/>
                 <a:cs typeface="Arial" pitchFamily="34" charset="-120"/>
               </a:rPr>
-              <a:t>Lumen Player · UX Scenario Document</a:t>
+              <a:t>Suvo · UX Scenario Document</a:t>
             </a:r>
             <a:endParaRPr lang="en-US" sz="900" dirty="0"/>
           </a:p>
@@ -10457,7 +10538,6 @@
         <a:solidFill>
           <a:srgbClr val="F5F7FB"/>
         </a:solidFill>
-        <a:effectLst/>
       </p:bgPr>
     </p:bg>
     <p:spTree>
@@ -10495,20 +10575,13 @@
           </a:solidFill>
           <a:ln/>
           <a:effectLst>
-            <a:outerShdw blurRad="127000" dist="38100" dir="8100000" algn="bl" rotWithShape="0">
+            <a:outerShdw sx="100000" sy="100000" kx="0" ky="0" algn="bl" rotWithShape="0" blurRad="127000" dist="38100" dir="8100000">
               <a:srgbClr val="9AA6BC">
                 <a:alpha val="28000"/>
               </a:srgbClr>
             </a:outerShdw>
           </a:effectLst>
         </p:spPr>
-        <p:txBody>
-          <a:bodyPr/>
-          <a:lstStyle/>
-          <a:p>
-            <a:endParaRPr lang="en-EG"/>
-          </a:p>
-        </p:txBody>
       </p:sp>
       <p:sp>
         <p:nvSpPr>
@@ -10531,7 +10604,7 @@
           <a:bodyPr wrap="square" lIns="0" tIns="0" rIns="0" bIns="0" rtlCol="0" anchor="ctr"/>
           <a:lstStyle/>
           <a:p>
-            <a:pPr marL="0" indent="0" algn="ctr">
+            <a:pPr algn="ctr" indent="0" marL="0">
               <a:buNone/>
             </a:pPr>
             <a:r>
@@ -10570,7 +10643,7 @@
           <a:bodyPr wrap="square" lIns="0" tIns="0" rIns="0" bIns="0" rtlCol="0" anchor="ctr"/>
           <a:lstStyle/>
           <a:p>
-            <a:pPr marL="0" indent="0" algn="l">
+            <a:pPr algn="l" indent="0" marL="0">
               <a:buNone/>
             </a:pPr>
             <a:r>
@@ -10609,7 +10682,7 @@
           <a:bodyPr wrap="square" lIns="0" tIns="0" rIns="0" bIns="0" rtlCol="0" anchor="ctr"/>
           <a:lstStyle/>
           <a:p>
-            <a:pPr marL="0" indent="0" algn="l">
+            <a:pPr algn="l" indent="0" marL="0">
               <a:buNone/>
             </a:pPr>
             <a:r>
@@ -10653,20 +10726,13 @@
             <a:prstDash val="solid"/>
           </a:ln>
           <a:effectLst>
-            <a:outerShdw blurRad="101600" dist="38100" dir="8100000" algn="bl" rotWithShape="0">
+            <a:outerShdw sx="100000" sy="100000" kx="0" ky="0" algn="bl" rotWithShape="0" blurRad="101600" dist="38100" dir="8100000">
               <a:srgbClr val="0F1320">
                 <a:alpha val="18000"/>
               </a:srgbClr>
             </a:outerShdw>
           </a:effectLst>
         </p:spPr>
-        <p:txBody>
-          <a:bodyPr/>
-          <a:lstStyle/>
-          <a:p>
-            <a:endParaRPr lang="en-EG"/>
-          </a:p>
-        </p:txBody>
       </p:sp>
       <p:sp>
         <p:nvSpPr>
@@ -10692,13 +10758,6 @@
             <a:prstDash val="solid"/>
           </a:ln>
         </p:spPr>
-        <p:txBody>
-          <a:bodyPr/>
-          <a:lstStyle/>
-          <a:p>
-            <a:endParaRPr lang="en-EG"/>
-          </a:p>
-        </p:txBody>
       </p:sp>
       <p:sp>
         <p:nvSpPr>
@@ -10721,7 +10780,7 @@
           <a:bodyPr wrap="square" lIns="0" tIns="0" rIns="0" bIns="0" rtlCol="0" anchor="ctr"/>
           <a:lstStyle/>
           <a:p>
-            <a:pPr marL="0" indent="0" algn="ctr">
+            <a:pPr algn="ctr" indent="0" marL="0">
               <a:buNone/>
             </a:pPr>
             <a:r>
@@ -10760,7 +10819,7 @@
           <a:bodyPr wrap="square" lIns="0" tIns="0" rIns="0" bIns="0" rtlCol="0" anchor="ctr"/>
           <a:lstStyle/>
           <a:p>
-            <a:pPr marL="0" indent="0">
+            <a:pPr indent="0" marL="0">
               <a:buNone/>
             </a:pPr>
             <a:r>
@@ -10799,7 +10858,7 @@
           <a:bodyPr wrap="square" lIns="0" tIns="0" rIns="0" bIns="0" rtlCol="0" anchor="ctr"/>
           <a:lstStyle/>
           <a:p>
-            <a:pPr marL="0" indent="0">
+            <a:pPr indent="0" marL="0">
               <a:buNone/>
             </a:pPr>
             <a:r>
@@ -10838,13 +10897,6 @@
           </a:solidFill>
           <a:ln/>
         </p:spPr>
-        <p:txBody>
-          <a:bodyPr/>
-          <a:lstStyle/>
-          <a:p>
-            <a:endParaRPr lang="en-EG"/>
-          </a:p>
-        </p:txBody>
       </p:sp>
       <p:sp>
         <p:nvSpPr>
@@ -10867,13 +10919,6 @@
           </a:solidFill>
           <a:ln/>
         </p:spPr>
-        <p:txBody>
-          <a:bodyPr/>
-          <a:lstStyle/>
-          <a:p>
-            <a:endParaRPr lang="en-EG"/>
-          </a:p>
-        </p:txBody>
       </p:sp>
       <p:sp>
         <p:nvSpPr>
@@ -10894,13 +10939,6 @@
           </a:solidFill>
           <a:ln/>
         </p:spPr>
-        <p:txBody>
-          <a:bodyPr/>
-          <a:lstStyle/>
-          <a:p>
-            <a:endParaRPr lang="en-EG"/>
-          </a:p>
-        </p:txBody>
       </p:sp>
       <p:sp>
         <p:nvSpPr>
@@ -10923,7 +10961,7 @@
           <a:bodyPr wrap="square" lIns="0" tIns="0" rIns="0" bIns="0" rtlCol="0" anchor="ctr"/>
           <a:lstStyle/>
           <a:p>
-            <a:pPr marL="0" indent="0">
+            <a:pPr indent="0" marL="0">
               <a:buNone/>
             </a:pPr>
             <a:r>
@@ -10960,13 +10998,6 @@
           </a:solidFill>
           <a:ln/>
         </p:spPr>
-        <p:txBody>
-          <a:bodyPr/>
-          <a:lstStyle/>
-          <a:p>
-            <a:endParaRPr lang="en-EG"/>
-          </a:p>
-        </p:txBody>
       </p:sp>
       <p:sp>
         <p:nvSpPr>
@@ -10989,7 +11020,7 @@
           <a:bodyPr wrap="square" lIns="0" tIns="0" rIns="0" bIns="0" rtlCol="0" anchor="ctr"/>
           <a:lstStyle/>
           <a:p>
-            <a:pPr marL="0" indent="0" algn="ctr">
+            <a:pPr algn="ctr" indent="0" marL="0">
               <a:buNone/>
             </a:pPr>
             <a:r>
@@ -11026,13 +11057,6 @@
           </a:solidFill>
           <a:ln/>
         </p:spPr>
-        <p:txBody>
-          <a:bodyPr/>
-          <a:lstStyle/>
-          <a:p>
-            <a:endParaRPr lang="en-EG"/>
-          </a:p>
-        </p:txBody>
       </p:sp>
       <p:sp>
         <p:nvSpPr>
@@ -11055,7 +11079,7 @@
           <a:bodyPr wrap="square" lIns="0" tIns="0" rIns="0" bIns="0" rtlCol="0" anchor="ctr"/>
           <a:lstStyle/>
           <a:p>
-            <a:pPr marL="0" indent="0" algn="ctr">
+            <a:pPr algn="ctr" indent="0" marL="0">
               <a:buNone/>
             </a:pPr>
             <a:r>
@@ -11092,13 +11116,6 @@
           </a:solidFill>
           <a:ln/>
         </p:spPr>
-        <p:txBody>
-          <a:bodyPr/>
-          <a:lstStyle/>
-          <a:p>
-            <a:endParaRPr lang="en-EG"/>
-          </a:p>
-        </p:txBody>
       </p:sp>
       <p:sp>
         <p:nvSpPr>
@@ -11121,7 +11138,7 @@
           <a:bodyPr wrap="square" lIns="0" tIns="0" rIns="0" bIns="0" rtlCol="0" anchor="ctr"/>
           <a:lstStyle/>
           <a:p>
-            <a:pPr marL="0" indent="0" algn="ctr">
+            <a:pPr algn="ctr" indent="0" marL="0">
               <a:buNone/>
             </a:pPr>
             <a:r>
@@ -11163,20 +11180,13 @@
             <a:prstDash val="solid"/>
           </a:ln>
           <a:effectLst>
-            <a:outerShdw blurRad="101600" dist="38100" dir="8100000" algn="bl" rotWithShape="0">
+            <a:outerShdw sx="100000" sy="100000" kx="0" ky="0" algn="bl" rotWithShape="0" blurRad="101600" dist="38100" dir="8100000">
               <a:srgbClr val="0F1320">
                 <a:alpha val="18000"/>
               </a:srgbClr>
             </a:outerShdw>
           </a:effectLst>
         </p:spPr>
-        <p:txBody>
-          <a:bodyPr/>
-          <a:lstStyle/>
-          <a:p>
-            <a:endParaRPr lang="en-EG"/>
-          </a:p>
-        </p:txBody>
       </p:sp>
       <p:sp>
         <p:nvSpPr>
@@ -11199,7 +11209,7 @@
           <a:bodyPr wrap="square" lIns="0" tIns="0" rIns="0" bIns="0" rtlCol="0" anchor="ctr"/>
           <a:lstStyle/>
           <a:p>
-            <a:pPr marL="0" indent="0" algn="ctr">
+            <a:pPr algn="ctr" indent="0" marL="0">
               <a:buNone/>
             </a:pPr>
             <a:r>
@@ -11241,20 +11251,13 @@
             <a:prstDash val="solid"/>
           </a:ln>
           <a:effectLst>
-            <a:outerShdw blurRad="101600" dist="38100" dir="8100000" algn="bl" rotWithShape="0">
+            <a:outerShdw sx="100000" sy="100000" kx="0" ky="0" algn="bl" rotWithShape="0" blurRad="101600" dist="38100" dir="8100000">
               <a:srgbClr val="0F1320">
                 <a:alpha val="18000"/>
               </a:srgbClr>
             </a:outerShdw>
           </a:effectLst>
         </p:spPr>
-        <p:txBody>
-          <a:bodyPr/>
-          <a:lstStyle/>
-          <a:p>
-            <a:endParaRPr lang="en-EG"/>
-          </a:p>
-        </p:txBody>
       </p:sp>
       <p:sp>
         <p:nvSpPr>
@@ -11277,7 +11280,7 @@
           <a:bodyPr wrap="square" lIns="0" tIns="0" rIns="0" bIns="0" rtlCol="0" anchor="ctr"/>
           <a:lstStyle/>
           <a:p>
-            <a:pPr marL="0" indent="0" algn="ctr">
+            <a:pPr algn="ctr" indent="0" marL="0">
               <a:buNone/>
             </a:pPr>
             <a:r>
@@ -11319,20 +11322,13 @@
             <a:prstDash val="solid"/>
           </a:ln>
           <a:effectLst>
-            <a:outerShdw blurRad="101600" dist="38100" dir="8100000" algn="bl" rotWithShape="0">
+            <a:outerShdw sx="100000" sy="100000" kx="0" ky="0" algn="bl" rotWithShape="0" blurRad="101600" dist="38100" dir="8100000">
               <a:srgbClr val="0F1320">
                 <a:alpha val="18000"/>
               </a:srgbClr>
             </a:outerShdw>
           </a:effectLst>
         </p:spPr>
-        <p:txBody>
-          <a:bodyPr/>
-          <a:lstStyle/>
-          <a:p>
-            <a:endParaRPr lang="en-EG"/>
-          </a:p>
-        </p:txBody>
       </p:sp>
       <p:sp>
         <p:nvSpPr>
@@ -11355,7 +11351,7 @@
           <a:bodyPr wrap="square" lIns="0" tIns="0" rIns="0" bIns="0" rtlCol="0" anchor="ctr"/>
           <a:lstStyle/>
           <a:p>
-            <a:pPr marL="0" indent="0" algn="ctr">
+            <a:pPr algn="ctr" indent="0" marL="0">
               <a:buNone/>
             </a:pPr>
             <a:r>
@@ -11397,20 +11393,13 @@
             <a:prstDash val="solid"/>
           </a:ln>
           <a:effectLst>
-            <a:outerShdw blurRad="101600" dist="38100" dir="8100000" algn="bl" rotWithShape="0">
+            <a:outerShdw sx="100000" sy="100000" kx="0" ky="0" algn="bl" rotWithShape="0" blurRad="101600" dist="38100" dir="8100000">
               <a:srgbClr val="0F1320">
                 <a:alpha val="18000"/>
               </a:srgbClr>
             </a:outerShdw>
           </a:effectLst>
         </p:spPr>
-        <p:txBody>
-          <a:bodyPr/>
-          <a:lstStyle/>
-          <a:p>
-            <a:endParaRPr lang="en-EG"/>
-          </a:p>
-        </p:txBody>
       </p:sp>
       <p:sp>
         <p:nvSpPr>
@@ -11433,7 +11422,7 @@
           <a:bodyPr wrap="square" lIns="0" tIns="0" rIns="0" bIns="0" rtlCol="0" anchor="ctr"/>
           <a:lstStyle/>
           <a:p>
-            <a:pPr marL="0" indent="0" algn="ctr">
+            <a:pPr algn="ctr" indent="0" marL="0">
               <a:buNone/>
             </a:pPr>
             <a:r>
@@ -11470,13 +11459,6 @@
           </a:solidFill>
           <a:ln/>
         </p:spPr>
-        <p:txBody>
-          <a:bodyPr/>
-          <a:lstStyle/>
-          <a:p>
-            <a:endParaRPr lang="en-EG"/>
-          </a:p>
-        </p:txBody>
       </p:sp>
       <p:sp>
         <p:nvSpPr>
@@ -11499,7 +11481,7 @@
           <a:bodyPr wrap="square" lIns="0" tIns="0" rIns="0" bIns="0" rtlCol="0" anchor="ctr"/>
           <a:lstStyle/>
           <a:p>
-            <a:pPr marL="0" indent="0" algn="ctr">
+            <a:pPr algn="ctr" indent="0" marL="0">
               <a:buNone/>
             </a:pPr>
             <a:r>
@@ -11538,7 +11520,7 @@
           <a:bodyPr wrap="square" lIns="0" tIns="0" rIns="0" bIns="0" rtlCol="0" anchor="t"/>
           <a:lstStyle/>
           <a:p>
-            <a:pPr marL="0" indent="0" algn="l">
+            <a:pPr algn="l" indent="0" marL="0">
               <a:lnSpc>
                 <a:spcPct val="102000"/>
               </a:lnSpc>
@@ -11555,6 +11537,12 @@
               </a:rPr>
               <a:t>Play / Pause &amp; seek  </a:t>
             </a:r>
+            <a:pPr algn="l" indent="0" marL="0">
+              <a:lnSpc>
+                <a:spcPct val="102000"/>
+              </a:lnSpc>
+              <a:buNone/>
+            </a:pPr>
             <a:r>
               <a:rPr lang="en-US" sz="1250" dirty="0">
                 <a:solidFill>
@@ -11589,13 +11577,6 @@
           </a:solidFill>
           <a:ln/>
         </p:spPr>
-        <p:txBody>
-          <a:bodyPr/>
-          <a:lstStyle/>
-          <a:p>
-            <a:endParaRPr lang="en-EG"/>
-          </a:p>
-        </p:txBody>
       </p:sp>
       <p:sp>
         <p:nvSpPr>
@@ -11618,7 +11599,7 @@
           <a:bodyPr wrap="square" lIns="0" tIns="0" rIns="0" bIns="0" rtlCol="0" anchor="ctr"/>
           <a:lstStyle/>
           <a:p>
-            <a:pPr marL="0" indent="0" algn="ctr">
+            <a:pPr algn="ctr" indent="0" marL="0">
               <a:buNone/>
             </a:pPr>
             <a:r>
@@ -11657,7 +11638,7 @@
           <a:bodyPr wrap="square" lIns="0" tIns="0" rIns="0" bIns="0" rtlCol="0" anchor="t"/>
           <a:lstStyle/>
           <a:p>
-            <a:pPr marL="0" indent="0" algn="l">
+            <a:pPr algn="l" indent="0" marL="0">
               <a:lnSpc>
                 <a:spcPct val="102000"/>
               </a:lnSpc>
@@ -11674,6 +11655,12 @@
               </a:rPr>
               <a:t>Progress bar  </a:t>
             </a:r>
+            <a:pPr algn="l" indent="0" marL="0">
+              <a:lnSpc>
+                <a:spcPct val="102000"/>
+              </a:lnSpc>
+              <a:buNone/>
+            </a:pPr>
             <a:r>
               <a:rPr lang="en-US" sz="1250" dirty="0">
                 <a:solidFill>
@@ -11708,13 +11695,6 @@
           </a:solidFill>
           <a:ln/>
         </p:spPr>
-        <p:txBody>
-          <a:bodyPr/>
-          <a:lstStyle/>
-          <a:p>
-            <a:endParaRPr lang="en-EG"/>
-          </a:p>
-        </p:txBody>
       </p:sp>
       <p:sp>
         <p:nvSpPr>
@@ -11737,7 +11717,7 @@
           <a:bodyPr wrap="square" lIns="0" tIns="0" rIns="0" bIns="0" rtlCol="0" anchor="ctr"/>
           <a:lstStyle/>
           <a:p>
-            <a:pPr marL="0" indent="0" algn="ctr">
+            <a:pPr algn="ctr" indent="0" marL="0">
               <a:buNone/>
             </a:pPr>
             <a:r>
@@ -11776,7 +11756,7 @@
           <a:bodyPr wrap="square" lIns="0" tIns="0" rIns="0" bIns="0" rtlCol="0" anchor="t"/>
           <a:lstStyle/>
           <a:p>
-            <a:pPr marL="0" indent="0" algn="l">
+            <a:pPr algn="l" indent="0" marL="0">
               <a:lnSpc>
                 <a:spcPct val="102000"/>
               </a:lnSpc>
@@ -11793,6 +11773,12 @@
               </a:rPr>
               <a:t>Title &amp; metadata  </a:t>
             </a:r>
+            <a:pPr algn="l" indent="0" marL="0">
+              <a:lnSpc>
+                <a:spcPct val="102000"/>
+              </a:lnSpc>
+              <a:buNone/>
+            </a:pPr>
             <a:r>
               <a:rPr lang="en-US" sz="1250" dirty="0">
                 <a:solidFill>
@@ -11827,13 +11813,6 @@
           </a:solidFill>
           <a:ln/>
         </p:spPr>
-        <p:txBody>
-          <a:bodyPr/>
-          <a:lstStyle/>
-          <a:p>
-            <a:endParaRPr lang="en-EG"/>
-          </a:p>
-        </p:txBody>
       </p:sp>
       <p:sp>
         <p:nvSpPr>
@@ -11856,7 +11835,7 @@
           <a:bodyPr wrap="square" lIns="0" tIns="0" rIns="0" bIns="0" rtlCol="0" anchor="ctr"/>
           <a:lstStyle/>
           <a:p>
-            <a:pPr marL="0" indent="0" algn="ctr">
+            <a:pPr algn="ctr" indent="0" marL="0">
               <a:buNone/>
             </a:pPr>
             <a:r>
@@ -11895,7 +11874,7 @@
           <a:bodyPr wrap="square" lIns="0" tIns="0" rIns="0" bIns="0" rtlCol="0" anchor="t"/>
           <a:lstStyle/>
           <a:p>
-            <a:pPr marL="0" indent="0" algn="l">
+            <a:pPr algn="l" indent="0" marL="0">
               <a:lnSpc>
                 <a:spcPct val="102000"/>
               </a:lnSpc>
@@ -11912,6 +11891,12 @@
               </a:rPr>
               <a:t>Playback surface  </a:t>
             </a:r>
+            <a:pPr algn="l" indent="0" marL="0">
+              <a:lnSpc>
+                <a:spcPct val="102000"/>
+              </a:lnSpc>
+              <a:buNone/>
+            </a:pPr>
             <a:r>
               <a:rPr lang="en-US" sz="1250" dirty="0">
                 <a:solidFill>
@@ -11948,7 +11933,7 @@
           <a:bodyPr wrap="square" lIns="0" tIns="0" rIns="0" bIns="0" rtlCol="0" anchor="t"/>
           <a:lstStyle/>
           <a:p>
-            <a:pPr marL="0" indent="0">
+            <a:pPr indent="0" marL="0">
               <a:lnSpc>
                 <a:spcPct val="104000"/>
               </a:lnSpc>
@@ -11990,7 +11975,7 @@
           <a:bodyPr wrap="square" lIns="0" tIns="0" rIns="0" bIns="0" rtlCol="0" anchor="ctr"/>
           <a:lstStyle/>
           <a:p>
-            <a:pPr marL="0" indent="0" algn="r">
+            <a:pPr algn="r" indent="0" marL="0">
               <a:buNone/>
             </a:pPr>
             <a:r>
@@ -12029,7 +12014,7 @@
           <a:bodyPr wrap="square" lIns="0" tIns="0" rIns="0" bIns="0" rtlCol="0" anchor="ctr"/>
           <a:lstStyle/>
           <a:p>
-            <a:pPr marL="0" indent="0" algn="l">
+            <a:pPr algn="l" indent="0" marL="0">
               <a:buNone/>
             </a:pPr>
             <a:r>
@@ -12041,7 +12026,7 @@
                 <a:ea typeface="Arial" pitchFamily="34" charset="-122"/>
                 <a:cs typeface="Arial" pitchFamily="34" charset="-120"/>
               </a:rPr>
-              <a:t>Lumen Player · UX Scenario Document</a:t>
+              <a:t>Suvo · UX Scenario Document</a:t>
             </a:r>
             <a:endParaRPr lang="en-US" sz="900" dirty="0"/>
           </a:p>
@@ -12063,7 +12048,6 @@
         <a:solidFill>
           <a:srgbClr val="F5F7FB"/>
         </a:solidFill>
-        <a:effectLst/>
       </p:bgPr>
     </p:bg>
     <p:spTree>
@@ -12101,20 +12085,13 @@
           </a:solidFill>
           <a:ln/>
           <a:effectLst>
-            <a:outerShdw blurRad="127000" dist="38100" dir="8100000" algn="bl" rotWithShape="0">
+            <a:outerShdw sx="100000" sy="100000" kx="0" ky="0" algn="bl" rotWithShape="0" blurRad="127000" dist="38100" dir="8100000">
               <a:srgbClr val="9AA6BC">
                 <a:alpha val="28000"/>
               </a:srgbClr>
             </a:outerShdw>
           </a:effectLst>
         </p:spPr>
-        <p:txBody>
-          <a:bodyPr/>
-          <a:lstStyle/>
-          <a:p>
-            <a:endParaRPr lang="en-EG"/>
-          </a:p>
-        </p:txBody>
       </p:sp>
       <p:sp>
         <p:nvSpPr>
@@ -12137,7 +12114,7 @@
           <a:bodyPr wrap="square" lIns="0" tIns="0" rIns="0" bIns="0" rtlCol="0" anchor="ctr"/>
           <a:lstStyle/>
           <a:p>
-            <a:pPr marL="0" indent="0" algn="ctr">
+            <a:pPr algn="ctr" indent="0" marL="0">
               <a:buNone/>
             </a:pPr>
             <a:r>
@@ -12176,7 +12153,7 @@
           <a:bodyPr wrap="square" lIns="0" tIns="0" rIns="0" bIns="0" rtlCol="0" anchor="ctr"/>
           <a:lstStyle/>
           <a:p>
-            <a:pPr marL="0" indent="0" algn="l">
+            <a:pPr algn="l" indent="0" marL="0">
               <a:buNone/>
             </a:pPr>
             <a:r>
@@ -12215,7 +12192,7 @@
           <a:bodyPr wrap="square" lIns="0" tIns="0" rIns="0" bIns="0" rtlCol="0" anchor="ctr"/>
           <a:lstStyle/>
           <a:p>
-            <a:pPr marL="0" indent="0" algn="l">
+            <a:pPr algn="l" indent="0" marL="0">
               <a:buNone/>
             </a:pPr>
             <a:r>
@@ -12259,20 +12236,13 @@
             <a:prstDash val="solid"/>
           </a:ln>
           <a:effectLst>
-            <a:outerShdw blurRad="127000" dist="38100" dir="8100000" algn="bl" rotWithShape="0">
+            <a:outerShdw sx="100000" sy="100000" kx="0" ky="0" algn="bl" rotWithShape="0" blurRad="127000" dist="38100" dir="8100000">
               <a:srgbClr val="9AA6BC">
                 <a:alpha val="28000"/>
               </a:srgbClr>
             </a:outerShdw>
           </a:effectLst>
         </p:spPr>
-        <p:txBody>
-          <a:bodyPr/>
-          <a:lstStyle/>
-          <a:p>
-            <a:endParaRPr lang="en-EG"/>
-          </a:p>
-        </p:txBody>
       </p:sp>
       <p:sp>
         <p:nvSpPr>
@@ -12298,13 +12268,6 @@
             <a:prstDash val="solid"/>
           </a:ln>
         </p:spPr>
-        <p:txBody>
-          <a:bodyPr/>
-          <a:lstStyle/>
-          <a:p>
-            <a:endParaRPr lang="en-EG"/>
-          </a:p>
-        </p:txBody>
       </p:sp>
       <p:sp>
         <p:nvSpPr>
@@ -12327,7 +12290,7 @@
           <a:bodyPr wrap="square" lIns="0" tIns="0" rIns="0" bIns="0" rtlCol="0" anchor="ctr"/>
           <a:lstStyle/>
           <a:p>
-            <a:pPr marL="0" indent="0" algn="ctr">
+            <a:pPr algn="ctr" indent="0" marL="0">
               <a:buNone/>
             </a:pPr>
             <a:r>
@@ -12366,7 +12329,7 @@
           <a:bodyPr wrap="square" lIns="0" tIns="0" rIns="0" bIns="0" rtlCol="0" anchor="ctr"/>
           <a:lstStyle/>
           <a:p>
-            <a:pPr marL="0" indent="0" algn="ctr">
+            <a:pPr algn="ctr" indent="0" marL="0">
               <a:buNone/>
             </a:pPr>
             <a:r>
@@ -12405,7 +12368,7 @@
           <a:bodyPr wrap="square" lIns="0" tIns="0" rIns="0" bIns="0" rtlCol="0" anchor="ctr"/>
           <a:lstStyle/>
           <a:p>
-            <a:pPr marL="0" indent="0" algn="ctr">
+            <a:pPr algn="ctr" indent="0" marL="0">
               <a:lnSpc>
                 <a:spcPct val="106000"/>
               </a:lnSpc>
@@ -12420,7 +12383,7 @@
                 <a:ea typeface="Arial" pitchFamily="34" charset="-122"/>
                 <a:cs typeface="Arial" pitchFamily="34" charset="-120"/>
               </a:rPr>
-              <a:t>Lumen Player contains no paid content and offers no in-app purchases, subscriptions, or payment flows. There are no credit-card, voucher-code, or SMS payment methods to test.</a:t>
+              <a:t>Suvo contains no paid content and offers no in-app purchases, subscriptions, or payment flows. There are no credit-card, voucher-code, or SMS payment methods to test.</a:t>
             </a:r>
             <a:endParaRPr lang="en-US" sz="1300" dirty="0"/>
           </a:p>
@@ -12447,7 +12410,7 @@
           <a:bodyPr wrap="square" lIns="0" tIns="0" rIns="0" bIns="0" rtlCol="0" anchor="ctr"/>
           <a:lstStyle/>
           <a:p>
-            <a:pPr marL="0" indent="0" algn="r">
+            <a:pPr algn="r" indent="0" marL="0">
               <a:buNone/>
             </a:pPr>
             <a:r>
@@ -12486,7 +12449,7 @@
           <a:bodyPr wrap="square" lIns="0" tIns="0" rIns="0" bIns="0" rtlCol="0" anchor="ctr"/>
           <a:lstStyle/>
           <a:p>
-            <a:pPr marL="0" indent="0" algn="l">
+            <a:pPr algn="l" indent="0" marL="0">
               <a:buNone/>
             </a:pPr>
             <a:r>
@@ -12498,7 +12461,7 @@
                 <a:ea typeface="Arial" pitchFamily="34" charset="-122"/>
                 <a:cs typeface="Arial" pitchFamily="34" charset="-120"/>
               </a:rPr>
-              <a:t>Lumen Player · UX Scenario Document</a:t>
+              <a:t>Suvo · UX Scenario Document</a:t>
             </a:r>
             <a:endParaRPr lang="en-US" sz="900" dirty="0"/>
           </a:p>
@@ -12520,7 +12483,6 @@
         <a:solidFill>
           <a:srgbClr val="F5F7FB"/>
         </a:solidFill>
-        <a:effectLst/>
       </p:bgPr>
     </p:bg>
     <p:spTree>
@@ -12558,20 +12520,13 @@
           </a:solidFill>
           <a:ln/>
           <a:effectLst>
-            <a:outerShdw blurRad="127000" dist="38100" dir="8100000" algn="bl" rotWithShape="0">
+            <a:outerShdw sx="100000" sy="100000" kx="0" ky="0" algn="bl" rotWithShape="0" blurRad="127000" dist="38100" dir="8100000">
               <a:srgbClr val="9AA6BC">
                 <a:alpha val="28000"/>
               </a:srgbClr>
             </a:outerShdw>
           </a:effectLst>
         </p:spPr>
-        <p:txBody>
-          <a:bodyPr/>
-          <a:lstStyle/>
-          <a:p>
-            <a:endParaRPr lang="en-EG"/>
-          </a:p>
-        </p:txBody>
       </p:sp>
       <p:sp>
         <p:nvSpPr>
@@ -12594,7 +12549,7 @@
           <a:bodyPr wrap="square" lIns="0" tIns="0" rIns="0" bIns="0" rtlCol="0" anchor="ctr"/>
           <a:lstStyle/>
           <a:p>
-            <a:pPr marL="0" indent="0" algn="ctr">
+            <a:pPr algn="ctr" indent="0" marL="0">
               <a:buNone/>
             </a:pPr>
             <a:r>
@@ -12633,7 +12588,7 @@
           <a:bodyPr wrap="square" lIns="0" tIns="0" rIns="0" bIns="0" rtlCol="0" anchor="ctr"/>
           <a:lstStyle/>
           <a:p>
-            <a:pPr marL="0" indent="0" algn="l">
+            <a:pPr algn="l" indent="0" marL="0">
               <a:buNone/>
             </a:pPr>
             <a:r>
@@ -12672,7 +12627,7 @@
           <a:bodyPr wrap="square" lIns="0" tIns="0" rIns="0" bIns="0" rtlCol="0" anchor="ctr"/>
           <a:lstStyle/>
           <a:p>
-            <a:pPr marL="0" indent="0" algn="l">
+            <a:pPr algn="l" indent="0" marL="0">
               <a:buNone/>
             </a:pPr>
             <a:r>
@@ -12716,20 +12671,13 @@
             <a:prstDash val="solid"/>
           </a:ln>
           <a:effectLst>
-            <a:outerShdw blurRad="127000" dist="38100" dir="8100000" algn="bl" rotWithShape="0">
+            <a:outerShdw sx="100000" sy="100000" kx="0" ky="0" algn="bl" rotWithShape="0" blurRad="127000" dist="38100" dir="8100000">
               <a:srgbClr val="9AA6BC">
                 <a:alpha val="28000"/>
               </a:srgbClr>
             </a:outerShdw>
           </a:effectLst>
         </p:spPr>
-        <p:txBody>
-          <a:bodyPr/>
-          <a:lstStyle/>
-          <a:p>
-            <a:endParaRPr lang="en-EG"/>
-          </a:p>
-        </p:txBody>
       </p:sp>
       <p:sp>
         <p:nvSpPr>
@@ -12755,13 +12703,6 @@
             <a:prstDash val="solid"/>
           </a:ln>
         </p:spPr>
-        <p:txBody>
-          <a:bodyPr/>
-          <a:lstStyle/>
-          <a:p>
-            <a:endParaRPr lang="en-EG"/>
-          </a:p>
-        </p:txBody>
       </p:sp>
       <p:sp>
         <p:nvSpPr>
@@ -12784,7 +12725,7 @@
           <a:bodyPr wrap="square" lIns="0" tIns="0" rIns="0" bIns="0" rtlCol="0" anchor="ctr"/>
           <a:lstStyle/>
           <a:p>
-            <a:pPr marL="0" indent="0" algn="ctr">
+            <a:pPr algn="ctr" indent="0" marL="0">
               <a:buNone/>
             </a:pPr>
             <a:r>
@@ -12823,7 +12764,7 @@
           <a:bodyPr wrap="square" lIns="0" tIns="0" rIns="0" bIns="0" rtlCol="0" anchor="ctr"/>
           <a:lstStyle/>
           <a:p>
-            <a:pPr marL="0" indent="0" algn="ctr">
+            <a:pPr algn="ctr" indent="0" marL="0">
               <a:buNone/>
             </a:pPr>
             <a:r>
@@ -12862,7 +12803,7 @@
           <a:bodyPr wrap="square" lIns="0" tIns="0" rIns="0" bIns="0" rtlCol="0" anchor="ctr"/>
           <a:lstStyle/>
           <a:p>
-            <a:pPr marL="0" indent="0" algn="ctr">
+            <a:pPr algn="ctr" indent="0" marL="0">
               <a:lnSpc>
                 <a:spcPct val="106000"/>
               </a:lnSpc>
@@ -12877,7 +12818,7 @@
                 <a:ea typeface="Arial" pitchFamily="34" charset="-122"/>
                 <a:cs typeface="Arial" pitchFamily="34" charset="-120"/>
               </a:rPr>
-              <a:t>Lumen Player displays no advertising of any kind — no banner ads and no video ads. There are no ad placements, locations, or ad-network integrations to describe.</a:t>
+              <a:t>Suvo displays no advertising of any kind — no banner ads and no video ads. There are no ad placements, locations, or ad-network integrations to describe.</a:t>
             </a:r>
             <a:endParaRPr lang="en-US" sz="1300" dirty="0"/>
           </a:p>
@@ -12904,7 +12845,7 @@
           <a:bodyPr wrap="square" lIns="0" tIns="0" rIns="0" bIns="0" rtlCol="0" anchor="ctr"/>
           <a:lstStyle/>
           <a:p>
-            <a:pPr marL="0" indent="0" algn="r">
+            <a:pPr algn="r" indent="0" marL="0">
               <a:buNone/>
             </a:pPr>
             <a:r>
@@ -12943,7 +12884,7 @@
           <a:bodyPr wrap="square" lIns="0" tIns="0" rIns="0" bIns="0" rtlCol="0" anchor="ctr"/>
           <a:lstStyle/>
           <a:p>
-            <a:pPr marL="0" indent="0" algn="l">
+            <a:pPr algn="l" indent="0" marL="0">
               <a:buNone/>
             </a:pPr>
             <a:r>
@@ -12955,7 +12896,7 @@
                 <a:ea typeface="Arial" pitchFamily="34" charset="-122"/>
                 <a:cs typeface="Arial" pitchFamily="34" charset="-120"/>
               </a:rPr>
-              <a:t>Lumen Player · UX Scenario Document</a:t>
+              <a:t>Suvo · UX Scenario Document</a:t>
             </a:r>
             <a:endParaRPr lang="en-US" sz="900" dirty="0"/>
           </a:p>
@@ -12977,7 +12918,6 @@
         <a:solidFill>
           <a:srgbClr val="0F1320"/>
         </a:solidFill>
-        <a:effectLst/>
       </p:bgPr>
     </p:bg>
     <p:spTree>
@@ -13013,13 +12953,6 @@
           </a:solidFill>
           <a:ln/>
         </p:spPr>
-        <p:txBody>
-          <a:bodyPr/>
-          <a:lstStyle/>
-          <a:p>
-            <a:endParaRPr lang="en-EG"/>
-          </a:p>
-        </p:txBody>
       </p:sp>
       <p:sp>
         <p:nvSpPr>
@@ -13040,24 +12973,17 @@
           </a:solidFill>
           <a:ln/>
         </p:spPr>
-        <p:txBody>
-          <a:bodyPr/>
-          <a:lstStyle/>
-          <a:p>
-            <a:endParaRPr lang="en-EG"/>
-          </a:p>
-        </p:txBody>
       </p:sp>
       <p:pic>
         <p:nvPicPr>
-          <p:cNvPr id="4" name="Image 0" descr="Lumen Player mark"/>
+          <p:cNvPr id="4" name="Image 0" descr="Suvo mark">    </p:cNvPr>
           <p:cNvPicPr>
             <a:picLocks noChangeAspect="1"/>
           </p:cNvPicPr>
           <p:nvPr/>
         </p:nvPicPr>
         <p:blipFill>
-          <a:blip r:embed="rId3"/>
+          <a:blip r:embed="rId1"/>
           <a:stretch>
             <a:fillRect/>
           </a:stretch>
@@ -13093,7 +13019,7 @@
           <a:bodyPr wrap="square" lIns="0" tIns="0" rIns="0" bIns="0" rtlCol="0" anchor="ctr"/>
           <a:lstStyle/>
           <a:p>
-            <a:pPr marL="0" indent="0" algn="ctr">
+            <a:pPr algn="ctr" indent="0" marL="0">
               <a:buNone/>
             </a:pPr>
             <a:r>
@@ -13105,7 +13031,7 @@
                 <a:ea typeface="Trebuchet MS" pitchFamily="34" charset="-122"/>
                 <a:cs typeface="Trebuchet MS" pitchFamily="34" charset="-120"/>
               </a:rPr>
-              <a:t>Thank you for reviewing Lumen Player</a:t>
+              <a:t>Thank you for reviewing Suvo</a:t>
             </a:r>
             <a:endParaRPr lang="en-US" sz="2600" dirty="0"/>
           </a:p>
@@ -13132,7 +13058,7 @@
           <a:bodyPr wrap="square" lIns="0" tIns="0" rIns="0" bIns="0" rtlCol="0" anchor="ctr"/>
           <a:lstStyle/>
           <a:p>
-            <a:pPr marL="0" indent="0" algn="ctr">
+            <a:pPr algn="ctr" indent="0" marL="0">
               <a:buNone/>
             </a:pPr>
             <a:r>
@@ -13171,7 +13097,7 @@
           <a:bodyPr wrap="square" lIns="0" tIns="0" rIns="0" bIns="0" rtlCol="0" anchor="ctr"/>
           <a:lstStyle/>
           <a:p>
-            <a:pPr marL="0" indent="0" algn="ctr">
+            <a:pPr algn="ctr" indent="0" marL="0">
               <a:buNone/>
             </a:pPr>
             <a:r>
@@ -13183,7 +13109,7 @@
                 <a:ea typeface="Arial" pitchFamily="34" charset="-122"/>
                 <a:cs typeface="Arial" pitchFamily="34" charset="-120"/>
               </a:rPr>
-              <a:t>com.andrew1h1.lumenplayer   ·   v1.0.0   ·   Andrew Hany</a:t>
+              <a:t>com.andrew1h1.suvo   ·   v1.0.0   ·   Andrew Hany</a:t>
             </a:r>
             <a:endParaRPr lang="en-US" sz="1200" dirty="0"/>
           </a:p>
@@ -13205,7 +13131,6 @@
         <a:solidFill>
           <a:srgbClr val="F5F7FB"/>
         </a:solidFill>
-        <a:effectLst/>
       </p:bgPr>
     </p:bg>
     <p:spTree>
@@ -13243,7 +13168,7 @@
           <a:bodyPr wrap="square" lIns="0" tIns="0" rIns="0" bIns="0" rtlCol="0" anchor="ctr"/>
           <a:lstStyle/>
           <a:p>
-            <a:pPr marL="0" indent="0" algn="l">
+            <a:pPr algn="l" indent="0" marL="0">
               <a:buNone/>
             </a:pPr>
             <a:r>
@@ -13287,20 +13212,13 @@
             <a:prstDash val="solid"/>
           </a:ln>
           <a:effectLst>
-            <a:outerShdw blurRad="127000" dist="38100" dir="8100000" algn="bl" rotWithShape="0">
+            <a:outerShdw sx="100000" sy="100000" kx="0" ky="0" algn="bl" rotWithShape="0" blurRad="127000" dist="38100" dir="8100000">
               <a:srgbClr val="9AA6BC">
                 <a:alpha val="28000"/>
               </a:srgbClr>
             </a:outerShdw>
           </a:effectLst>
         </p:spPr>
-        <p:txBody>
-          <a:bodyPr/>
-          <a:lstStyle/>
-          <a:p>
-            <a:endParaRPr lang="en-EG"/>
-          </a:p>
-        </p:txBody>
       </p:sp>
       <p:sp>
         <p:nvSpPr>
@@ -13323,13 +13241,6 @@
           </a:solidFill>
           <a:ln/>
         </p:spPr>
-        <p:txBody>
-          <a:bodyPr/>
-          <a:lstStyle/>
-          <a:p>
-            <a:endParaRPr lang="en-EG"/>
-          </a:p>
-        </p:txBody>
       </p:sp>
       <p:sp>
         <p:nvSpPr>
@@ -13352,7 +13263,7 @@
           <a:bodyPr wrap="square" lIns="0" tIns="0" rIns="0" bIns="0" rtlCol="0" anchor="ctr"/>
           <a:lstStyle/>
           <a:p>
-            <a:pPr marL="0" indent="0" algn="ctr">
+            <a:pPr algn="ctr" indent="0" marL="0">
               <a:buNone/>
             </a:pPr>
             <a:r>
@@ -13391,7 +13302,7 @@
           <a:bodyPr wrap="square" lIns="0" tIns="0" rIns="0" bIns="0" rtlCol="0" anchor="ctr"/>
           <a:lstStyle/>
           <a:p>
-            <a:pPr marL="0" indent="0">
+            <a:pPr indent="0" marL="0">
               <a:buNone/>
             </a:pPr>
             <a:r>
@@ -13430,7 +13341,7 @@
           <a:bodyPr wrap="square" lIns="0" tIns="0" rIns="0" bIns="0" rtlCol="0" anchor="ctr"/>
           <a:lstStyle/>
           <a:p>
-            <a:pPr marL="0" indent="0">
+            <a:pPr indent="0" marL="0">
               <a:buNone/>
             </a:pPr>
             <a:r>
@@ -13474,20 +13385,13 @@
             <a:prstDash val="solid"/>
           </a:ln>
           <a:effectLst>
-            <a:outerShdw blurRad="127000" dist="38100" dir="8100000" algn="bl" rotWithShape="0">
+            <a:outerShdw sx="100000" sy="100000" kx="0" ky="0" algn="bl" rotWithShape="0" blurRad="127000" dist="38100" dir="8100000">
               <a:srgbClr val="9AA6BC">
                 <a:alpha val="28000"/>
               </a:srgbClr>
             </a:outerShdw>
           </a:effectLst>
         </p:spPr>
-        <p:txBody>
-          <a:bodyPr/>
-          <a:lstStyle/>
-          <a:p>
-            <a:endParaRPr lang="en-EG"/>
-          </a:p>
-        </p:txBody>
       </p:sp>
       <p:sp>
         <p:nvSpPr>
@@ -13510,13 +13414,6 @@
           </a:solidFill>
           <a:ln/>
         </p:spPr>
-        <p:txBody>
-          <a:bodyPr/>
-          <a:lstStyle/>
-          <a:p>
-            <a:endParaRPr lang="en-EG"/>
-          </a:p>
-        </p:txBody>
       </p:sp>
       <p:sp>
         <p:nvSpPr>
@@ -13539,7 +13436,7 @@
           <a:bodyPr wrap="square" lIns="0" tIns="0" rIns="0" bIns="0" rtlCol="0" anchor="ctr"/>
           <a:lstStyle/>
           <a:p>
-            <a:pPr marL="0" indent="0" algn="ctr">
+            <a:pPr algn="ctr" indent="0" marL="0">
               <a:buNone/>
             </a:pPr>
             <a:r>
@@ -13578,7 +13475,7 @@
           <a:bodyPr wrap="square" lIns="0" tIns="0" rIns="0" bIns="0" rtlCol="0" anchor="ctr"/>
           <a:lstStyle/>
           <a:p>
-            <a:pPr marL="0" indent="0">
+            <a:pPr indent="0" marL="0">
               <a:buNone/>
             </a:pPr>
             <a:r>
@@ -13617,7 +13514,7 @@
           <a:bodyPr wrap="square" lIns="0" tIns="0" rIns="0" bIns="0" rtlCol="0" anchor="ctr"/>
           <a:lstStyle/>
           <a:p>
-            <a:pPr marL="0" indent="0">
+            <a:pPr indent="0" marL="0">
               <a:buNone/>
             </a:pPr>
             <a:r>
@@ -13661,20 +13558,13 @@
             <a:prstDash val="solid"/>
           </a:ln>
           <a:effectLst>
-            <a:outerShdw blurRad="127000" dist="38100" dir="8100000" algn="bl" rotWithShape="0">
+            <a:outerShdw sx="100000" sy="100000" kx="0" ky="0" algn="bl" rotWithShape="0" blurRad="127000" dist="38100" dir="8100000">
               <a:srgbClr val="9AA6BC">
                 <a:alpha val="28000"/>
               </a:srgbClr>
             </a:outerShdw>
           </a:effectLst>
         </p:spPr>
-        <p:txBody>
-          <a:bodyPr/>
-          <a:lstStyle/>
-          <a:p>
-            <a:endParaRPr lang="en-EG"/>
-          </a:p>
-        </p:txBody>
       </p:sp>
       <p:sp>
         <p:nvSpPr>
@@ -13697,13 +13587,6 @@
           </a:solidFill>
           <a:ln/>
         </p:spPr>
-        <p:txBody>
-          <a:bodyPr/>
-          <a:lstStyle/>
-          <a:p>
-            <a:endParaRPr lang="en-EG"/>
-          </a:p>
-        </p:txBody>
       </p:sp>
       <p:sp>
         <p:nvSpPr>
@@ -13726,7 +13609,7 @@
           <a:bodyPr wrap="square" lIns="0" tIns="0" rIns="0" bIns="0" rtlCol="0" anchor="ctr"/>
           <a:lstStyle/>
           <a:p>
-            <a:pPr marL="0" indent="0" algn="ctr">
+            <a:pPr algn="ctr" indent="0" marL="0">
               <a:buNone/>
             </a:pPr>
             <a:r>
@@ -13765,7 +13648,7 @@
           <a:bodyPr wrap="square" lIns="0" tIns="0" rIns="0" bIns="0" rtlCol="0" anchor="ctr"/>
           <a:lstStyle/>
           <a:p>
-            <a:pPr marL="0" indent="0">
+            <a:pPr indent="0" marL="0">
               <a:buNone/>
             </a:pPr>
             <a:r>
@@ -13804,7 +13687,7 @@
           <a:bodyPr wrap="square" lIns="0" tIns="0" rIns="0" bIns="0" rtlCol="0" anchor="ctr"/>
           <a:lstStyle/>
           <a:p>
-            <a:pPr marL="0" indent="0">
+            <a:pPr indent="0" marL="0">
               <a:buNone/>
             </a:pPr>
             <a:r>
@@ -13848,20 +13731,13 @@
             <a:prstDash val="solid"/>
           </a:ln>
           <a:effectLst>
-            <a:outerShdw blurRad="127000" dist="38100" dir="8100000" algn="bl" rotWithShape="0">
+            <a:outerShdw sx="100000" sy="100000" kx="0" ky="0" algn="bl" rotWithShape="0" blurRad="127000" dist="38100" dir="8100000">
               <a:srgbClr val="9AA6BC">
                 <a:alpha val="28000"/>
               </a:srgbClr>
             </a:outerShdw>
           </a:effectLst>
         </p:spPr>
-        <p:txBody>
-          <a:bodyPr/>
-          <a:lstStyle/>
-          <a:p>
-            <a:endParaRPr lang="en-EG"/>
-          </a:p>
-        </p:txBody>
       </p:sp>
       <p:sp>
         <p:nvSpPr>
@@ -13884,13 +13760,6 @@
           </a:solidFill>
           <a:ln/>
         </p:spPr>
-        <p:txBody>
-          <a:bodyPr/>
-          <a:lstStyle/>
-          <a:p>
-            <a:endParaRPr lang="en-EG"/>
-          </a:p>
-        </p:txBody>
       </p:sp>
       <p:sp>
         <p:nvSpPr>
@@ -13913,7 +13782,7 @@
           <a:bodyPr wrap="square" lIns="0" tIns="0" rIns="0" bIns="0" rtlCol="0" anchor="ctr"/>
           <a:lstStyle/>
           <a:p>
-            <a:pPr marL="0" indent="0" algn="ctr">
+            <a:pPr algn="ctr" indent="0" marL="0">
               <a:buNone/>
             </a:pPr>
             <a:r>
@@ -13952,7 +13821,7 @@
           <a:bodyPr wrap="square" lIns="0" tIns="0" rIns="0" bIns="0" rtlCol="0" anchor="ctr"/>
           <a:lstStyle/>
           <a:p>
-            <a:pPr marL="0" indent="0">
+            <a:pPr indent="0" marL="0">
               <a:buNone/>
             </a:pPr>
             <a:r>
@@ -13991,7 +13860,7 @@
           <a:bodyPr wrap="square" lIns="0" tIns="0" rIns="0" bIns="0" rtlCol="0" anchor="ctr"/>
           <a:lstStyle/>
           <a:p>
-            <a:pPr marL="0" indent="0">
+            <a:pPr indent="0" marL="0">
               <a:buNone/>
             </a:pPr>
             <a:r>
@@ -14035,20 +13904,13 @@
             <a:prstDash val="solid"/>
           </a:ln>
           <a:effectLst>
-            <a:outerShdw blurRad="127000" dist="38100" dir="8100000" algn="bl" rotWithShape="0">
+            <a:outerShdw sx="100000" sy="100000" kx="0" ky="0" algn="bl" rotWithShape="0" blurRad="127000" dist="38100" dir="8100000">
               <a:srgbClr val="9AA6BC">
                 <a:alpha val="28000"/>
               </a:srgbClr>
             </a:outerShdw>
           </a:effectLst>
         </p:spPr>
-        <p:txBody>
-          <a:bodyPr/>
-          <a:lstStyle/>
-          <a:p>
-            <a:endParaRPr lang="en-EG"/>
-          </a:p>
-        </p:txBody>
       </p:sp>
       <p:sp>
         <p:nvSpPr>
@@ -14071,13 +13933,6 @@
           </a:solidFill>
           <a:ln/>
         </p:spPr>
-        <p:txBody>
-          <a:bodyPr/>
-          <a:lstStyle/>
-          <a:p>
-            <a:endParaRPr lang="en-EG"/>
-          </a:p>
-        </p:txBody>
       </p:sp>
       <p:sp>
         <p:nvSpPr>
@@ -14100,7 +13955,7 @@
           <a:bodyPr wrap="square" lIns="0" tIns="0" rIns="0" bIns="0" rtlCol="0" anchor="ctr"/>
           <a:lstStyle/>
           <a:p>
-            <a:pPr marL="0" indent="0" algn="ctr">
+            <a:pPr algn="ctr" indent="0" marL="0">
               <a:buNone/>
             </a:pPr>
             <a:r>
@@ -14139,7 +13994,7 @@
           <a:bodyPr wrap="square" lIns="0" tIns="0" rIns="0" bIns="0" rtlCol="0" anchor="ctr"/>
           <a:lstStyle/>
           <a:p>
-            <a:pPr marL="0" indent="0">
+            <a:pPr indent="0" marL="0">
               <a:buNone/>
             </a:pPr>
             <a:r>
@@ -14178,7 +14033,7 @@
           <a:bodyPr wrap="square" lIns="0" tIns="0" rIns="0" bIns="0" rtlCol="0" anchor="ctr"/>
           <a:lstStyle/>
           <a:p>
-            <a:pPr marL="0" indent="0">
+            <a:pPr indent="0" marL="0">
               <a:buNone/>
             </a:pPr>
             <a:r>
@@ -14222,20 +14077,13 @@
             <a:prstDash val="solid"/>
           </a:ln>
           <a:effectLst>
-            <a:outerShdw blurRad="127000" dist="38100" dir="8100000" algn="bl" rotWithShape="0">
+            <a:outerShdw sx="100000" sy="100000" kx="0" ky="0" algn="bl" rotWithShape="0" blurRad="127000" dist="38100" dir="8100000">
               <a:srgbClr val="9AA6BC">
                 <a:alpha val="28000"/>
               </a:srgbClr>
             </a:outerShdw>
           </a:effectLst>
         </p:spPr>
-        <p:txBody>
-          <a:bodyPr/>
-          <a:lstStyle/>
-          <a:p>
-            <a:endParaRPr lang="en-EG"/>
-          </a:p>
-        </p:txBody>
       </p:sp>
       <p:sp>
         <p:nvSpPr>
@@ -14258,13 +14106,6 @@
           </a:solidFill>
           <a:ln/>
         </p:spPr>
-        <p:txBody>
-          <a:bodyPr/>
-          <a:lstStyle/>
-          <a:p>
-            <a:endParaRPr lang="en-EG"/>
-          </a:p>
-        </p:txBody>
       </p:sp>
       <p:sp>
         <p:nvSpPr>
@@ -14287,7 +14128,7 @@
           <a:bodyPr wrap="square" lIns="0" tIns="0" rIns="0" bIns="0" rtlCol="0" anchor="ctr"/>
           <a:lstStyle/>
           <a:p>
-            <a:pPr marL="0" indent="0" algn="ctr">
+            <a:pPr algn="ctr" indent="0" marL="0">
               <a:buNone/>
             </a:pPr>
             <a:r>
@@ -14326,7 +14167,7 @@
           <a:bodyPr wrap="square" lIns="0" tIns="0" rIns="0" bIns="0" rtlCol="0" anchor="ctr"/>
           <a:lstStyle/>
           <a:p>
-            <a:pPr marL="0" indent="0">
+            <a:pPr indent="0" marL="0">
               <a:buNone/>
             </a:pPr>
             <a:r>
@@ -14365,7 +14206,7 @@
           <a:bodyPr wrap="square" lIns="0" tIns="0" rIns="0" bIns="0" rtlCol="0" anchor="ctr"/>
           <a:lstStyle/>
           <a:p>
-            <a:pPr marL="0" indent="0">
+            <a:pPr indent="0" marL="0">
               <a:buNone/>
             </a:pPr>
             <a:r>
@@ -14409,20 +14250,13 @@
             <a:prstDash val="solid"/>
           </a:ln>
           <a:effectLst>
-            <a:outerShdw blurRad="127000" dist="38100" dir="8100000" algn="bl" rotWithShape="0">
+            <a:outerShdw sx="100000" sy="100000" kx="0" ky="0" algn="bl" rotWithShape="0" blurRad="127000" dist="38100" dir="8100000">
               <a:srgbClr val="9AA6BC">
                 <a:alpha val="28000"/>
               </a:srgbClr>
             </a:outerShdw>
           </a:effectLst>
         </p:spPr>
-        <p:txBody>
-          <a:bodyPr/>
-          <a:lstStyle/>
-          <a:p>
-            <a:endParaRPr lang="en-EG"/>
-          </a:p>
-        </p:txBody>
       </p:sp>
       <p:sp>
         <p:nvSpPr>
@@ -14445,13 +14279,6 @@
           </a:solidFill>
           <a:ln/>
         </p:spPr>
-        <p:txBody>
-          <a:bodyPr/>
-          <a:lstStyle/>
-          <a:p>
-            <a:endParaRPr lang="en-EG"/>
-          </a:p>
-        </p:txBody>
       </p:sp>
       <p:sp>
         <p:nvSpPr>
@@ -14474,7 +14301,7 @@
           <a:bodyPr wrap="square" lIns="0" tIns="0" rIns="0" bIns="0" rtlCol="0" anchor="ctr"/>
           <a:lstStyle/>
           <a:p>
-            <a:pPr marL="0" indent="0" algn="ctr">
+            <a:pPr algn="ctr" indent="0" marL="0">
               <a:buNone/>
             </a:pPr>
             <a:r>
@@ -14513,7 +14340,7 @@
           <a:bodyPr wrap="square" lIns="0" tIns="0" rIns="0" bIns="0" rtlCol="0" anchor="ctr"/>
           <a:lstStyle/>
           <a:p>
-            <a:pPr marL="0" indent="0">
+            <a:pPr indent="0" marL="0">
               <a:buNone/>
             </a:pPr>
             <a:r>
@@ -14552,7 +14379,7 @@
           <a:bodyPr wrap="square" lIns="0" tIns="0" rIns="0" bIns="0" rtlCol="0" anchor="ctr"/>
           <a:lstStyle/>
           <a:p>
-            <a:pPr marL="0" indent="0">
+            <a:pPr indent="0" marL="0">
               <a:buNone/>
             </a:pPr>
             <a:r>
@@ -14596,20 +14423,13 @@
             <a:prstDash val="solid"/>
           </a:ln>
           <a:effectLst>
-            <a:outerShdw blurRad="127000" dist="38100" dir="8100000" algn="bl" rotWithShape="0">
+            <a:outerShdw sx="100000" sy="100000" kx="0" ky="0" algn="bl" rotWithShape="0" blurRad="127000" dist="38100" dir="8100000">
               <a:srgbClr val="9AA6BC">
                 <a:alpha val="28000"/>
               </a:srgbClr>
             </a:outerShdw>
           </a:effectLst>
         </p:spPr>
-        <p:txBody>
-          <a:bodyPr/>
-          <a:lstStyle/>
-          <a:p>
-            <a:endParaRPr lang="en-EG"/>
-          </a:p>
-        </p:txBody>
       </p:sp>
       <p:sp>
         <p:nvSpPr>
@@ -14632,13 +14452,6 @@
           </a:solidFill>
           <a:ln/>
         </p:spPr>
-        <p:txBody>
-          <a:bodyPr/>
-          <a:lstStyle/>
-          <a:p>
-            <a:endParaRPr lang="en-EG"/>
-          </a:p>
-        </p:txBody>
       </p:sp>
       <p:sp>
         <p:nvSpPr>
@@ -14661,7 +14474,7 @@
           <a:bodyPr wrap="square" lIns="0" tIns="0" rIns="0" bIns="0" rtlCol="0" anchor="ctr"/>
           <a:lstStyle/>
           <a:p>
-            <a:pPr marL="0" indent="0" algn="ctr">
+            <a:pPr algn="ctr" indent="0" marL="0">
               <a:buNone/>
             </a:pPr>
             <a:r>
@@ -14700,7 +14513,7 @@
           <a:bodyPr wrap="square" lIns="0" tIns="0" rIns="0" bIns="0" rtlCol="0" anchor="ctr"/>
           <a:lstStyle/>
           <a:p>
-            <a:pPr marL="0" indent="0">
+            <a:pPr indent="0" marL="0">
               <a:buNone/>
             </a:pPr>
             <a:r>
@@ -14739,7 +14552,7 @@
           <a:bodyPr wrap="square" lIns="0" tIns="0" rIns="0" bIns="0" rtlCol="0" anchor="ctr"/>
           <a:lstStyle/>
           <a:p>
-            <a:pPr marL="0" indent="0">
+            <a:pPr indent="0" marL="0">
               <a:buNone/>
             </a:pPr>
             <a:r>
@@ -14778,7 +14591,7 @@
           <a:bodyPr wrap="square" lIns="0" tIns="0" rIns="0" bIns="0" rtlCol="0" anchor="ctr"/>
           <a:lstStyle/>
           <a:p>
-            <a:pPr marL="0" indent="0" algn="r">
+            <a:pPr algn="r" indent="0" marL="0">
               <a:buNone/>
             </a:pPr>
             <a:r>
@@ -14817,7 +14630,7 @@
           <a:bodyPr wrap="square" lIns="0" tIns="0" rIns="0" bIns="0" rtlCol="0" anchor="ctr"/>
           <a:lstStyle/>
           <a:p>
-            <a:pPr marL="0" indent="0" algn="l">
+            <a:pPr algn="l" indent="0" marL="0">
               <a:buNone/>
             </a:pPr>
             <a:r>
@@ -14829,7 +14642,7 @@
                 <a:ea typeface="Arial" pitchFamily="34" charset="-122"/>
                 <a:cs typeface="Arial" pitchFamily="34" charset="-120"/>
               </a:rPr>
-              <a:t>Lumen Player · UX Scenario Document</a:t>
+              <a:t>Suvo · UX Scenario Document</a:t>
             </a:r>
             <a:endParaRPr lang="en-US" sz="900" dirty="0"/>
           </a:p>
@@ -14851,7 +14664,6 @@
         <a:solidFill>
           <a:srgbClr val="F5F7FB"/>
         </a:solidFill>
-        <a:effectLst/>
       </p:bgPr>
     </p:bg>
     <p:spTree>
@@ -14889,20 +14701,13 @@
           </a:solidFill>
           <a:ln/>
           <a:effectLst>
-            <a:outerShdw blurRad="127000" dist="38100" dir="8100000" algn="bl" rotWithShape="0">
+            <a:outerShdw sx="100000" sy="100000" kx="0" ky="0" algn="bl" rotWithShape="0" blurRad="127000" dist="38100" dir="8100000">
               <a:srgbClr val="9AA6BC">
                 <a:alpha val="28000"/>
               </a:srgbClr>
             </a:outerShdw>
           </a:effectLst>
         </p:spPr>
-        <p:txBody>
-          <a:bodyPr/>
-          <a:lstStyle/>
-          <a:p>
-            <a:endParaRPr lang="en-EG"/>
-          </a:p>
-        </p:txBody>
       </p:sp>
       <p:sp>
         <p:nvSpPr>
@@ -14925,7 +14730,7 @@
           <a:bodyPr wrap="square" lIns="0" tIns="0" rIns="0" bIns="0" rtlCol="0" anchor="ctr"/>
           <a:lstStyle/>
           <a:p>
-            <a:pPr marL="0" indent="0" algn="ctr">
+            <a:pPr algn="ctr" indent="0" marL="0">
               <a:buNone/>
             </a:pPr>
             <a:r>
@@ -14964,7 +14769,7 @@
           <a:bodyPr wrap="square" lIns="0" tIns="0" rIns="0" bIns="0" rtlCol="0" anchor="ctr"/>
           <a:lstStyle/>
           <a:p>
-            <a:pPr marL="0" indent="0" algn="l">
+            <a:pPr algn="l" indent="0" marL="0">
               <a:buNone/>
             </a:pPr>
             <a:r>
@@ -15003,7 +14808,7 @@
           <a:bodyPr wrap="square" lIns="0" tIns="0" rIns="0" bIns="0" rtlCol="0" anchor="ctr"/>
           <a:lstStyle/>
           <a:p>
-            <a:pPr marL="0" indent="0" algn="l">
+            <a:pPr algn="l" indent="0" marL="0">
               <a:buNone/>
             </a:pPr>
             <a:r>
@@ -15047,20 +14852,13 @@
             <a:prstDash val="solid"/>
           </a:ln>
           <a:effectLst>
-            <a:outerShdw blurRad="127000" dist="38100" dir="8100000" algn="bl" rotWithShape="0">
+            <a:outerShdw sx="100000" sy="100000" kx="0" ky="0" algn="bl" rotWithShape="0" blurRad="127000" dist="38100" dir="8100000">
               <a:srgbClr val="9AA6BC">
                 <a:alpha val="28000"/>
               </a:srgbClr>
             </a:outerShdw>
           </a:effectLst>
         </p:spPr>
-        <p:txBody>
-          <a:bodyPr/>
-          <a:lstStyle/>
-          <a:p>
-            <a:endParaRPr lang="en-EG"/>
-          </a:p>
-        </p:txBody>
       </p:sp>
       <p:sp>
         <p:nvSpPr>
@@ -15083,7 +14881,7 @@
           <a:bodyPr wrap="square" lIns="0" tIns="0" rIns="0" bIns="0" rtlCol="0" anchor="ctr"/>
           <a:lstStyle/>
           <a:p>
-            <a:pPr marL="0" indent="0">
+            <a:pPr indent="0" marL="0">
               <a:buNone/>
             </a:pPr>
             <a:r>
@@ -15122,7 +14920,7 @@
           <a:bodyPr wrap="square" lIns="0" tIns="0" rIns="0" bIns="0" rtlCol="0" anchor="ctr"/>
           <a:lstStyle/>
           <a:p>
-            <a:pPr marL="0" indent="0">
+            <a:pPr indent="0" marL="0">
               <a:buNone/>
             </a:pPr>
             <a:r>
@@ -15134,7 +14932,7 @@
                 <a:ea typeface="Arial" pitchFamily="34" charset="-122"/>
                 <a:cs typeface="Arial" pitchFamily="34" charset="-120"/>
               </a:rPr>
-              <a:t>Lumen Player</a:t>
+              <a:t>Suvo</a:t>
             </a:r>
             <a:endParaRPr lang="en-US" sz="1200" dirty="0"/>
           </a:p>
@@ -15162,13 +14960,6 @@
             <a:prstDash val="solid"/>
           </a:ln>
         </p:spPr>
-        <p:txBody>
-          <a:bodyPr/>
-          <a:lstStyle/>
-          <a:p>
-            <a:endParaRPr lang="en-EG"/>
-          </a:p>
-        </p:txBody>
       </p:sp>
       <p:sp>
         <p:nvSpPr>
@@ -15191,7 +14982,7 @@
           <a:bodyPr wrap="square" lIns="0" tIns="0" rIns="0" bIns="0" rtlCol="0" anchor="ctr"/>
           <a:lstStyle/>
           <a:p>
-            <a:pPr marL="0" indent="0">
+            <a:pPr indent="0" marL="0">
               <a:buNone/>
             </a:pPr>
             <a:r>
@@ -15230,7 +15021,7 @@
           <a:bodyPr wrap="square" lIns="0" tIns="0" rIns="0" bIns="0" rtlCol="0" anchor="ctr"/>
           <a:lstStyle/>
           <a:p>
-            <a:pPr marL="0" indent="0">
+            <a:pPr indent="0" marL="0">
               <a:buNone/>
             </a:pPr>
             <a:r>
@@ -15242,7 +15033,7 @@
                 <a:ea typeface="Arial" pitchFamily="34" charset="-122"/>
                 <a:cs typeface="Arial" pitchFamily="34" charset="-120"/>
               </a:rPr>
-              <a:t>com.andrew1h1.lumenplayer</a:t>
+              <a:t>com.andrew1h1.suvo</a:t>
             </a:r>
             <a:endParaRPr lang="en-US" sz="1200" dirty="0"/>
           </a:p>
@@ -15270,13 +15061,6 @@
             <a:prstDash val="solid"/>
           </a:ln>
         </p:spPr>
-        <p:txBody>
-          <a:bodyPr/>
-          <a:lstStyle/>
-          <a:p>
-            <a:endParaRPr lang="en-EG"/>
-          </a:p>
-        </p:txBody>
       </p:sp>
       <p:sp>
         <p:nvSpPr>
@@ -15299,7 +15083,7 @@
           <a:bodyPr wrap="square" lIns="0" tIns="0" rIns="0" bIns="0" rtlCol="0" anchor="ctr"/>
           <a:lstStyle/>
           <a:p>
-            <a:pPr marL="0" indent="0">
+            <a:pPr indent="0" marL="0">
               <a:buNone/>
             </a:pPr>
             <a:r>
@@ -15338,7 +15122,7 @@
           <a:bodyPr wrap="square" lIns="0" tIns="0" rIns="0" bIns="0" rtlCol="0" anchor="ctr"/>
           <a:lstStyle/>
           <a:p>
-            <a:pPr marL="0" indent="0">
+            <a:pPr indent="0" marL="0">
               <a:buNone/>
             </a:pPr>
             <a:r>
@@ -15378,13 +15162,6 @@
             <a:prstDash val="solid"/>
           </a:ln>
         </p:spPr>
-        <p:txBody>
-          <a:bodyPr/>
-          <a:lstStyle/>
-          <a:p>
-            <a:endParaRPr lang="en-EG"/>
-          </a:p>
-        </p:txBody>
       </p:sp>
       <p:sp>
         <p:nvSpPr>
@@ -15407,7 +15184,7 @@
           <a:bodyPr wrap="square" lIns="0" tIns="0" rIns="0" bIns="0" rtlCol="0" anchor="ctr"/>
           <a:lstStyle/>
           <a:p>
-            <a:pPr marL="0" indent="0">
+            <a:pPr indent="0" marL="0">
               <a:buNone/>
             </a:pPr>
             <a:r>
@@ -15446,7 +15223,7 @@
           <a:bodyPr wrap="square" lIns="0" tIns="0" rIns="0" bIns="0" rtlCol="0" anchor="ctr"/>
           <a:lstStyle/>
           <a:p>
-            <a:pPr marL="0" indent="0">
+            <a:pPr indent="0" marL="0">
               <a:buNone/>
             </a:pPr>
             <a:r>
@@ -15486,13 +15263,6 @@
             <a:prstDash val="solid"/>
           </a:ln>
         </p:spPr>
-        <p:txBody>
-          <a:bodyPr/>
-          <a:lstStyle/>
-          <a:p>
-            <a:endParaRPr lang="en-EG"/>
-          </a:p>
-        </p:txBody>
       </p:sp>
       <p:sp>
         <p:nvSpPr>
@@ -15515,7 +15285,7 @@
           <a:bodyPr wrap="square" lIns="0" tIns="0" rIns="0" bIns="0" rtlCol="0" anchor="ctr"/>
           <a:lstStyle/>
           <a:p>
-            <a:pPr marL="0" indent="0">
+            <a:pPr indent="0" marL="0">
               <a:buNone/>
             </a:pPr>
             <a:r>
@@ -15554,7 +15324,7 @@
           <a:bodyPr wrap="square" lIns="0" tIns="0" rIns="0" bIns="0" rtlCol="0" anchor="ctr"/>
           <a:lstStyle/>
           <a:p>
-            <a:pPr marL="0" indent="0">
+            <a:pPr indent="0" marL="0">
               <a:buNone/>
             </a:pPr>
             <a:r>
@@ -15594,13 +15364,6 @@
             <a:prstDash val="solid"/>
           </a:ln>
         </p:spPr>
-        <p:txBody>
-          <a:bodyPr/>
-          <a:lstStyle/>
-          <a:p>
-            <a:endParaRPr lang="en-EG"/>
-          </a:p>
-        </p:txBody>
       </p:sp>
       <p:sp>
         <p:nvSpPr>
@@ -15623,7 +15386,7 @@
           <a:bodyPr wrap="square" lIns="0" tIns="0" rIns="0" bIns="0" rtlCol="0" anchor="ctr"/>
           <a:lstStyle/>
           <a:p>
-            <a:pPr marL="0" indent="0">
+            <a:pPr indent="0" marL="0">
               <a:buNone/>
             </a:pPr>
             <a:r>
@@ -15662,7 +15425,7 @@
           <a:bodyPr wrap="square" lIns="0" tIns="0" rIns="0" bIns="0" rtlCol="0" anchor="ctr"/>
           <a:lstStyle/>
           <a:p>
-            <a:pPr marL="0" indent="0">
+            <a:pPr indent="0" marL="0">
               <a:buNone/>
             </a:pPr>
             <a:r>
@@ -15702,13 +15465,6 @@
             <a:prstDash val="solid"/>
           </a:ln>
         </p:spPr>
-        <p:txBody>
-          <a:bodyPr/>
-          <a:lstStyle/>
-          <a:p>
-            <a:endParaRPr lang="en-EG"/>
-          </a:p>
-        </p:txBody>
       </p:sp>
       <p:sp>
         <p:nvSpPr>
@@ -15731,7 +15487,7 @@
           <a:bodyPr wrap="square" lIns="0" tIns="0" rIns="0" bIns="0" rtlCol="0" anchor="ctr"/>
           <a:lstStyle/>
           <a:p>
-            <a:pPr marL="0" indent="0">
+            <a:pPr indent="0" marL="0">
               <a:buNone/>
             </a:pPr>
             <a:r>
@@ -15770,7 +15526,7 @@
           <a:bodyPr wrap="square" lIns="0" tIns="0" rIns="0" bIns="0" rtlCol="0" anchor="ctr"/>
           <a:lstStyle/>
           <a:p>
-            <a:pPr marL="0" indent="0">
+            <a:pPr indent="0" marL="0">
               <a:buNone/>
             </a:pPr>
             <a:r>
@@ -15810,13 +15566,6 @@
             <a:prstDash val="solid"/>
           </a:ln>
         </p:spPr>
-        <p:txBody>
-          <a:bodyPr/>
-          <a:lstStyle/>
-          <a:p>
-            <a:endParaRPr lang="en-EG"/>
-          </a:p>
-        </p:txBody>
       </p:sp>
       <p:sp>
         <p:nvSpPr>
@@ -15839,7 +15588,7 @@
           <a:bodyPr wrap="square" lIns="0" tIns="0" rIns="0" bIns="0" rtlCol="0" anchor="ctr"/>
           <a:lstStyle/>
           <a:p>
-            <a:pPr marL="0" indent="0">
+            <a:pPr indent="0" marL="0">
               <a:buNone/>
             </a:pPr>
             <a:r>
@@ -15878,7 +15627,7 @@
           <a:bodyPr wrap="square" lIns="0" tIns="0" rIns="0" bIns="0" rtlCol="0" anchor="ctr"/>
           <a:lstStyle/>
           <a:p>
-            <a:pPr marL="0" indent="0">
+            <a:pPr indent="0" marL="0">
               <a:buNone/>
             </a:pPr>
             <a:r>
@@ -15918,13 +15667,6 @@
             <a:prstDash val="solid"/>
           </a:ln>
         </p:spPr>
-        <p:txBody>
-          <a:bodyPr/>
-          <a:lstStyle/>
-          <a:p>
-            <a:endParaRPr lang="en-EG"/>
-          </a:p>
-        </p:txBody>
       </p:sp>
       <p:sp>
         <p:nvSpPr>
@@ -15947,7 +15689,7 @@
           <a:bodyPr wrap="square" lIns="0" tIns="0" rIns="0" bIns="0" rtlCol="0" anchor="ctr"/>
           <a:lstStyle/>
           <a:p>
-            <a:pPr marL="0" indent="0">
+            <a:pPr indent="0" marL="0">
               <a:buNone/>
             </a:pPr>
             <a:r>
@@ -15986,7 +15728,7 @@
           <a:bodyPr wrap="square" lIns="0" tIns="0" rIns="0" bIns="0" rtlCol="0" anchor="ctr"/>
           <a:lstStyle/>
           <a:p>
-            <a:pPr marL="0" indent="0">
+            <a:pPr indent="0" marL="0">
               <a:buNone/>
             </a:pPr>
             <a:r>
@@ -16030,20 +15772,13 @@
             <a:prstDash val="solid"/>
           </a:ln>
           <a:effectLst>
-            <a:outerShdw blurRad="127000" dist="38100" dir="8100000" algn="bl" rotWithShape="0">
+            <a:outerShdw sx="100000" sy="100000" kx="0" ky="0" algn="bl" rotWithShape="0" blurRad="127000" dist="38100" dir="8100000">
               <a:srgbClr val="9AA6BC">
                 <a:alpha val="28000"/>
               </a:srgbClr>
             </a:outerShdw>
           </a:effectLst>
         </p:spPr>
-        <p:txBody>
-          <a:bodyPr/>
-          <a:lstStyle/>
-          <a:p>
-            <a:endParaRPr lang="en-EG"/>
-          </a:p>
-        </p:txBody>
       </p:sp>
       <p:sp>
         <p:nvSpPr>
@@ -16066,7 +15801,7 @@
           <a:bodyPr wrap="square" lIns="0" tIns="0" rIns="0" bIns="0" rtlCol="0" anchor="ctr"/>
           <a:lstStyle/>
           <a:p>
-            <a:pPr marL="0" indent="0">
+            <a:pPr indent="0" marL="0">
               <a:buNone/>
             </a:pPr>
             <a:r>
@@ -16105,7 +15840,7 @@
           <a:bodyPr wrap="square" lIns="0" tIns="0" rIns="0" bIns="0" rtlCol="0" anchor="t"/>
           <a:lstStyle/>
           <a:p>
-            <a:pPr marL="0" indent="0">
+            <a:pPr indent="0" marL="0">
               <a:lnSpc>
                 <a:spcPct val="104000"/>
               </a:lnSpc>
@@ -16120,7 +15855,7 @@
                 <a:ea typeface="Arial" pitchFamily="34" charset="-122"/>
                 <a:cs typeface="Arial" pitchFamily="34" charset="-120"/>
               </a:rPr>
-              <a:t>Lumen Player is a media player for the playlist the user already owns. The user points it at their own playlist source; the app organises that media into Live, Movies and Series sections, remembers playback position, and keeps favourites and history in sync across the user's devices — with a 10-foot D-pad interface built for the remote. It ships with no content of its own: it hosts, bundles and supplies no channels, streams or media.</a:t>
+              <a:t>Suvo is a media player for the playlist the user already owns. The user points it at their own playlist source; the app organises that media into Live, Movies and Series sections, remembers playback position, and keeps favourites and history in sync across the user's devices — with a 10-foot D-pad interface built for the remote. It ships with no content of its own: it hosts, bundles and supplies no channels, streams or media.</a:t>
             </a:r>
             <a:endParaRPr lang="en-US" sz="1150" dirty="0"/>
           </a:p>
@@ -16152,20 +15887,13 @@
             <a:prstDash val="solid"/>
           </a:ln>
           <a:effectLst>
-            <a:outerShdw blurRad="127000" dist="38100" dir="8100000" algn="bl" rotWithShape="0">
+            <a:outerShdw sx="100000" sy="100000" kx="0" ky="0" algn="bl" rotWithShape="0" blurRad="127000" dist="38100" dir="8100000">
               <a:srgbClr val="9AA6BC">
                 <a:alpha val="28000"/>
               </a:srgbClr>
             </a:outerShdw>
           </a:effectLst>
         </p:spPr>
-        <p:txBody>
-          <a:bodyPr/>
-          <a:lstStyle/>
-          <a:p>
-            <a:endParaRPr lang="en-EG"/>
-          </a:p>
-        </p:txBody>
       </p:sp>
       <p:sp>
         <p:nvSpPr>
@@ -16188,7 +15916,7 @@
           <a:bodyPr wrap="square" lIns="0" tIns="0" rIns="0" bIns="0" rtlCol="0" anchor="ctr"/>
           <a:lstStyle/>
           <a:p>
-            <a:pPr marL="0" indent="0">
+            <a:pPr indent="0" marL="0">
               <a:buNone/>
             </a:pPr>
             <a:r>
@@ -16225,13 +15953,6 @@
           </a:solidFill>
           <a:ln/>
         </p:spPr>
-        <p:txBody>
-          <a:bodyPr/>
-          <a:lstStyle/>
-          <a:p>
-            <a:endParaRPr lang="en-EG"/>
-          </a:p>
-        </p:txBody>
       </p:sp>
       <p:sp>
         <p:nvSpPr>
@@ -16254,7 +15975,7 @@
           <a:bodyPr wrap="square" lIns="0" tIns="0" rIns="0" bIns="0" rtlCol="0" anchor="ctr"/>
           <a:lstStyle/>
           <a:p>
-            <a:pPr marL="0" indent="0">
+            <a:pPr indent="0" marL="0">
               <a:buNone/>
             </a:pPr>
             <a:r>
@@ -16293,7 +16014,7 @@
           <a:bodyPr wrap="square" lIns="0" tIns="0" rIns="0" bIns="0" rtlCol="0" anchor="ctr"/>
           <a:lstStyle/>
           <a:p>
-            <a:pPr marL="0" indent="0">
+            <a:pPr indent="0" marL="0">
               <a:buNone/>
             </a:pPr>
             <a:r>
@@ -16330,13 +16051,6 @@
           </a:solidFill>
           <a:ln/>
         </p:spPr>
-        <p:txBody>
-          <a:bodyPr/>
-          <a:lstStyle/>
-          <a:p>
-            <a:endParaRPr lang="en-EG"/>
-          </a:p>
-        </p:txBody>
       </p:sp>
       <p:sp>
         <p:nvSpPr>
@@ -16359,7 +16073,7 @@
           <a:bodyPr wrap="square" lIns="0" tIns="0" rIns="0" bIns="0" rtlCol="0" anchor="ctr"/>
           <a:lstStyle/>
           <a:p>
-            <a:pPr marL="0" indent="0">
+            <a:pPr indent="0" marL="0">
               <a:buNone/>
             </a:pPr>
             <a:r>
@@ -16398,7 +16112,7 @@
           <a:bodyPr wrap="square" lIns="0" tIns="0" rIns="0" bIns="0" rtlCol="0" anchor="ctr"/>
           <a:lstStyle/>
           <a:p>
-            <a:pPr marL="0" indent="0">
+            <a:pPr indent="0" marL="0">
               <a:buNone/>
             </a:pPr>
             <a:r>
@@ -16435,13 +16149,6 @@
           </a:solidFill>
           <a:ln/>
         </p:spPr>
-        <p:txBody>
-          <a:bodyPr/>
-          <a:lstStyle/>
-          <a:p>
-            <a:endParaRPr lang="en-EG"/>
-          </a:p>
-        </p:txBody>
       </p:sp>
       <p:sp>
         <p:nvSpPr>
@@ -16464,7 +16171,7 @@
           <a:bodyPr wrap="square" lIns="0" tIns="0" rIns="0" bIns="0" rtlCol="0" anchor="ctr"/>
           <a:lstStyle/>
           <a:p>
-            <a:pPr marL="0" indent="0">
+            <a:pPr indent="0" marL="0">
               <a:buNone/>
             </a:pPr>
             <a:r>
@@ -16503,7 +16210,7 @@
           <a:bodyPr wrap="square" lIns="0" tIns="0" rIns="0" bIns="0" rtlCol="0" anchor="ctr"/>
           <a:lstStyle/>
           <a:p>
-            <a:pPr marL="0" indent="0">
+            <a:pPr indent="0" marL="0">
               <a:buNone/>
             </a:pPr>
             <a:r>
@@ -16540,13 +16247,6 @@
           </a:solidFill>
           <a:ln/>
         </p:spPr>
-        <p:txBody>
-          <a:bodyPr/>
-          <a:lstStyle/>
-          <a:p>
-            <a:endParaRPr lang="en-EG"/>
-          </a:p>
-        </p:txBody>
       </p:sp>
       <p:sp>
         <p:nvSpPr>
@@ -16569,7 +16269,7 @@
           <a:bodyPr wrap="square" lIns="0" tIns="0" rIns="0" bIns="0" rtlCol="0" anchor="ctr"/>
           <a:lstStyle/>
           <a:p>
-            <a:pPr marL="0" indent="0">
+            <a:pPr indent="0" marL="0">
               <a:buNone/>
             </a:pPr>
             <a:r>
@@ -16608,7 +16308,7 @@
           <a:bodyPr wrap="square" lIns="0" tIns="0" rIns="0" bIns="0" rtlCol="0" anchor="ctr"/>
           <a:lstStyle/>
           <a:p>
-            <a:pPr marL="0" indent="0">
+            <a:pPr indent="0" marL="0">
               <a:buNone/>
             </a:pPr>
             <a:r>
@@ -16645,13 +16345,6 @@
           </a:solidFill>
           <a:ln/>
         </p:spPr>
-        <p:txBody>
-          <a:bodyPr/>
-          <a:lstStyle/>
-          <a:p>
-            <a:endParaRPr lang="en-EG"/>
-          </a:p>
-        </p:txBody>
       </p:sp>
       <p:sp>
         <p:nvSpPr>
@@ -16674,7 +16367,7 @@
           <a:bodyPr wrap="square" lIns="0" tIns="0" rIns="0" bIns="0" rtlCol="0" anchor="ctr"/>
           <a:lstStyle/>
           <a:p>
-            <a:pPr marL="0" indent="0">
+            <a:pPr indent="0" marL="0">
               <a:buNone/>
             </a:pPr>
             <a:r>
@@ -16713,7 +16406,7 @@
           <a:bodyPr wrap="square" lIns="0" tIns="0" rIns="0" bIns="0" rtlCol="0" anchor="ctr"/>
           <a:lstStyle/>
           <a:p>
-            <a:pPr marL="0" indent="0">
+            <a:pPr indent="0" marL="0">
               <a:buNone/>
             </a:pPr>
             <a:r>
@@ -16752,7 +16445,7 @@
           <a:bodyPr wrap="square" lIns="0" tIns="0" rIns="0" bIns="0" rtlCol="0" anchor="ctr"/>
           <a:lstStyle/>
           <a:p>
-            <a:pPr marL="0" indent="0">
+            <a:pPr indent="0" marL="0">
               <a:buNone/>
             </a:pPr>
             <a:r>
@@ -16791,7 +16484,7 @@
           <a:bodyPr wrap="square" lIns="0" tIns="0" rIns="0" bIns="0" rtlCol="0" anchor="ctr"/>
           <a:lstStyle/>
           <a:p>
-            <a:pPr marL="0" indent="0" algn="r">
+            <a:pPr algn="r" indent="0" marL="0">
               <a:buNone/>
             </a:pPr>
             <a:r>
@@ -16830,7 +16523,7 @@
           <a:bodyPr wrap="square" lIns="0" tIns="0" rIns="0" bIns="0" rtlCol="0" anchor="ctr"/>
           <a:lstStyle/>
           <a:p>
-            <a:pPr marL="0" indent="0" algn="l">
+            <a:pPr algn="l" indent="0" marL="0">
               <a:buNone/>
             </a:pPr>
             <a:r>
@@ -16842,7 +16535,7 @@
                 <a:ea typeface="Arial" pitchFamily="34" charset="-122"/>
                 <a:cs typeface="Arial" pitchFamily="34" charset="-120"/>
               </a:rPr>
-              <a:t>Lumen Player · UX Scenario Document</a:t>
+              <a:t>Suvo · UX Scenario Document</a:t>
             </a:r>
             <a:endParaRPr lang="en-US" sz="900" dirty="0"/>
           </a:p>
@@ -16864,7 +16557,6 @@
         <a:solidFill>
           <a:srgbClr val="F5F7FB"/>
         </a:solidFill>
-        <a:effectLst/>
       </p:bgPr>
     </p:bg>
     <p:spTree>
@@ -16902,20 +16594,13 @@
           </a:solidFill>
           <a:ln/>
           <a:effectLst>
-            <a:outerShdw blurRad="127000" dist="38100" dir="8100000" algn="bl" rotWithShape="0">
+            <a:outerShdw sx="100000" sy="100000" kx="0" ky="0" algn="bl" rotWithShape="0" blurRad="127000" dist="38100" dir="8100000">
               <a:srgbClr val="9AA6BC">
                 <a:alpha val="28000"/>
               </a:srgbClr>
             </a:outerShdw>
           </a:effectLst>
         </p:spPr>
-        <p:txBody>
-          <a:bodyPr/>
-          <a:lstStyle/>
-          <a:p>
-            <a:endParaRPr lang="en-EG"/>
-          </a:p>
-        </p:txBody>
       </p:sp>
       <p:sp>
         <p:nvSpPr>
@@ -16938,7 +16623,7 @@
           <a:bodyPr wrap="square" lIns="0" tIns="0" rIns="0" bIns="0" rtlCol="0" anchor="ctr"/>
           <a:lstStyle/>
           <a:p>
-            <a:pPr marL="0" indent="0" algn="ctr">
+            <a:pPr algn="ctr" indent="0" marL="0">
               <a:buNone/>
             </a:pPr>
             <a:r>
@@ -16977,7 +16662,7 @@
           <a:bodyPr wrap="square" lIns="0" tIns="0" rIns="0" bIns="0" rtlCol="0" anchor="ctr"/>
           <a:lstStyle/>
           <a:p>
-            <a:pPr marL="0" indent="0" algn="l">
+            <a:pPr algn="l" indent="0" marL="0">
               <a:buNone/>
             </a:pPr>
             <a:r>
@@ -17016,7 +16701,7 @@
           <a:bodyPr wrap="square" lIns="0" tIns="0" rIns="0" bIns="0" rtlCol="0" anchor="ctr"/>
           <a:lstStyle/>
           <a:p>
-            <a:pPr marL="0" indent="0" algn="l">
+            <a:pPr algn="l" indent="0" marL="0">
               <a:buNone/>
             </a:pPr>
             <a:r>
@@ -17060,20 +16745,13 @@
             <a:prstDash val="solid"/>
           </a:ln>
           <a:effectLst>
-            <a:outerShdw blurRad="127000" dist="38100" dir="8100000" algn="bl" rotWithShape="0">
+            <a:outerShdw sx="100000" sy="100000" kx="0" ky="0" algn="bl" rotWithShape="0" blurRad="127000" dist="38100" dir="8100000">
               <a:srgbClr val="9AA6BC">
                 <a:alpha val="28000"/>
               </a:srgbClr>
             </a:outerShdw>
           </a:effectLst>
         </p:spPr>
-        <p:txBody>
-          <a:bodyPr/>
-          <a:lstStyle/>
-          <a:p>
-            <a:endParaRPr lang="en-EG"/>
-          </a:p>
-        </p:txBody>
       </p:sp>
       <p:sp>
         <p:nvSpPr>
@@ -17099,13 +16777,6 @@
             <a:prstDash val="solid"/>
           </a:ln>
         </p:spPr>
-        <p:txBody>
-          <a:bodyPr/>
-          <a:lstStyle/>
-          <a:p>
-            <a:endParaRPr lang="en-EG"/>
-          </a:p>
-        </p:txBody>
       </p:sp>
       <p:sp>
         <p:nvSpPr>
@@ -17128,7 +16799,7 @@
           <a:bodyPr wrap="square" lIns="0" tIns="0" rIns="0" bIns="0" rtlCol="0" anchor="ctr"/>
           <a:lstStyle/>
           <a:p>
-            <a:pPr marL="0" indent="0" algn="ctr">
+            <a:pPr algn="ctr" indent="0" marL="0">
               <a:buNone/>
             </a:pPr>
             <a:r>
@@ -17167,7 +16838,7 @@
           <a:bodyPr wrap="square" lIns="0" tIns="0" rIns="0" bIns="0" rtlCol="0" anchor="ctr"/>
           <a:lstStyle/>
           <a:p>
-            <a:pPr marL="0" indent="0" algn="ctr">
+            <a:pPr algn="ctr" indent="0" marL="0">
               <a:buNone/>
             </a:pPr>
             <a:r>
@@ -17206,7 +16877,7 @@
           <a:bodyPr wrap="square" lIns="0" tIns="0" rIns="0" bIns="0" rtlCol="0" anchor="t"/>
           <a:lstStyle/>
           <a:p>
-            <a:pPr marL="0" indent="0" algn="ctr">
+            <a:pPr algn="ctr" indent="0" marL="0">
               <a:buNone/>
             </a:pPr>
             <a:r>
@@ -17223,7 +16894,7 @@
             <a:endParaRPr lang="en-US" sz="1000" dirty="0"/>
           </a:p>
           <a:p>
-            <a:pPr marL="0" indent="0" algn="ctr">
+            <a:pPr algn="ctr" indent="0" marL="0">
               <a:buNone/>
             </a:pPr>
             <a:r>
@@ -17262,7 +16933,7 @@
           <a:bodyPr wrap="square" lIns="0" tIns="0" rIns="0" bIns="0" rtlCol="0" anchor="ctr"/>
           <a:lstStyle/>
           <a:p>
-            <a:pPr marL="0" indent="0" algn="ctr">
+            <a:pPr algn="ctr" indent="0" marL="0">
               <a:buNone/>
             </a:pPr>
             <a:r>
@@ -17306,20 +16977,13 @@
             <a:prstDash val="solid"/>
           </a:ln>
           <a:effectLst>
-            <a:outerShdw blurRad="127000" dist="38100" dir="8100000" algn="bl" rotWithShape="0">
+            <a:outerShdw sx="100000" sy="100000" kx="0" ky="0" algn="bl" rotWithShape="0" blurRad="127000" dist="38100" dir="8100000">
               <a:srgbClr val="9AA6BC">
                 <a:alpha val="28000"/>
               </a:srgbClr>
             </a:outerShdw>
           </a:effectLst>
         </p:spPr>
-        <p:txBody>
-          <a:bodyPr/>
-          <a:lstStyle/>
-          <a:p>
-            <a:endParaRPr lang="en-EG"/>
-          </a:p>
-        </p:txBody>
       </p:sp>
       <p:sp>
         <p:nvSpPr>
@@ -17345,13 +17009,6 @@
             <a:prstDash val="solid"/>
           </a:ln>
         </p:spPr>
-        <p:txBody>
-          <a:bodyPr/>
-          <a:lstStyle/>
-          <a:p>
-            <a:endParaRPr lang="en-EG"/>
-          </a:p>
-        </p:txBody>
       </p:sp>
       <p:sp>
         <p:nvSpPr>
@@ -17374,7 +17031,7 @@
           <a:bodyPr wrap="square" lIns="0" tIns="0" rIns="0" bIns="0" rtlCol="0" anchor="ctr"/>
           <a:lstStyle/>
           <a:p>
-            <a:pPr marL="0" indent="0" algn="ctr">
+            <a:pPr algn="ctr" indent="0" marL="0">
               <a:buNone/>
             </a:pPr>
             <a:r>
@@ -17413,7 +17070,7 @@
           <a:bodyPr wrap="square" lIns="0" tIns="0" rIns="0" bIns="0" rtlCol="0" anchor="ctr"/>
           <a:lstStyle/>
           <a:p>
-            <a:pPr marL="0" indent="0" algn="ctr">
+            <a:pPr algn="ctr" indent="0" marL="0">
               <a:buNone/>
             </a:pPr>
             <a:r>
@@ -17430,7 +17087,7 @@
             <a:endParaRPr lang="en-US" sz="1450" dirty="0"/>
           </a:p>
           <a:p>
-            <a:pPr marL="0" indent="0" algn="ctr">
+            <a:pPr algn="ctr" indent="0" marL="0">
               <a:buNone/>
             </a:pPr>
             <a:r>
@@ -17469,7 +17126,7 @@
           <a:bodyPr wrap="square" lIns="0" tIns="0" rIns="0" bIns="0" rtlCol="0" anchor="t"/>
           <a:lstStyle/>
           <a:p>
-            <a:pPr marL="0" indent="0" algn="ctr">
+            <a:pPr algn="ctr" indent="0" marL="0">
               <a:buNone/>
             </a:pPr>
             <a:r>
@@ -17486,7 +17143,7 @@
             <a:endParaRPr lang="en-US" sz="1000" dirty="0"/>
           </a:p>
           <a:p>
-            <a:pPr marL="0" indent="0" algn="ctr">
+            <a:pPr algn="ctr" indent="0" marL="0">
               <a:buNone/>
             </a:pPr>
             <a:r>
@@ -17525,7 +17182,7 @@
           <a:bodyPr wrap="square" lIns="0" tIns="0" rIns="0" bIns="0" rtlCol="0" anchor="ctr"/>
           <a:lstStyle/>
           <a:p>
-            <a:pPr marL="0" indent="0" algn="ctr">
+            <a:pPr algn="ctr" indent="0" marL="0">
               <a:buNone/>
             </a:pPr>
             <a:r>
@@ -17569,20 +17226,13 @@
             <a:prstDash val="solid"/>
           </a:ln>
           <a:effectLst>
-            <a:outerShdw blurRad="127000" dist="38100" dir="8100000" algn="bl" rotWithShape="0">
+            <a:outerShdw sx="100000" sy="100000" kx="0" ky="0" algn="bl" rotWithShape="0" blurRad="127000" dist="38100" dir="8100000">
               <a:srgbClr val="9AA6BC">
                 <a:alpha val="28000"/>
               </a:srgbClr>
             </a:outerShdw>
           </a:effectLst>
         </p:spPr>
-        <p:txBody>
-          <a:bodyPr/>
-          <a:lstStyle/>
-          <a:p>
-            <a:endParaRPr lang="en-EG"/>
-          </a:p>
-        </p:txBody>
       </p:sp>
       <p:sp>
         <p:nvSpPr>
@@ -17608,13 +17258,6 @@
             <a:prstDash val="solid"/>
           </a:ln>
         </p:spPr>
-        <p:txBody>
-          <a:bodyPr/>
-          <a:lstStyle/>
-          <a:p>
-            <a:endParaRPr lang="en-EG"/>
-          </a:p>
-        </p:txBody>
       </p:sp>
       <p:sp>
         <p:nvSpPr>
@@ -17637,7 +17280,7 @@
           <a:bodyPr wrap="square" lIns="0" tIns="0" rIns="0" bIns="0" rtlCol="0" anchor="ctr"/>
           <a:lstStyle/>
           <a:p>
-            <a:pPr marL="0" indent="0" algn="ctr">
+            <a:pPr algn="ctr" indent="0" marL="0">
               <a:buNone/>
             </a:pPr>
             <a:r>
@@ -17676,7 +17319,7 @@
           <a:bodyPr wrap="square" lIns="0" tIns="0" rIns="0" bIns="0" rtlCol="0" anchor="ctr"/>
           <a:lstStyle/>
           <a:p>
-            <a:pPr marL="0" indent="0" algn="ctr">
+            <a:pPr algn="ctr" indent="0" marL="0">
               <a:buNone/>
             </a:pPr>
             <a:r>
@@ -17693,7 +17336,7 @@
             <a:endParaRPr lang="en-US" sz="1450" dirty="0"/>
           </a:p>
           <a:p>
-            <a:pPr marL="0" indent="0" algn="ctr">
+            <a:pPr algn="ctr" indent="0" marL="0">
               <a:buNone/>
             </a:pPr>
             <a:r>
@@ -17732,7 +17375,7 @@
           <a:bodyPr wrap="square" lIns="0" tIns="0" rIns="0" bIns="0" rtlCol="0" anchor="t"/>
           <a:lstStyle/>
           <a:p>
-            <a:pPr marL="0" indent="0" algn="ctr">
+            <a:pPr algn="ctr" indent="0" marL="0">
               <a:buNone/>
             </a:pPr>
             <a:r>
@@ -17749,7 +17392,7 @@
             <a:endParaRPr lang="en-US" sz="1000" dirty="0"/>
           </a:p>
           <a:p>
-            <a:pPr marL="0" indent="0" algn="ctr">
+            <a:pPr algn="ctr" indent="0" marL="0">
               <a:buNone/>
             </a:pPr>
             <a:r>
@@ -17788,7 +17431,7 @@
           <a:bodyPr wrap="square" lIns="0" tIns="0" rIns="0" bIns="0" rtlCol="0" anchor="ctr"/>
           <a:lstStyle/>
           <a:p>
-            <a:pPr marL="0" indent="0" algn="ctr">
+            <a:pPr algn="ctr" indent="0" marL="0">
               <a:buNone/>
             </a:pPr>
             <a:r>
@@ -17832,20 +17475,13 @@
             <a:prstDash val="solid"/>
           </a:ln>
           <a:effectLst>
-            <a:outerShdw blurRad="127000" dist="38100" dir="8100000" algn="bl" rotWithShape="0">
+            <a:outerShdw sx="100000" sy="100000" kx="0" ky="0" algn="bl" rotWithShape="0" blurRad="127000" dist="38100" dir="8100000">
               <a:srgbClr val="9AA6BC">
                 <a:alpha val="28000"/>
               </a:srgbClr>
             </a:outerShdw>
           </a:effectLst>
         </p:spPr>
-        <p:txBody>
-          <a:bodyPr/>
-          <a:lstStyle/>
-          <a:p>
-            <a:endParaRPr lang="en-EG"/>
-          </a:p>
-        </p:txBody>
       </p:sp>
       <p:sp>
         <p:nvSpPr>
@@ -17871,13 +17507,6 @@
             <a:prstDash val="solid"/>
           </a:ln>
         </p:spPr>
-        <p:txBody>
-          <a:bodyPr/>
-          <a:lstStyle/>
-          <a:p>
-            <a:endParaRPr lang="en-EG"/>
-          </a:p>
-        </p:txBody>
       </p:sp>
       <p:sp>
         <p:nvSpPr>
@@ -17900,7 +17529,7 @@
           <a:bodyPr wrap="square" lIns="0" tIns="0" rIns="0" bIns="0" rtlCol="0" anchor="ctr"/>
           <a:lstStyle/>
           <a:p>
-            <a:pPr marL="0" indent="0" algn="ctr">
+            <a:pPr algn="ctr" indent="0" marL="0">
               <a:buNone/>
             </a:pPr>
             <a:r>
@@ -17939,7 +17568,7 @@
           <a:bodyPr wrap="square" lIns="0" tIns="0" rIns="0" bIns="0" rtlCol="0" anchor="ctr"/>
           <a:lstStyle/>
           <a:p>
-            <a:pPr marL="0" indent="0" algn="ctr">
+            <a:pPr algn="ctr" indent="0" marL="0">
               <a:buNone/>
             </a:pPr>
             <a:r>
@@ -17978,7 +17607,7 @@
           <a:bodyPr wrap="square" lIns="0" tIns="0" rIns="0" bIns="0" rtlCol="0" anchor="t"/>
           <a:lstStyle/>
           <a:p>
-            <a:pPr marL="0" indent="0" algn="ctr">
+            <a:pPr algn="ctr" indent="0" marL="0">
               <a:buNone/>
             </a:pPr>
             <a:r>
@@ -17995,7 +17624,7 @@
             <a:endParaRPr lang="en-US" sz="1000" dirty="0"/>
           </a:p>
           <a:p>
-            <a:pPr marL="0" indent="0" algn="ctr">
+            <a:pPr algn="ctr" indent="0" marL="0">
               <a:buNone/>
             </a:pPr>
             <a:r>
@@ -18034,7 +17663,7 @@
           <a:bodyPr wrap="square" lIns="0" tIns="0" rIns="0" bIns="0" rtlCol="0" anchor="ctr"/>
           <a:lstStyle/>
           <a:p>
-            <a:pPr marL="0" indent="0" algn="ctr">
+            <a:pPr algn="ctr" indent="0" marL="0">
               <a:buNone/>
             </a:pPr>
             <a:r>
@@ -18078,20 +17707,13 @@
             <a:prstDash val="solid"/>
           </a:ln>
           <a:effectLst>
-            <a:outerShdw blurRad="127000" dist="38100" dir="8100000" algn="bl" rotWithShape="0">
+            <a:outerShdw sx="100000" sy="100000" kx="0" ky="0" algn="bl" rotWithShape="0" blurRad="127000" dist="38100" dir="8100000">
               <a:srgbClr val="9AA6BC">
                 <a:alpha val="28000"/>
               </a:srgbClr>
             </a:outerShdw>
           </a:effectLst>
         </p:spPr>
-        <p:txBody>
-          <a:bodyPr/>
-          <a:lstStyle/>
-          <a:p>
-            <a:endParaRPr lang="en-EG"/>
-          </a:p>
-        </p:txBody>
       </p:sp>
       <p:sp>
         <p:nvSpPr>
@@ -18117,13 +17739,6 @@
             <a:prstDash val="solid"/>
           </a:ln>
         </p:spPr>
-        <p:txBody>
-          <a:bodyPr/>
-          <a:lstStyle/>
-          <a:p>
-            <a:endParaRPr lang="en-EG"/>
-          </a:p>
-        </p:txBody>
       </p:sp>
       <p:sp>
         <p:nvSpPr>
@@ -18146,7 +17761,7 @@
           <a:bodyPr wrap="square" lIns="0" tIns="0" rIns="0" bIns="0" rtlCol="0" anchor="ctr"/>
           <a:lstStyle/>
           <a:p>
-            <a:pPr marL="0" indent="0" algn="ctr">
+            <a:pPr algn="ctr" indent="0" marL="0">
               <a:buNone/>
             </a:pPr>
             <a:r>
@@ -18185,7 +17800,7 @@
           <a:bodyPr wrap="square" lIns="0" tIns="0" rIns="0" bIns="0" rtlCol="0" anchor="ctr"/>
           <a:lstStyle/>
           <a:p>
-            <a:pPr marL="0" indent="0" algn="ctr">
+            <a:pPr algn="ctr" indent="0" marL="0">
               <a:buNone/>
             </a:pPr>
             <a:r>
@@ -18224,7 +17839,7 @@
           <a:bodyPr wrap="square" lIns="0" tIns="0" rIns="0" bIns="0" rtlCol="0" anchor="t"/>
           <a:lstStyle/>
           <a:p>
-            <a:pPr marL="0" indent="0" algn="ctr">
+            <a:pPr algn="ctr" indent="0" marL="0">
               <a:buNone/>
             </a:pPr>
             <a:r>
@@ -18241,7 +17856,7 @@
             <a:endParaRPr lang="en-US" sz="1000" dirty="0"/>
           </a:p>
           <a:p>
-            <a:pPr marL="0" indent="0" algn="ctr">
+            <a:pPr algn="ctr" indent="0" marL="0">
               <a:buNone/>
             </a:pPr>
             <a:r>
@@ -18280,7 +17895,7 @@
           <a:bodyPr wrap="square" lIns="0" tIns="0" rIns="0" bIns="0" rtlCol="0" anchor="ctr"/>
           <a:lstStyle/>
           <a:p>
-            <a:pPr marL="0" indent="0" algn="ctr">
+            <a:pPr algn="ctr" indent="0" marL="0">
               <a:buNone/>
             </a:pPr>
             <a:r>
@@ -18324,20 +17939,13 @@
             <a:prstDash val="solid"/>
           </a:ln>
           <a:effectLst>
-            <a:outerShdw blurRad="127000" dist="38100" dir="8100000" algn="bl" rotWithShape="0">
+            <a:outerShdw sx="100000" sy="100000" kx="0" ky="0" algn="bl" rotWithShape="0" blurRad="127000" dist="38100" dir="8100000">
               <a:srgbClr val="9AA6BC">
                 <a:alpha val="28000"/>
               </a:srgbClr>
             </a:outerShdw>
           </a:effectLst>
         </p:spPr>
-        <p:txBody>
-          <a:bodyPr/>
-          <a:lstStyle/>
-          <a:p>
-            <a:endParaRPr lang="en-EG"/>
-          </a:p>
-        </p:txBody>
       </p:sp>
       <p:sp>
         <p:nvSpPr>
@@ -18363,13 +17971,6 @@
             <a:prstDash val="solid"/>
           </a:ln>
         </p:spPr>
-        <p:txBody>
-          <a:bodyPr/>
-          <a:lstStyle/>
-          <a:p>
-            <a:endParaRPr lang="en-EG"/>
-          </a:p>
-        </p:txBody>
       </p:sp>
       <p:sp>
         <p:nvSpPr>
@@ -18392,7 +17993,7 @@
           <a:bodyPr wrap="square" lIns="0" tIns="0" rIns="0" bIns="0" rtlCol="0" anchor="ctr"/>
           <a:lstStyle/>
           <a:p>
-            <a:pPr marL="0" indent="0" algn="ctr">
+            <a:pPr algn="ctr" indent="0" marL="0">
               <a:buNone/>
             </a:pPr>
             <a:r>
@@ -18431,7 +18032,7 @@
           <a:bodyPr wrap="square" lIns="0" tIns="0" rIns="0" bIns="0" rtlCol="0" anchor="ctr"/>
           <a:lstStyle/>
           <a:p>
-            <a:pPr marL="0" indent="0" algn="ctr">
+            <a:pPr algn="ctr" indent="0" marL="0">
               <a:buNone/>
             </a:pPr>
             <a:r>
@@ -18448,7 +18049,7 @@
             <a:endParaRPr lang="en-US" sz="1450" dirty="0"/>
           </a:p>
           <a:p>
-            <a:pPr marL="0" indent="0" algn="ctr">
+            <a:pPr algn="ctr" indent="0" marL="0">
               <a:buNone/>
             </a:pPr>
             <a:r>
@@ -18487,7 +18088,7 @@
           <a:bodyPr wrap="square" lIns="0" tIns="0" rIns="0" bIns="0" rtlCol="0" anchor="t"/>
           <a:lstStyle/>
           <a:p>
-            <a:pPr marL="0" indent="0" algn="ctr">
+            <a:pPr algn="ctr" indent="0" marL="0">
               <a:buNone/>
             </a:pPr>
             <a:r>
@@ -18504,7 +18105,7 @@
             <a:endParaRPr lang="en-US" sz="1000" dirty="0"/>
           </a:p>
           <a:p>
-            <a:pPr marL="0" indent="0" algn="ctr">
+            <a:pPr algn="ctr" indent="0" marL="0">
               <a:buNone/>
             </a:pPr>
             <a:r>
@@ -18548,20 +18149,13 @@
             <a:prstDash val="dash"/>
           </a:ln>
           <a:effectLst>
-            <a:outerShdw blurRad="127000" dist="38100" dir="8100000" algn="bl" rotWithShape="0">
+            <a:outerShdw sx="100000" sy="100000" kx="0" ky="0" algn="bl" rotWithShape="0" blurRad="127000" dist="38100" dir="8100000">
               <a:srgbClr val="9AA6BC">
                 <a:alpha val="28000"/>
               </a:srgbClr>
             </a:outerShdw>
           </a:effectLst>
         </p:spPr>
-        <p:txBody>
-          <a:bodyPr/>
-          <a:lstStyle/>
-          <a:p>
-            <a:endParaRPr lang="en-EG"/>
-          </a:p>
-        </p:txBody>
       </p:sp>
       <p:sp>
         <p:nvSpPr>
@@ -18584,7 +18178,7 @@
           <a:bodyPr wrap="square" lIns="0" tIns="0" rIns="0" bIns="0" rtlCol="0" anchor="ctr"/>
           <a:lstStyle/>
           <a:p>
-            <a:pPr marL="0" indent="0">
+            <a:pPr indent="0" marL="0">
               <a:lnSpc>
                 <a:spcPct val="102000"/>
               </a:lnSpc>
@@ -18604,7 +18198,7 @@
             <a:endParaRPr lang="en-US" sz="1300" dirty="0"/>
           </a:p>
           <a:p>
-            <a:pPr marL="0" indent="0">
+            <a:pPr indent="0" marL="0">
               <a:lnSpc>
                 <a:spcPct val="102000"/>
               </a:lnSpc>
@@ -18646,7 +18240,7 @@
           <a:bodyPr wrap="square" lIns="0" tIns="0" rIns="0" bIns="0" rtlCol="0" anchor="ctr"/>
           <a:lstStyle/>
           <a:p>
-            <a:pPr marL="0" indent="0" algn="r">
+            <a:pPr algn="r" indent="0" marL="0">
               <a:buNone/>
             </a:pPr>
             <a:r>
@@ -18685,7 +18279,7 @@
           <a:bodyPr wrap="square" lIns="0" tIns="0" rIns="0" bIns="0" rtlCol="0" anchor="ctr"/>
           <a:lstStyle/>
           <a:p>
-            <a:pPr marL="0" indent="0">
+            <a:pPr indent="0" marL="0">
               <a:buNone/>
             </a:pPr>
             <a:r>
@@ -18724,7 +18318,7 @@
           <a:bodyPr wrap="square" lIns="0" tIns="0" rIns="0" bIns="0" rtlCol="0" anchor="ctr"/>
           <a:lstStyle/>
           <a:p>
-            <a:pPr marL="0" indent="0" algn="r">
+            <a:pPr algn="r" indent="0" marL="0">
               <a:buNone/>
             </a:pPr>
             <a:r>
@@ -18763,7 +18357,7 @@
           <a:bodyPr wrap="square" lIns="0" tIns="0" rIns="0" bIns="0" rtlCol="0" anchor="ctr"/>
           <a:lstStyle/>
           <a:p>
-            <a:pPr marL="0" indent="0" algn="l">
+            <a:pPr algn="l" indent="0" marL="0">
               <a:buNone/>
             </a:pPr>
             <a:r>
@@ -18775,7 +18369,7 @@
                 <a:ea typeface="Arial" pitchFamily="34" charset="-122"/>
                 <a:cs typeface="Arial" pitchFamily="34" charset="-120"/>
               </a:rPr>
-              <a:t>Lumen Player · UX Scenario Document</a:t>
+              <a:t>Suvo · UX Scenario Document</a:t>
             </a:r>
             <a:endParaRPr lang="en-US" sz="900" dirty="0"/>
           </a:p>
@@ -18797,7 +18391,6 @@
         <a:solidFill>
           <a:srgbClr val="F5F7FB"/>
         </a:solidFill>
-        <a:effectLst/>
       </p:bgPr>
     </p:bg>
     <p:spTree>
@@ -18835,20 +18428,13 @@
           </a:solidFill>
           <a:ln/>
           <a:effectLst>
-            <a:outerShdw blurRad="127000" dist="38100" dir="8100000" algn="bl" rotWithShape="0">
+            <a:outerShdw sx="100000" sy="100000" kx="0" ky="0" algn="bl" rotWithShape="0" blurRad="127000" dist="38100" dir="8100000">
               <a:srgbClr val="9AA6BC">
                 <a:alpha val="28000"/>
               </a:srgbClr>
             </a:outerShdw>
           </a:effectLst>
         </p:spPr>
-        <p:txBody>
-          <a:bodyPr/>
-          <a:lstStyle/>
-          <a:p>
-            <a:endParaRPr lang="en-EG"/>
-          </a:p>
-        </p:txBody>
       </p:sp>
       <p:sp>
         <p:nvSpPr>
@@ -18871,7 +18457,7 @@
           <a:bodyPr wrap="square" lIns="0" tIns="0" rIns="0" bIns="0" rtlCol="0" anchor="ctr"/>
           <a:lstStyle/>
           <a:p>
-            <a:pPr marL="0" indent="0" algn="ctr">
+            <a:pPr algn="ctr" indent="0" marL="0">
               <a:buNone/>
             </a:pPr>
             <a:r>
@@ -18910,7 +18496,7 @@
           <a:bodyPr wrap="square" lIns="0" tIns="0" rIns="0" bIns="0" rtlCol="0" anchor="ctr"/>
           <a:lstStyle/>
           <a:p>
-            <a:pPr marL="0" indent="0" algn="l">
+            <a:pPr algn="l" indent="0" marL="0">
               <a:buNone/>
             </a:pPr>
             <a:r>
@@ -18949,7 +18535,7 @@
           <a:bodyPr wrap="square" lIns="0" tIns="0" rIns="0" bIns="0" rtlCol="0" anchor="ctr"/>
           <a:lstStyle/>
           <a:p>
-            <a:pPr marL="0" indent="0" algn="l">
+            <a:pPr algn="l" indent="0" marL="0">
               <a:buNone/>
             </a:pPr>
             <a:r>
@@ -18993,20 +18579,13 @@
             <a:prstDash val="solid"/>
           </a:ln>
           <a:effectLst>
-            <a:outerShdw blurRad="101600" dist="38100" dir="8100000" algn="bl" rotWithShape="0">
+            <a:outerShdw sx="100000" sy="100000" kx="0" ky="0" algn="bl" rotWithShape="0" blurRad="101600" dist="38100" dir="8100000">
               <a:srgbClr val="0F1320">
                 <a:alpha val="18000"/>
               </a:srgbClr>
             </a:outerShdw>
           </a:effectLst>
         </p:spPr>
-        <p:txBody>
-          <a:bodyPr/>
-          <a:lstStyle/>
-          <a:p>
-            <a:endParaRPr lang="en-EG"/>
-          </a:p>
-        </p:txBody>
       </p:sp>
       <p:sp>
         <p:nvSpPr>
@@ -19029,7 +18608,7 @@
           <a:bodyPr wrap="square" lIns="0" tIns="0" rIns="0" bIns="0" rtlCol="0" anchor="ctr"/>
           <a:lstStyle/>
           <a:p>
-            <a:pPr marL="0" indent="0">
+            <a:pPr indent="0" marL="0">
               <a:buNone/>
             </a:pPr>
             <a:r>
@@ -19041,7 +18620,7 @@
                 <a:ea typeface="Trebuchet MS" pitchFamily="34" charset="-122"/>
                 <a:cs typeface="Trebuchet MS" pitchFamily="34" charset="-120"/>
               </a:rPr>
-              <a:t>Lumen Player</a:t>
+              <a:t>Suvo</a:t>
             </a:r>
             <a:endParaRPr lang="en-US" sz="1200" dirty="0"/>
           </a:p>
@@ -19066,13 +18645,6 @@
           </a:solidFill>
           <a:ln/>
         </p:spPr>
-        <p:txBody>
-          <a:bodyPr/>
-          <a:lstStyle/>
-          <a:p>
-            <a:endParaRPr lang="en-EG"/>
-          </a:p>
-        </p:txBody>
       </p:sp>
       <p:sp>
         <p:nvSpPr>
@@ -19100,13 +18672,6 @@
             <a:prstDash val="solid"/>
           </a:ln>
         </p:spPr>
-        <p:txBody>
-          <a:bodyPr/>
-          <a:lstStyle/>
-          <a:p>
-            <a:endParaRPr lang="en-EG"/>
-          </a:p>
-        </p:txBody>
       </p:sp>
       <p:sp>
         <p:nvSpPr>
@@ -19134,13 +18699,6 @@
             <a:prstDash val="solid"/>
           </a:ln>
         </p:spPr>
-        <p:txBody>
-          <a:bodyPr/>
-          <a:lstStyle/>
-          <a:p>
-            <a:endParaRPr lang="en-EG"/>
-          </a:p>
-        </p:txBody>
       </p:sp>
       <p:sp>
         <p:nvSpPr>
@@ -19168,13 +18726,6 @@
             <a:prstDash val="solid"/>
           </a:ln>
         </p:spPr>
-        <p:txBody>
-          <a:bodyPr/>
-          <a:lstStyle/>
-          <a:p>
-            <a:endParaRPr lang="en-EG"/>
-          </a:p>
-        </p:txBody>
       </p:sp>
       <p:sp>
         <p:nvSpPr>
@@ -19202,13 +18753,6 @@
             <a:prstDash val="solid"/>
           </a:ln>
         </p:spPr>
-        <p:txBody>
-          <a:bodyPr/>
-          <a:lstStyle/>
-          <a:p>
-            <a:endParaRPr lang="en-EG"/>
-          </a:p>
-        </p:txBody>
       </p:sp>
       <p:sp>
         <p:nvSpPr>
@@ -19234,20 +18778,13 @@
             <a:prstDash val="solid"/>
           </a:ln>
           <a:effectLst>
-            <a:outerShdw blurRad="101600" dist="38100" dir="8100000" algn="bl" rotWithShape="0">
+            <a:outerShdw sx="100000" sy="100000" kx="0" ky="0" algn="bl" rotWithShape="0" blurRad="101600" dist="38100" dir="8100000">
               <a:srgbClr val="0F1320">
                 <a:alpha val="18000"/>
               </a:srgbClr>
             </a:outerShdw>
           </a:effectLst>
         </p:spPr>
-        <p:txBody>
-          <a:bodyPr/>
-          <a:lstStyle/>
-          <a:p>
-            <a:endParaRPr lang="en-EG"/>
-          </a:p>
-        </p:txBody>
       </p:sp>
       <p:sp>
         <p:nvSpPr>
@@ -19270,7 +18807,7 @@
           <a:bodyPr wrap="square" lIns="0" tIns="0" rIns="0" bIns="0" rtlCol="0" anchor="ctr"/>
           <a:lstStyle/>
           <a:p>
-            <a:pPr marL="0" indent="0" algn="ctr">
+            <a:pPr algn="ctr" indent="0" marL="0">
               <a:buNone/>
             </a:pPr>
             <a:r>
@@ -19312,20 +18849,13 @@
             <a:prstDash val="solid"/>
           </a:ln>
           <a:effectLst>
-            <a:outerShdw blurRad="101600" dist="38100" dir="8100000" algn="bl" rotWithShape="0">
+            <a:outerShdw sx="100000" sy="100000" kx="0" ky="0" algn="bl" rotWithShape="0" blurRad="101600" dist="38100" dir="8100000">
               <a:srgbClr val="0F1320">
                 <a:alpha val="18000"/>
               </a:srgbClr>
             </a:outerShdw>
           </a:effectLst>
         </p:spPr>
-        <p:txBody>
-          <a:bodyPr/>
-          <a:lstStyle/>
-          <a:p>
-            <a:endParaRPr lang="en-EG"/>
-          </a:p>
-        </p:txBody>
       </p:sp>
       <p:sp>
         <p:nvSpPr>
@@ -19348,7 +18878,7 @@
           <a:bodyPr wrap="square" lIns="0" tIns="0" rIns="0" bIns="0" rtlCol="0" anchor="ctr"/>
           <a:lstStyle/>
           <a:p>
-            <a:pPr marL="0" indent="0" algn="ctr">
+            <a:pPr algn="ctr" indent="0" marL="0">
               <a:buNone/>
             </a:pPr>
             <a:r>
@@ -19390,20 +18920,13 @@
             <a:prstDash val="solid"/>
           </a:ln>
           <a:effectLst>
-            <a:outerShdw blurRad="101600" dist="38100" dir="8100000" algn="bl" rotWithShape="0">
+            <a:outerShdw sx="100000" sy="100000" kx="0" ky="0" algn="bl" rotWithShape="0" blurRad="101600" dist="38100" dir="8100000">
               <a:srgbClr val="0F1320">
                 <a:alpha val="18000"/>
               </a:srgbClr>
             </a:outerShdw>
           </a:effectLst>
         </p:spPr>
-        <p:txBody>
-          <a:bodyPr/>
-          <a:lstStyle/>
-          <a:p>
-            <a:endParaRPr lang="en-EG"/>
-          </a:p>
-        </p:txBody>
       </p:sp>
       <p:sp>
         <p:nvSpPr>
@@ -19426,7 +18949,7 @@
           <a:bodyPr wrap="square" lIns="0" tIns="0" rIns="0" bIns="0" rtlCol="0" anchor="ctr"/>
           <a:lstStyle/>
           <a:p>
-            <a:pPr marL="0" indent="0" algn="ctr">
+            <a:pPr algn="ctr" indent="0" marL="0">
               <a:buNone/>
             </a:pPr>
             <a:r>
@@ -19468,20 +18991,13 @@
             <a:prstDash val="solid"/>
           </a:ln>
           <a:effectLst>
-            <a:outerShdw blurRad="101600" dist="38100" dir="8100000" algn="bl" rotWithShape="0">
+            <a:outerShdw sx="100000" sy="100000" kx="0" ky="0" algn="bl" rotWithShape="0" blurRad="101600" dist="38100" dir="8100000">
               <a:srgbClr val="0F1320">
                 <a:alpha val="18000"/>
               </a:srgbClr>
             </a:outerShdw>
           </a:effectLst>
         </p:spPr>
-        <p:txBody>
-          <a:bodyPr/>
-          <a:lstStyle/>
-          <a:p>
-            <a:endParaRPr lang="en-EG"/>
-          </a:p>
-        </p:txBody>
       </p:sp>
       <p:sp>
         <p:nvSpPr>
@@ -19504,7 +19020,7 @@
           <a:bodyPr wrap="square" lIns="0" tIns="0" rIns="0" bIns="0" rtlCol="0" anchor="ctr"/>
           <a:lstStyle/>
           <a:p>
-            <a:pPr marL="0" indent="0" algn="ctr">
+            <a:pPr algn="ctr" indent="0" marL="0">
               <a:buNone/>
             </a:pPr>
             <a:r>
@@ -19543,7 +19059,7 @@
           <a:bodyPr wrap="square" lIns="0" tIns="0" rIns="0" bIns="0" rtlCol="0" anchor="t"/>
           <a:lstStyle/>
           <a:p>
-            <a:pPr marL="0" indent="0">
+            <a:pPr indent="0" marL="0">
               <a:lnSpc>
                 <a:spcPct val="105000"/>
               </a:lnSpc>
@@ -19583,13 +19099,6 @@
           </a:solidFill>
           <a:ln/>
         </p:spPr>
-        <p:txBody>
-          <a:bodyPr/>
-          <a:lstStyle/>
-          <a:p>
-            <a:endParaRPr lang="en-EG"/>
-          </a:p>
-        </p:txBody>
       </p:sp>
       <p:sp>
         <p:nvSpPr>
@@ -19612,7 +19121,7 @@
           <a:bodyPr wrap="square" lIns="0" tIns="0" rIns="0" bIns="0" rtlCol="0" anchor="ctr"/>
           <a:lstStyle/>
           <a:p>
-            <a:pPr marL="0" indent="0" algn="ctr">
+            <a:pPr algn="ctr" indent="0" marL="0">
               <a:buNone/>
             </a:pPr>
             <a:r>
@@ -19651,7 +19160,7 @@
           <a:bodyPr wrap="square" lIns="0" tIns="0" rIns="0" bIns="0" rtlCol="0" anchor="t"/>
           <a:lstStyle/>
           <a:p>
-            <a:pPr marL="0" indent="0" algn="l">
+            <a:pPr algn="l" indent="0" marL="0">
               <a:lnSpc>
                 <a:spcPct val="102000"/>
               </a:lnSpc>
@@ -19668,6 +19177,12 @@
               </a:rPr>
               <a:t>App title / brand  </a:t>
             </a:r>
+            <a:pPr algn="l" indent="0" marL="0">
+              <a:lnSpc>
+                <a:spcPct val="102000"/>
+              </a:lnSpc>
+              <a:buNone/>
+            </a:pPr>
             <a:r>
               <a:rPr lang="en-US" sz="1250" dirty="0">
                 <a:solidFill>
@@ -19702,13 +19217,6 @@
           </a:solidFill>
           <a:ln/>
         </p:spPr>
-        <p:txBody>
-          <a:bodyPr/>
-          <a:lstStyle/>
-          <a:p>
-            <a:endParaRPr lang="en-EG"/>
-          </a:p>
-        </p:txBody>
       </p:sp>
       <p:sp>
         <p:nvSpPr>
@@ -19731,7 +19239,7 @@
           <a:bodyPr wrap="square" lIns="0" tIns="0" rIns="0" bIns="0" rtlCol="0" anchor="ctr"/>
           <a:lstStyle/>
           <a:p>
-            <a:pPr marL="0" indent="0" algn="ctr">
+            <a:pPr algn="ctr" indent="0" marL="0">
               <a:buNone/>
             </a:pPr>
             <a:r>
@@ -19770,7 +19278,7 @@
           <a:bodyPr wrap="square" lIns="0" tIns="0" rIns="0" bIns="0" rtlCol="0" anchor="t"/>
           <a:lstStyle/>
           <a:p>
-            <a:pPr marL="0" indent="0" algn="l">
+            <a:pPr algn="l" indent="0" marL="0">
               <a:lnSpc>
                 <a:spcPct val="102000"/>
               </a:lnSpc>
@@ -19787,6 +19295,12 @@
               </a:rPr>
               <a:t>Profile &amp; settings  </a:t>
             </a:r>
+            <a:pPr algn="l" indent="0" marL="0">
+              <a:lnSpc>
+                <a:spcPct val="102000"/>
+              </a:lnSpc>
+              <a:buNone/>
+            </a:pPr>
             <a:r>
               <a:rPr lang="en-US" sz="1250" dirty="0">
                 <a:solidFill>
@@ -19821,13 +19335,6 @@
           </a:solidFill>
           <a:ln/>
         </p:spPr>
-        <p:txBody>
-          <a:bodyPr/>
-          <a:lstStyle/>
-          <a:p>
-            <a:endParaRPr lang="en-EG"/>
-          </a:p>
-        </p:txBody>
       </p:sp>
       <p:sp>
         <p:nvSpPr>
@@ -19850,7 +19357,7 @@
           <a:bodyPr wrap="square" lIns="0" tIns="0" rIns="0" bIns="0" rtlCol="0" anchor="ctr"/>
           <a:lstStyle/>
           <a:p>
-            <a:pPr marL="0" indent="0" algn="ctr">
+            <a:pPr algn="ctr" indent="0" marL="0">
               <a:buNone/>
             </a:pPr>
             <a:r>
@@ -19889,7 +19396,7 @@
           <a:bodyPr wrap="square" lIns="0" tIns="0" rIns="0" bIns="0" rtlCol="0" anchor="t"/>
           <a:lstStyle/>
           <a:p>
-            <a:pPr marL="0" indent="0" algn="l">
+            <a:pPr algn="l" indent="0" marL="0">
               <a:lnSpc>
                 <a:spcPct val="102000"/>
               </a:lnSpc>
@@ -19906,6 +19413,12 @@
               </a:rPr>
               <a:t>Focused / featured item  </a:t>
             </a:r>
+            <a:pPr algn="l" indent="0" marL="0">
+              <a:lnSpc>
+                <a:spcPct val="102000"/>
+              </a:lnSpc>
+              <a:buNone/>
+            </a:pPr>
             <a:r>
               <a:rPr lang="en-US" sz="1250" dirty="0">
                 <a:solidFill>
@@ -19940,13 +19453,6 @@
           </a:solidFill>
           <a:ln/>
         </p:spPr>
-        <p:txBody>
-          <a:bodyPr/>
-          <a:lstStyle/>
-          <a:p>
-            <a:endParaRPr lang="en-EG"/>
-          </a:p>
-        </p:txBody>
       </p:sp>
       <p:sp>
         <p:nvSpPr>
@@ -19969,7 +19475,7 @@
           <a:bodyPr wrap="square" lIns="0" tIns="0" rIns="0" bIns="0" rtlCol="0" anchor="ctr"/>
           <a:lstStyle/>
           <a:p>
-            <a:pPr marL="0" indent="0" algn="ctr">
+            <a:pPr algn="ctr" indent="0" marL="0">
               <a:buNone/>
             </a:pPr>
             <a:r>
@@ -20008,7 +19514,7 @@
           <a:bodyPr wrap="square" lIns="0" tIns="0" rIns="0" bIns="0" rtlCol="0" anchor="t"/>
           <a:lstStyle/>
           <a:p>
-            <a:pPr marL="0" indent="0" algn="l">
+            <a:pPr algn="l" indent="0" marL="0">
               <a:lnSpc>
                 <a:spcPct val="102000"/>
               </a:lnSpc>
@@ -20025,6 +19531,12 @@
               </a:rPr>
               <a:t>Selectable content tile  </a:t>
             </a:r>
+            <a:pPr algn="l" indent="0" marL="0">
+              <a:lnSpc>
+                <a:spcPct val="102000"/>
+              </a:lnSpc>
+              <a:buNone/>
+            </a:pPr>
             <a:r>
               <a:rPr lang="en-US" sz="1250" dirty="0">
                 <a:solidFill>
@@ -20061,7 +19573,7 @@
           <a:bodyPr wrap="square" lIns="0" tIns="0" rIns="0" bIns="0" rtlCol="0" anchor="t"/>
           <a:lstStyle/>
           <a:p>
-            <a:pPr marL="0" indent="0">
+            <a:pPr indent="0" marL="0">
               <a:lnSpc>
                 <a:spcPct val="103000"/>
               </a:lnSpc>
@@ -20078,6 +19590,12 @@
               </a:rPr>
               <a:t>Note on screenshots:  </a:t>
             </a:r>
+            <a:pPr indent="0" marL="0">
+              <a:lnSpc>
+                <a:spcPct val="103000"/>
+              </a:lnSpc>
+              <a:buNone/>
+            </a:pPr>
             <a:r>
               <a:rPr lang="en-US" sz="1150" i="1" dirty="0">
                 <a:solidFill>
@@ -20114,7 +19632,7 @@
           <a:bodyPr wrap="square" lIns="0" tIns="0" rIns="0" bIns="0" rtlCol="0" anchor="ctr"/>
           <a:lstStyle/>
           <a:p>
-            <a:pPr marL="0" indent="0" algn="r">
+            <a:pPr algn="r" indent="0" marL="0">
               <a:buNone/>
             </a:pPr>
             <a:r>
@@ -20153,7 +19671,7 @@
           <a:bodyPr wrap="square" lIns="0" tIns="0" rIns="0" bIns="0" rtlCol="0" anchor="ctr"/>
           <a:lstStyle/>
           <a:p>
-            <a:pPr marL="0" indent="0" algn="l">
+            <a:pPr algn="l" indent="0" marL="0">
               <a:buNone/>
             </a:pPr>
             <a:r>
@@ -20165,7 +19683,7 @@
                 <a:ea typeface="Arial" pitchFamily="34" charset="-122"/>
                 <a:cs typeface="Arial" pitchFamily="34" charset="-120"/>
               </a:rPr>
-              <a:t>Lumen Player · UX Scenario Document</a:t>
+              <a:t>Suvo · UX Scenario Document</a:t>
             </a:r>
             <a:endParaRPr lang="en-US" sz="900" dirty="0"/>
           </a:p>
@@ -20187,7 +19705,6 @@
         <a:solidFill>
           <a:srgbClr val="F5F7FB"/>
         </a:solidFill>
-        <a:effectLst/>
       </p:bgPr>
     </p:bg>
     <p:spTree>
@@ -20225,20 +19742,13 @@
           </a:solidFill>
           <a:ln/>
           <a:effectLst>
-            <a:outerShdw blurRad="127000" dist="38100" dir="8100000" algn="bl" rotWithShape="0">
+            <a:outerShdw sx="100000" sy="100000" kx="0" ky="0" algn="bl" rotWithShape="0" blurRad="127000" dist="38100" dir="8100000">
               <a:srgbClr val="9AA6BC">
                 <a:alpha val="28000"/>
               </a:srgbClr>
             </a:outerShdw>
           </a:effectLst>
         </p:spPr>
-        <p:txBody>
-          <a:bodyPr/>
-          <a:lstStyle/>
-          <a:p>
-            <a:endParaRPr lang="en-EG"/>
-          </a:p>
-        </p:txBody>
       </p:sp>
       <p:sp>
         <p:nvSpPr>
@@ -20261,7 +19771,7 @@
           <a:bodyPr wrap="square" lIns="0" tIns="0" rIns="0" bIns="0" rtlCol="0" anchor="ctr"/>
           <a:lstStyle/>
           <a:p>
-            <a:pPr marL="0" indent="0" algn="ctr">
+            <a:pPr algn="ctr" indent="0" marL="0">
               <a:buNone/>
             </a:pPr>
             <a:r>
@@ -20300,7 +19810,7 @@
           <a:bodyPr wrap="square" lIns="0" tIns="0" rIns="0" bIns="0" rtlCol="0" anchor="ctr"/>
           <a:lstStyle/>
           <a:p>
-            <a:pPr marL="0" indent="0" algn="l">
+            <a:pPr algn="l" indent="0" marL="0">
               <a:buNone/>
             </a:pPr>
             <a:r>
@@ -20339,7 +19849,7 @@
           <a:bodyPr wrap="square" lIns="0" tIns="0" rIns="0" bIns="0" rtlCol="0" anchor="ctr"/>
           <a:lstStyle/>
           <a:p>
-            <a:pPr marL="0" indent="0" algn="l">
+            <a:pPr algn="l" indent="0" marL="0">
               <a:buNone/>
             </a:pPr>
             <a:r>
@@ -20383,31 +19893,24 @@
             <a:prstDash val="solid"/>
           </a:ln>
           <a:effectLst>
-            <a:outerShdw blurRad="101600" dist="38100" dir="8100000" algn="bl" rotWithShape="0">
+            <a:outerShdw sx="100000" sy="100000" kx="0" ky="0" algn="bl" rotWithShape="0" blurRad="101600" dist="38100" dir="8100000">
               <a:srgbClr val="0F1320">
                 <a:alpha val="18000"/>
               </a:srgbClr>
             </a:outerShdw>
           </a:effectLst>
         </p:spPr>
-        <p:txBody>
-          <a:bodyPr/>
-          <a:lstStyle/>
-          <a:p>
-            <a:endParaRPr lang="en-EG"/>
-          </a:p>
-        </p:txBody>
       </p:sp>
       <p:pic>
         <p:nvPicPr>
-          <p:cNvPr id="7" name="Image 0" descr="Sign in screen"/>
+          <p:cNvPr id="7" name="Image 0" descr="Sign in screen">    </p:cNvPr>
           <p:cNvPicPr>
             <a:picLocks noChangeAspect="1"/>
           </p:cNvPicPr>
           <p:nvPr/>
         </p:nvPicPr>
         <p:blipFill>
-          <a:blip r:embed="rId3"/>
+          <a:blip r:embed="rId1"/>
           <a:stretch>
             <a:fillRect/>
           </a:stretch>
@@ -20446,20 +19949,13 @@
             <a:prstDash val="solid"/>
           </a:ln>
           <a:effectLst>
-            <a:outerShdw blurRad="101600" dist="38100" dir="8100000" algn="bl" rotWithShape="0">
+            <a:outerShdw sx="100000" sy="100000" kx="0" ky="0" algn="bl" rotWithShape="0" blurRad="101600" dist="38100" dir="8100000">
               <a:srgbClr val="0F1320">
                 <a:alpha val="18000"/>
               </a:srgbClr>
             </a:outerShdw>
           </a:effectLst>
         </p:spPr>
-        <p:txBody>
-          <a:bodyPr/>
-          <a:lstStyle/>
-          <a:p>
-            <a:endParaRPr lang="en-EG"/>
-          </a:p>
-        </p:txBody>
       </p:sp>
       <p:sp>
         <p:nvSpPr>
@@ -20482,7 +19978,7 @@
           <a:bodyPr wrap="square" lIns="0" tIns="0" rIns="0" bIns="0" rtlCol="0" anchor="ctr"/>
           <a:lstStyle/>
           <a:p>
-            <a:pPr marL="0" indent="0" algn="ctr">
+            <a:pPr algn="ctr" indent="0" marL="0">
               <a:buNone/>
             </a:pPr>
             <a:r>
@@ -20524,20 +20020,13 @@
             <a:prstDash val="solid"/>
           </a:ln>
           <a:effectLst>
-            <a:outerShdw blurRad="101600" dist="38100" dir="8100000" algn="bl" rotWithShape="0">
+            <a:outerShdw sx="100000" sy="100000" kx="0" ky="0" algn="bl" rotWithShape="0" blurRad="101600" dist="38100" dir="8100000">
               <a:srgbClr val="0F1320">
                 <a:alpha val="18000"/>
               </a:srgbClr>
             </a:outerShdw>
           </a:effectLst>
         </p:spPr>
-        <p:txBody>
-          <a:bodyPr/>
-          <a:lstStyle/>
-          <a:p>
-            <a:endParaRPr lang="en-EG"/>
-          </a:p>
-        </p:txBody>
       </p:sp>
       <p:sp>
         <p:nvSpPr>
@@ -20560,7 +20049,7 @@
           <a:bodyPr wrap="square" lIns="0" tIns="0" rIns="0" bIns="0" rtlCol="0" anchor="ctr"/>
           <a:lstStyle/>
           <a:p>
-            <a:pPr marL="0" indent="0" algn="ctr">
+            <a:pPr algn="ctr" indent="0" marL="0">
               <a:buNone/>
             </a:pPr>
             <a:r>
@@ -20602,20 +20091,13 @@
             <a:prstDash val="solid"/>
           </a:ln>
           <a:effectLst>
-            <a:outerShdw blurRad="101600" dist="38100" dir="8100000" algn="bl" rotWithShape="0">
+            <a:outerShdw sx="100000" sy="100000" kx="0" ky="0" algn="bl" rotWithShape="0" blurRad="101600" dist="38100" dir="8100000">
               <a:srgbClr val="0F1320">
                 <a:alpha val="18000"/>
               </a:srgbClr>
             </a:outerShdw>
           </a:effectLst>
         </p:spPr>
-        <p:txBody>
-          <a:bodyPr/>
-          <a:lstStyle/>
-          <a:p>
-            <a:endParaRPr lang="en-EG"/>
-          </a:p>
-        </p:txBody>
       </p:sp>
       <p:sp>
         <p:nvSpPr>
@@ -20638,7 +20120,7 @@
           <a:bodyPr wrap="square" lIns="0" tIns="0" rIns="0" bIns="0" rtlCol="0" anchor="ctr"/>
           <a:lstStyle/>
           <a:p>
-            <a:pPr marL="0" indent="0" algn="ctr">
+            <a:pPr algn="ctr" indent="0" marL="0">
               <a:buNone/>
             </a:pPr>
             <a:r>
@@ -20680,20 +20162,13 @@
             <a:prstDash val="solid"/>
           </a:ln>
           <a:effectLst>
-            <a:outerShdw blurRad="101600" dist="38100" dir="8100000" algn="bl" rotWithShape="0">
+            <a:outerShdw sx="100000" sy="100000" kx="0" ky="0" algn="bl" rotWithShape="0" blurRad="101600" dist="38100" dir="8100000">
               <a:srgbClr val="0F1320">
                 <a:alpha val="18000"/>
               </a:srgbClr>
             </a:outerShdw>
           </a:effectLst>
         </p:spPr>
-        <p:txBody>
-          <a:bodyPr/>
-          <a:lstStyle/>
-          <a:p>
-            <a:endParaRPr lang="en-EG"/>
-          </a:p>
-        </p:txBody>
       </p:sp>
       <p:sp>
         <p:nvSpPr>
@@ -20716,7 +20191,7 @@
           <a:bodyPr wrap="square" lIns="0" tIns="0" rIns="0" bIns="0" rtlCol="0" anchor="ctr"/>
           <a:lstStyle/>
           <a:p>
-            <a:pPr marL="0" indent="0" algn="ctr">
+            <a:pPr algn="ctr" indent="0" marL="0">
               <a:buNone/>
             </a:pPr>
             <a:r>
@@ -20758,20 +20233,13 @@
             <a:prstDash val="solid"/>
           </a:ln>
           <a:effectLst>
-            <a:outerShdw blurRad="101600" dist="38100" dir="8100000" algn="bl" rotWithShape="0">
+            <a:outerShdw sx="100000" sy="100000" kx="0" ky="0" algn="bl" rotWithShape="0" blurRad="101600" dist="38100" dir="8100000">
               <a:srgbClr val="0F1320">
                 <a:alpha val="18000"/>
               </a:srgbClr>
             </a:outerShdw>
           </a:effectLst>
         </p:spPr>
-        <p:txBody>
-          <a:bodyPr/>
-          <a:lstStyle/>
-          <a:p>
-            <a:endParaRPr lang="en-EG"/>
-          </a:p>
-        </p:txBody>
       </p:sp>
       <p:sp>
         <p:nvSpPr>
@@ -20794,7 +20262,7 @@
           <a:bodyPr wrap="square" lIns="0" tIns="0" rIns="0" bIns="0" rtlCol="0" anchor="ctr"/>
           <a:lstStyle/>
           <a:p>
-            <a:pPr marL="0" indent="0" algn="ctr">
+            <a:pPr algn="ctr" indent="0" marL="0">
               <a:buNone/>
             </a:pPr>
             <a:r>
@@ -20831,13 +20299,6 @@
           </a:solidFill>
           <a:ln/>
         </p:spPr>
-        <p:txBody>
-          <a:bodyPr/>
-          <a:lstStyle/>
-          <a:p>
-            <a:endParaRPr lang="en-EG"/>
-          </a:p>
-        </p:txBody>
       </p:sp>
       <p:sp>
         <p:nvSpPr>
@@ -20860,7 +20321,7 @@
           <a:bodyPr wrap="square" lIns="0" tIns="0" rIns="0" bIns="0" rtlCol="0" anchor="ctr"/>
           <a:lstStyle/>
           <a:p>
-            <a:pPr marL="0" indent="0" algn="ctr">
+            <a:pPr algn="ctr" indent="0" marL="0">
               <a:buNone/>
             </a:pPr>
             <a:r>
@@ -20899,7 +20360,7 @@
           <a:bodyPr wrap="square" lIns="0" tIns="0" rIns="0" bIns="0" rtlCol="0" anchor="t"/>
           <a:lstStyle/>
           <a:p>
-            <a:pPr marL="0" indent="0" algn="l">
+            <a:pPr algn="l" indent="0" marL="0">
               <a:lnSpc>
                 <a:spcPct val="102000"/>
               </a:lnSpc>
@@ -20916,6 +20377,12 @@
               </a:rPr>
               <a:t>Email  </a:t>
             </a:r>
+            <a:pPr algn="l" indent="0" marL="0">
+              <a:lnSpc>
+                <a:spcPct val="102000"/>
+              </a:lnSpc>
+              <a:buNone/>
+            </a:pPr>
             <a:r>
               <a:rPr lang="en-US" sz="1250" dirty="0">
                 <a:solidFill>
@@ -20950,13 +20417,6 @@
           </a:solidFill>
           <a:ln/>
         </p:spPr>
-        <p:txBody>
-          <a:bodyPr/>
-          <a:lstStyle/>
-          <a:p>
-            <a:endParaRPr lang="en-EG"/>
-          </a:p>
-        </p:txBody>
       </p:sp>
       <p:sp>
         <p:nvSpPr>
@@ -20979,7 +20439,7 @@
           <a:bodyPr wrap="square" lIns="0" tIns="0" rIns="0" bIns="0" rtlCol="0" anchor="ctr"/>
           <a:lstStyle/>
           <a:p>
-            <a:pPr marL="0" indent="0" algn="ctr">
+            <a:pPr algn="ctr" indent="0" marL="0">
               <a:buNone/>
             </a:pPr>
             <a:r>
@@ -21018,7 +20478,7 @@
           <a:bodyPr wrap="square" lIns="0" tIns="0" rIns="0" bIns="0" rtlCol="0" anchor="t"/>
           <a:lstStyle/>
           <a:p>
-            <a:pPr marL="0" indent="0" algn="l">
+            <a:pPr algn="l" indent="0" marL="0">
               <a:lnSpc>
                 <a:spcPct val="102000"/>
               </a:lnSpc>
@@ -21035,6 +20495,12 @@
               </a:rPr>
               <a:t>Password  </a:t>
             </a:r>
+            <a:pPr algn="l" indent="0" marL="0">
+              <a:lnSpc>
+                <a:spcPct val="102000"/>
+              </a:lnSpc>
+              <a:buNone/>
+            </a:pPr>
             <a:r>
               <a:rPr lang="en-US" sz="1250" dirty="0">
                 <a:solidFill>
@@ -21069,13 +20535,6 @@
           </a:solidFill>
           <a:ln/>
         </p:spPr>
-        <p:txBody>
-          <a:bodyPr/>
-          <a:lstStyle/>
-          <a:p>
-            <a:endParaRPr lang="en-EG"/>
-          </a:p>
-        </p:txBody>
       </p:sp>
       <p:sp>
         <p:nvSpPr>
@@ -21098,7 +20557,7 @@
           <a:bodyPr wrap="square" lIns="0" tIns="0" rIns="0" bIns="0" rtlCol="0" anchor="ctr"/>
           <a:lstStyle/>
           <a:p>
-            <a:pPr marL="0" indent="0" algn="ctr">
+            <a:pPr algn="ctr" indent="0" marL="0">
               <a:buNone/>
             </a:pPr>
             <a:r>
@@ -21137,7 +20596,7 @@
           <a:bodyPr wrap="square" lIns="0" tIns="0" rIns="0" bIns="0" rtlCol="0" anchor="t"/>
           <a:lstStyle/>
           <a:p>
-            <a:pPr marL="0" indent="0" algn="l">
+            <a:pPr algn="l" indent="0" marL="0">
               <a:lnSpc>
                 <a:spcPct val="102000"/>
               </a:lnSpc>
@@ -21154,6 +20613,12 @@
               </a:rPr>
               <a:t>Show / hide  </a:t>
             </a:r>
+            <a:pPr algn="l" indent="0" marL="0">
+              <a:lnSpc>
+                <a:spcPct val="102000"/>
+              </a:lnSpc>
+              <a:buNone/>
+            </a:pPr>
             <a:r>
               <a:rPr lang="en-US" sz="1250" dirty="0">
                 <a:solidFill>
@@ -21188,13 +20653,6 @@
           </a:solidFill>
           <a:ln/>
         </p:spPr>
-        <p:txBody>
-          <a:bodyPr/>
-          <a:lstStyle/>
-          <a:p>
-            <a:endParaRPr lang="en-EG"/>
-          </a:p>
-        </p:txBody>
       </p:sp>
       <p:sp>
         <p:nvSpPr>
@@ -21217,7 +20675,7 @@
           <a:bodyPr wrap="square" lIns="0" tIns="0" rIns="0" bIns="0" rtlCol="0" anchor="ctr"/>
           <a:lstStyle/>
           <a:p>
-            <a:pPr marL="0" indent="0" algn="ctr">
+            <a:pPr algn="ctr" indent="0" marL="0">
               <a:buNone/>
             </a:pPr>
             <a:r>
@@ -21256,7 +20714,7 @@
           <a:bodyPr wrap="square" lIns="0" tIns="0" rIns="0" bIns="0" rtlCol="0" anchor="t"/>
           <a:lstStyle/>
           <a:p>
-            <a:pPr marL="0" indent="0" algn="l">
+            <a:pPr algn="l" indent="0" marL="0">
               <a:lnSpc>
                 <a:spcPct val="102000"/>
               </a:lnSpc>
@@ -21273,6 +20731,12 @@
               </a:rPr>
               <a:t>Sign In  </a:t>
             </a:r>
+            <a:pPr algn="l" indent="0" marL="0">
+              <a:lnSpc>
+                <a:spcPct val="102000"/>
+              </a:lnSpc>
+              <a:buNone/>
+            </a:pPr>
             <a:r>
               <a:rPr lang="en-US" sz="1250" dirty="0">
                 <a:solidFill>
@@ -21307,13 +20771,6 @@
           </a:solidFill>
           <a:ln/>
         </p:spPr>
-        <p:txBody>
-          <a:bodyPr/>
-          <a:lstStyle/>
-          <a:p>
-            <a:endParaRPr lang="en-EG"/>
-          </a:p>
-        </p:txBody>
       </p:sp>
       <p:sp>
         <p:nvSpPr>
@@ -21336,7 +20793,7 @@
           <a:bodyPr wrap="square" lIns="0" tIns="0" rIns="0" bIns="0" rtlCol="0" anchor="ctr"/>
           <a:lstStyle/>
           <a:p>
-            <a:pPr marL="0" indent="0" algn="ctr">
+            <a:pPr algn="ctr" indent="0" marL="0">
               <a:buNone/>
             </a:pPr>
             <a:r>
@@ -21375,7 +20832,7 @@
           <a:bodyPr wrap="square" lIns="0" tIns="0" rIns="0" bIns="0" rtlCol="0" anchor="t"/>
           <a:lstStyle/>
           <a:p>
-            <a:pPr marL="0" indent="0" algn="l">
+            <a:pPr algn="l" indent="0" marL="0">
               <a:lnSpc>
                 <a:spcPct val="102000"/>
               </a:lnSpc>
@@ -21392,6 +20849,12 @@
               </a:rPr>
               <a:t>Register  </a:t>
             </a:r>
+            <a:pPr algn="l" indent="0" marL="0">
+              <a:lnSpc>
+                <a:spcPct val="102000"/>
+              </a:lnSpc>
+              <a:buNone/>
+            </a:pPr>
             <a:r>
               <a:rPr lang="en-US" sz="1250" dirty="0">
                 <a:solidFill>
@@ -21428,7 +20891,7 @@
           <a:bodyPr wrap="square" lIns="0" tIns="0" rIns="0" bIns="0" rtlCol="0" anchor="t"/>
           <a:lstStyle/>
           <a:p>
-            <a:pPr marL="0" indent="0">
+            <a:pPr indent="0" marL="0">
               <a:lnSpc>
                 <a:spcPct val="104000"/>
               </a:lnSpc>
@@ -21443,7 +20906,7 @@
                 <a:ea typeface="Arial" pitchFamily="34" charset="-122"/>
                 <a:cs typeface="Arial" pitchFamily="34" charset="-120"/>
               </a:rPr>
-              <a:t>The account is a free Lumen Player account used only to sync favourites, history and profiles across the user's devices. It is not a content subscription.</a:t>
+              <a:t>The account is a free Suvo account used only to sync favourites, history and profiles across the user's devices. It is not a content subscription.</a:t>
             </a:r>
             <a:endParaRPr lang="en-US" sz="1150" dirty="0"/>
           </a:p>
@@ -21470,7 +20933,7 @@
           <a:bodyPr wrap="square" lIns="0" tIns="0" rIns="0" bIns="0" rtlCol="0" anchor="ctr"/>
           <a:lstStyle/>
           <a:p>
-            <a:pPr marL="0" indent="0" algn="r">
+            <a:pPr algn="r" indent="0" marL="0">
               <a:buNone/>
             </a:pPr>
             <a:r>
@@ -21509,7 +20972,7 @@
           <a:bodyPr wrap="square" lIns="0" tIns="0" rIns="0" bIns="0" rtlCol="0" anchor="ctr"/>
           <a:lstStyle/>
           <a:p>
-            <a:pPr marL="0" indent="0" algn="l">
+            <a:pPr algn="l" indent="0" marL="0">
               <a:buNone/>
             </a:pPr>
             <a:r>
@@ -21521,7 +20984,7 @@
                 <a:ea typeface="Arial" pitchFamily="34" charset="-122"/>
                 <a:cs typeface="Arial" pitchFamily="34" charset="-120"/>
               </a:rPr>
-              <a:t>Lumen Player · UX Scenario Document</a:t>
+              <a:t>Suvo · UX Scenario Document</a:t>
             </a:r>
             <a:endParaRPr lang="en-US" sz="900" dirty="0"/>
           </a:p>
@@ -21543,7 +21006,6 @@
         <a:solidFill>
           <a:srgbClr val="F5F7FB"/>
         </a:solidFill>
-        <a:effectLst/>
       </p:bgPr>
     </p:bg>
     <p:spTree>
@@ -21581,20 +21043,13 @@
           </a:solidFill>
           <a:ln/>
           <a:effectLst>
-            <a:outerShdw blurRad="127000" dist="38100" dir="8100000" algn="bl" rotWithShape="0">
+            <a:outerShdw sx="100000" sy="100000" kx="0" ky="0" algn="bl" rotWithShape="0" blurRad="127000" dist="38100" dir="8100000">
               <a:srgbClr val="9AA6BC">
                 <a:alpha val="28000"/>
               </a:srgbClr>
             </a:outerShdw>
           </a:effectLst>
         </p:spPr>
-        <p:txBody>
-          <a:bodyPr/>
-          <a:lstStyle/>
-          <a:p>
-            <a:endParaRPr lang="en-EG"/>
-          </a:p>
-        </p:txBody>
       </p:sp>
       <p:sp>
         <p:nvSpPr>
@@ -21617,7 +21072,7 @@
           <a:bodyPr wrap="square" lIns="0" tIns="0" rIns="0" bIns="0" rtlCol="0" anchor="ctr"/>
           <a:lstStyle/>
           <a:p>
-            <a:pPr marL="0" indent="0" algn="ctr">
+            <a:pPr algn="ctr" indent="0" marL="0">
               <a:buNone/>
             </a:pPr>
             <a:r>
@@ -21656,7 +21111,7 @@
           <a:bodyPr wrap="square" lIns="0" tIns="0" rIns="0" bIns="0" rtlCol="0" anchor="ctr"/>
           <a:lstStyle/>
           <a:p>
-            <a:pPr marL="0" indent="0" algn="l">
+            <a:pPr algn="l" indent="0" marL="0">
               <a:buNone/>
             </a:pPr>
             <a:r>
@@ -21695,7 +21150,7 @@
           <a:bodyPr wrap="square" lIns="0" tIns="0" rIns="0" bIns="0" rtlCol="0" anchor="ctr"/>
           <a:lstStyle/>
           <a:p>
-            <a:pPr marL="0" indent="0" algn="l">
+            <a:pPr algn="l" indent="0" marL="0">
               <a:buNone/>
             </a:pPr>
             <a:r>
@@ -21739,31 +21194,24 @@
             <a:prstDash val="solid"/>
           </a:ln>
           <a:effectLst>
-            <a:outerShdw blurRad="101600" dist="38100" dir="8100000" algn="bl" rotWithShape="0">
+            <a:outerShdw sx="100000" sy="100000" kx="0" ky="0" algn="bl" rotWithShape="0" blurRad="101600" dist="38100" dir="8100000">
               <a:srgbClr val="0F1320">
                 <a:alpha val="18000"/>
               </a:srgbClr>
             </a:outerShdw>
           </a:effectLst>
         </p:spPr>
-        <p:txBody>
-          <a:bodyPr/>
-          <a:lstStyle/>
-          <a:p>
-            <a:endParaRPr lang="en-EG"/>
-          </a:p>
-        </p:txBody>
       </p:sp>
       <p:pic>
         <p:nvPicPr>
-          <p:cNvPr id="7" name="Image 0" descr="Create account screen"/>
+          <p:cNvPr id="7" name="Image 0" descr="Create account screen">    </p:cNvPr>
           <p:cNvPicPr>
             <a:picLocks noChangeAspect="1"/>
           </p:cNvPicPr>
           <p:nvPr/>
         </p:nvPicPr>
         <p:blipFill>
-          <a:blip r:embed="rId3"/>
+          <a:blip r:embed="rId1"/>
           <a:stretch>
             <a:fillRect/>
           </a:stretch>
@@ -21802,20 +21250,13 @@
             <a:prstDash val="solid"/>
           </a:ln>
           <a:effectLst>
-            <a:outerShdw blurRad="101600" dist="38100" dir="8100000" algn="bl" rotWithShape="0">
+            <a:outerShdw sx="100000" sy="100000" kx="0" ky="0" algn="bl" rotWithShape="0" blurRad="101600" dist="38100" dir="8100000">
               <a:srgbClr val="0F1320">
                 <a:alpha val="18000"/>
               </a:srgbClr>
             </a:outerShdw>
           </a:effectLst>
         </p:spPr>
-        <p:txBody>
-          <a:bodyPr/>
-          <a:lstStyle/>
-          <a:p>
-            <a:endParaRPr lang="en-EG"/>
-          </a:p>
-        </p:txBody>
       </p:sp>
       <p:sp>
         <p:nvSpPr>
@@ -21838,7 +21279,7 @@
           <a:bodyPr wrap="square" lIns="0" tIns="0" rIns="0" bIns="0" rtlCol="0" anchor="ctr"/>
           <a:lstStyle/>
           <a:p>
-            <a:pPr marL="0" indent="0" algn="ctr">
+            <a:pPr algn="ctr" indent="0" marL="0">
               <a:buNone/>
             </a:pPr>
             <a:r>
@@ -21880,20 +21321,13 @@
             <a:prstDash val="solid"/>
           </a:ln>
           <a:effectLst>
-            <a:outerShdw blurRad="101600" dist="38100" dir="8100000" algn="bl" rotWithShape="0">
+            <a:outerShdw sx="100000" sy="100000" kx="0" ky="0" algn="bl" rotWithShape="0" blurRad="101600" dist="38100" dir="8100000">
               <a:srgbClr val="0F1320">
                 <a:alpha val="18000"/>
               </a:srgbClr>
             </a:outerShdw>
           </a:effectLst>
         </p:spPr>
-        <p:txBody>
-          <a:bodyPr/>
-          <a:lstStyle/>
-          <a:p>
-            <a:endParaRPr lang="en-EG"/>
-          </a:p>
-        </p:txBody>
       </p:sp>
       <p:sp>
         <p:nvSpPr>
@@ -21916,7 +21350,7 @@
           <a:bodyPr wrap="square" lIns="0" tIns="0" rIns="0" bIns="0" rtlCol="0" anchor="ctr"/>
           <a:lstStyle/>
           <a:p>
-            <a:pPr marL="0" indent="0" algn="ctr">
+            <a:pPr algn="ctr" indent="0" marL="0">
               <a:buNone/>
             </a:pPr>
             <a:r>
@@ -21958,20 +21392,13 @@
             <a:prstDash val="solid"/>
           </a:ln>
           <a:effectLst>
-            <a:outerShdw blurRad="101600" dist="38100" dir="8100000" algn="bl" rotWithShape="0">
+            <a:outerShdw sx="100000" sy="100000" kx="0" ky="0" algn="bl" rotWithShape="0" blurRad="101600" dist="38100" dir="8100000">
               <a:srgbClr val="0F1320">
                 <a:alpha val="18000"/>
               </a:srgbClr>
             </a:outerShdw>
           </a:effectLst>
         </p:spPr>
-        <p:txBody>
-          <a:bodyPr/>
-          <a:lstStyle/>
-          <a:p>
-            <a:endParaRPr lang="en-EG"/>
-          </a:p>
-        </p:txBody>
       </p:sp>
       <p:sp>
         <p:nvSpPr>
@@ -21994,7 +21421,7 @@
           <a:bodyPr wrap="square" lIns="0" tIns="0" rIns="0" bIns="0" rtlCol="0" anchor="ctr"/>
           <a:lstStyle/>
           <a:p>
-            <a:pPr marL="0" indent="0" algn="ctr">
+            <a:pPr algn="ctr" indent="0" marL="0">
               <a:buNone/>
             </a:pPr>
             <a:r>
@@ -22036,20 +21463,13 @@
             <a:prstDash val="solid"/>
           </a:ln>
           <a:effectLst>
-            <a:outerShdw blurRad="101600" dist="38100" dir="8100000" algn="bl" rotWithShape="0">
+            <a:outerShdw sx="100000" sy="100000" kx="0" ky="0" algn="bl" rotWithShape="0" blurRad="101600" dist="38100" dir="8100000">
               <a:srgbClr val="0F1320">
                 <a:alpha val="18000"/>
               </a:srgbClr>
             </a:outerShdw>
           </a:effectLst>
         </p:spPr>
-        <p:txBody>
-          <a:bodyPr/>
-          <a:lstStyle/>
-          <a:p>
-            <a:endParaRPr lang="en-EG"/>
-          </a:p>
-        </p:txBody>
       </p:sp>
       <p:sp>
         <p:nvSpPr>
@@ -22072,7 +21492,7 @@
           <a:bodyPr wrap="square" lIns="0" tIns="0" rIns="0" bIns="0" rtlCol="0" anchor="ctr"/>
           <a:lstStyle/>
           <a:p>
-            <a:pPr marL="0" indent="0" algn="ctr">
+            <a:pPr algn="ctr" indent="0" marL="0">
               <a:buNone/>
             </a:pPr>
             <a:r>
@@ -22114,20 +21534,13 @@
             <a:prstDash val="solid"/>
           </a:ln>
           <a:effectLst>
-            <a:outerShdw blurRad="101600" dist="38100" dir="8100000" algn="bl" rotWithShape="0">
+            <a:outerShdw sx="100000" sy="100000" kx="0" ky="0" algn="bl" rotWithShape="0" blurRad="101600" dist="38100" dir="8100000">
               <a:srgbClr val="0F1320">
                 <a:alpha val="18000"/>
               </a:srgbClr>
             </a:outerShdw>
           </a:effectLst>
         </p:spPr>
-        <p:txBody>
-          <a:bodyPr/>
-          <a:lstStyle/>
-          <a:p>
-            <a:endParaRPr lang="en-EG"/>
-          </a:p>
-        </p:txBody>
       </p:sp>
       <p:sp>
         <p:nvSpPr>
@@ -22150,7 +21563,7 @@
           <a:bodyPr wrap="square" lIns="0" tIns="0" rIns="0" bIns="0" rtlCol="0" anchor="ctr"/>
           <a:lstStyle/>
           <a:p>
-            <a:pPr marL="0" indent="0" algn="ctr">
+            <a:pPr algn="ctr" indent="0" marL="0">
               <a:buNone/>
             </a:pPr>
             <a:r>
@@ -22192,20 +21605,13 @@
             <a:prstDash val="solid"/>
           </a:ln>
           <a:effectLst>
-            <a:outerShdw blurRad="101600" dist="38100" dir="8100000" algn="bl" rotWithShape="0">
+            <a:outerShdw sx="100000" sy="100000" kx="0" ky="0" algn="bl" rotWithShape="0" blurRad="101600" dist="38100" dir="8100000">
               <a:srgbClr val="0F1320">
                 <a:alpha val="18000"/>
               </a:srgbClr>
             </a:outerShdw>
           </a:effectLst>
         </p:spPr>
-        <p:txBody>
-          <a:bodyPr/>
-          <a:lstStyle/>
-          <a:p>
-            <a:endParaRPr lang="en-EG"/>
-          </a:p>
-        </p:txBody>
       </p:sp>
       <p:sp>
         <p:nvSpPr>
@@ -22228,7 +21634,7 @@
           <a:bodyPr wrap="square" lIns="0" tIns="0" rIns="0" bIns="0" rtlCol="0" anchor="ctr"/>
           <a:lstStyle/>
           <a:p>
-            <a:pPr marL="0" indent="0" algn="ctr">
+            <a:pPr algn="ctr" indent="0" marL="0">
               <a:buNone/>
             </a:pPr>
             <a:r>
@@ -22265,13 +21671,6 @@
           </a:solidFill>
           <a:ln/>
         </p:spPr>
-        <p:txBody>
-          <a:bodyPr/>
-          <a:lstStyle/>
-          <a:p>
-            <a:endParaRPr lang="en-EG"/>
-          </a:p>
-        </p:txBody>
       </p:sp>
       <p:sp>
         <p:nvSpPr>
@@ -22294,7 +21693,7 @@
           <a:bodyPr wrap="square" lIns="0" tIns="0" rIns="0" bIns="0" rtlCol="0" anchor="ctr"/>
           <a:lstStyle/>
           <a:p>
-            <a:pPr marL="0" indent="0" algn="ctr">
+            <a:pPr algn="ctr" indent="0" marL="0">
               <a:buNone/>
             </a:pPr>
             <a:r>
@@ -22333,7 +21732,7 @@
           <a:bodyPr wrap="square" lIns="0" tIns="0" rIns="0" bIns="0" rtlCol="0" anchor="t"/>
           <a:lstStyle/>
           <a:p>
-            <a:pPr marL="0" indent="0" algn="l">
+            <a:pPr algn="l" indent="0" marL="0">
               <a:lnSpc>
                 <a:spcPct val="102000"/>
               </a:lnSpc>
@@ -22350,6 +21749,12 @@
               </a:rPr>
               <a:t>Username  </a:t>
             </a:r>
+            <a:pPr algn="l" indent="0" marL="0">
+              <a:lnSpc>
+                <a:spcPct val="102000"/>
+              </a:lnSpc>
+              <a:buNone/>
+            </a:pPr>
             <a:r>
               <a:rPr lang="en-US" sz="1250" dirty="0">
                 <a:solidFill>
@@ -22384,13 +21789,6 @@
           </a:solidFill>
           <a:ln/>
         </p:spPr>
-        <p:txBody>
-          <a:bodyPr/>
-          <a:lstStyle/>
-          <a:p>
-            <a:endParaRPr lang="en-EG"/>
-          </a:p>
-        </p:txBody>
       </p:sp>
       <p:sp>
         <p:nvSpPr>
@@ -22413,7 +21811,7 @@
           <a:bodyPr wrap="square" lIns="0" tIns="0" rIns="0" bIns="0" rtlCol="0" anchor="ctr"/>
           <a:lstStyle/>
           <a:p>
-            <a:pPr marL="0" indent="0" algn="ctr">
+            <a:pPr algn="ctr" indent="0" marL="0">
               <a:buNone/>
             </a:pPr>
             <a:r>
@@ -22452,7 +21850,7 @@
           <a:bodyPr wrap="square" lIns="0" tIns="0" rIns="0" bIns="0" rtlCol="0" anchor="t"/>
           <a:lstStyle/>
           <a:p>
-            <a:pPr marL="0" indent="0" algn="l">
+            <a:pPr algn="l" indent="0" marL="0">
               <a:lnSpc>
                 <a:spcPct val="102000"/>
               </a:lnSpc>
@@ -22469,6 +21867,12 @@
               </a:rPr>
               <a:t>Email  </a:t>
             </a:r>
+            <a:pPr algn="l" indent="0" marL="0">
+              <a:lnSpc>
+                <a:spcPct val="102000"/>
+              </a:lnSpc>
+              <a:buNone/>
+            </a:pPr>
             <a:r>
               <a:rPr lang="en-US" sz="1250" dirty="0">
                 <a:solidFill>
@@ -22503,13 +21907,6 @@
           </a:solidFill>
           <a:ln/>
         </p:spPr>
-        <p:txBody>
-          <a:bodyPr/>
-          <a:lstStyle/>
-          <a:p>
-            <a:endParaRPr lang="en-EG"/>
-          </a:p>
-        </p:txBody>
       </p:sp>
       <p:sp>
         <p:nvSpPr>
@@ -22532,7 +21929,7 @@
           <a:bodyPr wrap="square" lIns="0" tIns="0" rIns="0" bIns="0" rtlCol="0" anchor="ctr"/>
           <a:lstStyle/>
           <a:p>
-            <a:pPr marL="0" indent="0" algn="ctr">
+            <a:pPr algn="ctr" indent="0" marL="0">
               <a:buNone/>
             </a:pPr>
             <a:r>
@@ -22571,7 +21968,7 @@
           <a:bodyPr wrap="square" lIns="0" tIns="0" rIns="0" bIns="0" rtlCol="0" anchor="t"/>
           <a:lstStyle/>
           <a:p>
-            <a:pPr marL="0" indent="0" algn="l">
+            <a:pPr algn="l" indent="0" marL="0">
               <a:lnSpc>
                 <a:spcPct val="102000"/>
               </a:lnSpc>
@@ -22588,6 +21985,12 @@
               </a:rPr>
               <a:t>Password  </a:t>
             </a:r>
+            <a:pPr algn="l" indent="0" marL="0">
+              <a:lnSpc>
+                <a:spcPct val="102000"/>
+              </a:lnSpc>
+              <a:buNone/>
+            </a:pPr>
             <a:r>
               <a:rPr lang="en-US" sz="1250" dirty="0">
                 <a:solidFill>
@@ -22622,13 +22025,6 @@
           </a:solidFill>
           <a:ln/>
         </p:spPr>
-        <p:txBody>
-          <a:bodyPr/>
-          <a:lstStyle/>
-          <a:p>
-            <a:endParaRPr lang="en-EG"/>
-          </a:p>
-        </p:txBody>
       </p:sp>
       <p:sp>
         <p:nvSpPr>
@@ -22651,7 +22047,7 @@
           <a:bodyPr wrap="square" lIns="0" tIns="0" rIns="0" bIns="0" rtlCol="0" anchor="ctr"/>
           <a:lstStyle/>
           <a:p>
-            <a:pPr marL="0" indent="0" algn="ctr">
+            <a:pPr algn="ctr" indent="0" marL="0">
               <a:buNone/>
             </a:pPr>
             <a:r>
@@ -22690,7 +22086,7 @@
           <a:bodyPr wrap="square" lIns="0" tIns="0" rIns="0" bIns="0" rtlCol="0" anchor="t"/>
           <a:lstStyle/>
           <a:p>
-            <a:pPr marL="0" indent="0" algn="l">
+            <a:pPr algn="l" indent="0" marL="0">
               <a:lnSpc>
                 <a:spcPct val="102000"/>
               </a:lnSpc>
@@ -22707,6 +22103,12 @@
               </a:rPr>
               <a:t>Confirm Password  </a:t>
             </a:r>
+            <a:pPr algn="l" indent="0" marL="0">
+              <a:lnSpc>
+                <a:spcPct val="102000"/>
+              </a:lnSpc>
+              <a:buNone/>
+            </a:pPr>
             <a:r>
               <a:rPr lang="en-US" sz="1250" dirty="0">
                 <a:solidFill>
@@ -22741,13 +22143,6 @@
           </a:solidFill>
           <a:ln/>
         </p:spPr>
-        <p:txBody>
-          <a:bodyPr/>
-          <a:lstStyle/>
-          <a:p>
-            <a:endParaRPr lang="en-EG"/>
-          </a:p>
-        </p:txBody>
       </p:sp>
       <p:sp>
         <p:nvSpPr>
@@ -22770,7 +22165,7 @@
           <a:bodyPr wrap="square" lIns="0" tIns="0" rIns="0" bIns="0" rtlCol="0" anchor="ctr"/>
           <a:lstStyle/>
           <a:p>
-            <a:pPr marL="0" indent="0" algn="ctr">
+            <a:pPr algn="ctr" indent="0" marL="0">
               <a:buNone/>
             </a:pPr>
             <a:r>
@@ -22809,7 +22204,7 @@
           <a:bodyPr wrap="square" lIns="0" tIns="0" rIns="0" bIns="0" rtlCol="0" anchor="t"/>
           <a:lstStyle/>
           <a:p>
-            <a:pPr marL="0" indent="0" algn="l">
+            <a:pPr algn="l" indent="0" marL="0">
               <a:lnSpc>
                 <a:spcPct val="102000"/>
               </a:lnSpc>
@@ -22826,6 +22221,12 @@
               </a:rPr>
               <a:t>Create Account  </a:t>
             </a:r>
+            <a:pPr algn="l" indent="0" marL="0">
+              <a:lnSpc>
+                <a:spcPct val="102000"/>
+              </a:lnSpc>
+              <a:buNone/>
+            </a:pPr>
             <a:r>
               <a:rPr lang="en-US" sz="1250" dirty="0">
                 <a:solidFill>
@@ -22860,13 +22261,6 @@
           </a:solidFill>
           <a:ln/>
         </p:spPr>
-        <p:txBody>
-          <a:bodyPr/>
-          <a:lstStyle/>
-          <a:p>
-            <a:endParaRPr lang="en-EG"/>
-          </a:p>
-        </p:txBody>
       </p:sp>
       <p:sp>
         <p:nvSpPr>
@@ -22889,7 +22283,7 @@
           <a:bodyPr wrap="square" lIns="0" tIns="0" rIns="0" bIns="0" rtlCol="0" anchor="ctr"/>
           <a:lstStyle/>
           <a:p>
-            <a:pPr marL="0" indent="0" algn="ctr">
+            <a:pPr algn="ctr" indent="0" marL="0">
               <a:buNone/>
             </a:pPr>
             <a:r>
@@ -22928,7 +22322,7 @@
           <a:bodyPr wrap="square" lIns="0" tIns="0" rIns="0" bIns="0" rtlCol="0" anchor="t"/>
           <a:lstStyle/>
           <a:p>
-            <a:pPr marL="0" indent="0" algn="l">
+            <a:pPr algn="l" indent="0" marL="0">
               <a:lnSpc>
                 <a:spcPct val="102000"/>
               </a:lnSpc>
@@ -22945,6 +22339,12 @@
               </a:rPr>
               <a:t>Sign In  </a:t>
             </a:r>
+            <a:pPr algn="l" indent="0" marL="0">
+              <a:lnSpc>
+                <a:spcPct val="102000"/>
+              </a:lnSpc>
+              <a:buNone/>
+            </a:pPr>
             <a:r>
               <a:rPr lang="en-US" sz="1250" dirty="0">
                 <a:solidFill>
@@ -22981,7 +22381,7 @@
           <a:bodyPr wrap="square" lIns="0" tIns="0" rIns="0" bIns="0" rtlCol="0" anchor="ctr"/>
           <a:lstStyle/>
           <a:p>
-            <a:pPr marL="0" indent="0" algn="r">
+            <a:pPr algn="r" indent="0" marL="0">
               <a:buNone/>
             </a:pPr>
             <a:r>
@@ -23020,7 +22420,7 @@
           <a:bodyPr wrap="square" lIns="0" tIns="0" rIns="0" bIns="0" rtlCol="0" anchor="ctr"/>
           <a:lstStyle/>
           <a:p>
-            <a:pPr marL="0" indent="0" algn="l">
+            <a:pPr algn="l" indent="0" marL="0">
               <a:buNone/>
             </a:pPr>
             <a:r>
@@ -23032,7 +22432,7 @@
                 <a:ea typeface="Arial" pitchFamily="34" charset="-122"/>
                 <a:cs typeface="Arial" pitchFamily="34" charset="-120"/>
               </a:rPr>
-              <a:t>Lumen Player · UX Scenario Document</a:t>
+              <a:t>Suvo · UX Scenario Document</a:t>
             </a:r>
             <a:endParaRPr lang="en-US" sz="900" dirty="0"/>
           </a:p>
@@ -23054,7 +22454,6 @@
         <a:solidFill>
           <a:srgbClr val="F5F7FB"/>
         </a:solidFill>
-        <a:effectLst/>
       </p:bgPr>
     </p:bg>
     <p:spTree>
@@ -23092,20 +22491,13 @@
           </a:solidFill>
           <a:ln/>
           <a:effectLst>
-            <a:outerShdw blurRad="127000" dist="38100" dir="8100000" algn="bl" rotWithShape="0">
+            <a:outerShdw sx="100000" sy="100000" kx="0" ky="0" algn="bl" rotWithShape="0" blurRad="127000" dist="38100" dir="8100000">
               <a:srgbClr val="9AA6BC">
                 <a:alpha val="28000"/>
               </a:srgbClr>
             </a:outerShdw>
           </a:effectLst>
         </p:spPr>
-        <p:txBody>
-          <a:bodyPr/>
-          <a:lstStyle/>
-          <a:p>
-            <a:endParaRPr lang="en-EG"/>
-          </a:p>
-        </p:txBody>
       </p:sp>
       <p:sp>
         <p:nvSpPr>
@@ -23128,7 +22520,7 @@
           <a:bodyPr wrap="square" lIns="0" tIns="0" rIns="0" bIns="0" rtlCol="0" anchor="ctr"/>
           <a:lstStyle/>
           <a:p>
-            <a:pPr marL="0" indent="0" algn="ctr">
+            <a:pPr algn="ctr" indent="0" marL="0">
               <a:buNone/>
             </a:pPr>
             <a:r>
@@ -23167,7 +22559,7 @@
           <a:bodyPr wrap="square" lIns="0" tIns="0" rIns="0" bIns="0" rtlCol="0" anchor="ctr"/>
           <a:lstStyle/>
           <a:p>
-            <a:pPr marL="0" indent="0" algn="l">
+            <a:pPr algn="l" indent="0" marL="0">
               <a:buNone/>
             </a:pPr>
             <a:r>
@@ -23206,7 +22598,7 @@
           <a:bodyPr wrap="square" lIns="0" tIns="0" rIns="0" bIns="0" rtlCol="0" anchor="ctr"/>
           <a:lstStyle/>
           <a:p>
-            <a:pPr marL="0" indent="0" algn="l">
+            <a:pPr algn="l" indent="0" marL="0">
               <a:buNone/>
             </a:pPr>
             <a:r>
@@ -23250,20 +22642,13 @@
             <a:prstDash val="solid"/>
           </a:ln>
           <a:effectLst>
-            <a:outerShdw blurRad="127000" dist="38100" dir="8100000" algn="bl" rotWithShape="0">
+            <a:outerShdw sx="100000" sy="100000" kx="0" ky="0" algn="bl" rotWithShape="0" blurRad="127000" dist="38100" dir="8100000">
               <a:srgbClr val="9AA6BC">
                 <a:alpha val="28000"/>
               </a:srgbClr>
             </a:outerShdw>
           </a:effectLst>
         </p:spPr>
-        <p:txBody>
-          <a:bodyPr/>
-          <a:lstStyle/>
-          <a:p>
-            <a:endParaRPr lang="en-EG"/>
-          </a:p>
-        </p:txBody>
       </p:sp>
       <p:sp>
         <p:nvSpPr>
@@ -23286,7 +22671,7 @@
           <a:bodyPr wrap="square" lIns="0" tIns="0" rIns="0" bIns="0" rtlCol="0" anchor="ctr"/>
           <a:lstStyle/>
           <a:p>
-            <a:pPr marL="0" indent="0">
+            <a:pPr indent="0" marL="0">
               <a:buNone/>
             </a:pPr>
             <a:r>
@@ -23325,7 +22710,7 @@
           <a:bodyPr wrap="square" lIns="0" tIns="0" rIns="0" bIns="0" rtlCol="0" anchor="ctr"/>
           <a:lstStyle/>
           <a:p>
-            <a:pPr marL="0" indent="0">
+            <a:pPr indent="0" marL="0">
               <a:buNone/>
             </a:pPr>
             <a:r>
@@ -23369,13 +22754,6 @@
             <a:prstDash val="dash"/>
           </a:ln>
         </p:spPr>
-        <p:txBody>
-          <a:bodyPr/>
-          <a:lstStyle/>
-          <a:p>
-            <a:endParaRPr lang="en-EG"/>
-          </a:p>
-        </p:txBody>
       </p:sp>
       <p:sp>
         <p:nvSpPr>
@@ -23398,14 +22776,19 @@
           <a:bodyPr wrap="square" lIns="0" tIns="0" rIns="0" bIns="0" rtlCol="0" anchor="ctr"/>
           <a:lstStyle/>
           <a:p>
-            <a:pPr marL="0" indent="0">
-              <a:buNone/>
-            </a:pPr>
-            <a:r>
-              <a:rPr lang="en-US" sz="1100" dirty="0">
-                <a:hlinkClick r:id="rId3"/>
-              </a:rPr>
-              <a:t>test@test.com</a:t>
+            <a:pPr indent="0" marL="0">
+              <a:buNone/>
+            </a:pPr>
+            <a:r>
+              <a:rPr lang="en-US" sz="1100" i="1" dirty="0">
+                <a:solidFill>
+                  <a:srgbClr val="B8860B"/>
+                </a:solidFill>
+                <a:latin typeface="Arial" pitchFamily="34" charset="0"/>
+                <a:ea typeface="Arial" pitchFamily="34" charset="-122"/>
+                <a:cs typeface="Arial" pitchFamily="34" charset="-120"/>
+              </a:rPr>
+              <a:t>‹ enter test account email ›</a:t>
             </a:r>
             <a:endParaRPr lang="en-US" sz="1100" dirty="0"/>
           </a:p>
@@ -23432,7 +22815,7 @@
           <a:bodyPr wrap="square" lIns="0" tIns="0" rIns="0" bIns="0" rtlCol="0" anchor="ctr"/>
           <a:lstStyle/>
           <a:p>
-            <a:pPr marL="0" indent="0">
+            <a:pPr indent="0" marL="0">
               <a:buNone/>
             </a:pPr>
             <a:r>
@@ -23476,13 +22859,6 @@
             <a:prstDash val="dash"/>
           </a:ln>
         </p:spPr>
-        <p:txBody>
-          <a:bodyPr/>
-          <a:lstStyle/>
-          <a:p>
-            <a:endParaRPr lang="en-EG"/>
-          </a:p>
-        </p:txBody>
       </p:sp>
       <p:sp>
         <p:nvSpPr>
@@ -23505,7 +22881,7 @@
           <a:bodyPr wrap="square" lIns="0" tIns="0" rIns="0" bIns="0" rtlCol="0" anchor="ctr"/>
           <a:lstStyle/>
           <a:p>
-            <a:pPr marL="0" indent="0">
+            <a:pPr indent="0" marL="0">
               <a:buNone/>
             </a:pPr>
             <a:r>
@@ -23517,7 +22893,7 @@
                 <a:ea typeface="Arial" pitchFamily="34" charset="-122"/>
                 <a:cs typeface="Arial" pitchFamily="34" charset="-120"/>
               </a:rPr>
-              <a:t>test.123</a:t>
+              <a:t>‹ enter test account password ›</a:t>
             </a:r>
             <a:endParaRPr lang="en-US" sz="1100" dirty="0"/>
           </a:p>
@@ -23544,7 +22920,7 @@
           <a:bodyPr wrap="square" lIns="0" tIns="0" rIns="0" bIns="0" rtlCol="0" anchor="ctr"/>
           <a:lstStyle/>
           <a:p>
-            <a:pPr marL="0" indent="0">
+            <a:pPr indent="0" marL="0">
               <a:buNone/>
             </a:pPr>
             <a:r>
@@ -23588,20 +22964,13 @@
             <a:prstDash val="solid"/>
           </a:ln>
           <a:effectLst>
-            <a:outerShdw blurRad="127000" dist="38100" dir="8100000" algn="bl" rotWithShape="0">
+            <a:outerShdw sx="100000" sy="100000" kx="0" ky="0" algn="bl" rotWithShape="0" blurRad="127000" dist="38100" dir="8100000">
               <a:srgbClr val="9AA6BC">
                 <a:alpha val="28000"/>
               </a:srgbClr>
             </a:outerShdw>
           </a:effectLst>
         </p:spPr>
-        <p:txBody>
-          <a:bodyPr/>
-          <a:lstStyle/>
-          <a:p>
-            <a:endParaRPr lang="en-EG"/>
-          </a:p>
-        </p:txBody>
       </p:sp>
       <p:sp>
         <p:nvSpPr>
@@ -23624,7 +22993,7 @@
           <a:bodyPr wrap="square" lIns="0" tIns="0" rIns="0" bIns="0" rtlCol="0" anchor="ctr"/>
           <a:lstStyle/>
           <a:p>
-            <a:pPr marL="0" indent="0">
+            <a:pPr indent="0" marL="0">
               <a:buNone/>
             </a:pPr>
             <a:r>
@@ -23663,7 +23032,7 @@
           <a:bodyPr wrap="square" lIns="0" tIns="0" rIns="0" bIns="0" rtlCol="0" anchor="t"/>
           <a:lstStyle/>
           <a:p>
-            <a:pPr marL="0" indent="0">
+            <a:pPr indent="0" marL="0">
               <a:lnSpc>
                 <a:spcPct val="102000"/>
               </a:lnSpc>
@@ -23680,6 +23049,12 @@
               </a:rPr>
               <a:t>In </a:t>
             </a:r>
+            <a:pPr indent="0" marL="0">
+              <a:lnSpc>
+                <a:spcPct val="102000"/>
+              </a:lnSpc>
+              <a:buNone/>
+            </a:pPr>
             <a:r>
               <a:rPr lang="en-US" sz="1100" b="1" dirty="0">
                 <a:solidFill>
@@ -23691,6 +23066,12 @@
               </a:rPr>
               <a:t>Settings › Accounts</a:t>
             </a:r>
+            <a:pPr indent="0" marL="0">
+              <a:lnSpc>
+                <a:spcPct val="102000"/>
+              </a:lnSpc>
+              <a:buNone/>
+            </a:pPr>
             <a:r>
               <a:rPr lang="en-US" sz="1100" dirty="0">
                 <a:solidFill>
@@ -23732,13 +23113,6 @@
             <a:prstDash val="dash"/>
           </a:ln>
         </p:spPr>
-        <p:txBody>
-          <a:bodyPr/>
-          <a:lstStyle/>
-          <a:p>
-            <a:endParaRPr lang="en-EG"/>
-          </a:p>
-        </p:txBody>
       </p:sp>
       <p:sp>
         <p:nvSpPr>
@@ -23761,13 +23135,101 @@
           <a:bodyPr wrap="square" lIns="0" tIns="0" rIns="0" bIns="0" rtlCol="0" anchor="ctr"/>
           <a:lstStyle/>
           <a:p>
-            <a:pPr marL="0" indent="0">
-              <a:buNone/>
-            </a:pPr>
-            <a:r>
-              <a:rPr lang="en-US" sz="1150" dirty="0"/>
-              <a:t>Test Account</a:t>
-            </a:r>
+            <a:pPr indent="0" marL="0">
+              <a:buNone/>
+            </a:pPr>
+            <a:r>
+              <a:rPr lang="en-US" sz="1150" i="1" dirty="0">
+                <a:solidFill>
+                  <a:srgbClr val="B8860B"/>
+                </a:solidFill>
+                <a:latin typeface="Arial" pitchFamily="34" charset="0"/>
+                <a:ea typeface="Arial" pitchFamily="34" charset="-122"/>
+                <a:cs typeface="Arial" pitchFamily="34" charset="-120"/>
+              </a:rPr>
+              <a:t>‹ enter sample M3U or Xtream URL + login ›</a:t>
+            </a:r>
+            <a:endParaRPr lang="en-US" sz="1150" dirty="0"/>
+          </a:p>
+        </p:txBody>
+      </p:sp>
+      <p:sp>
+        <p:nvSpPr>
+          <p:cNvPr id="20" name="Shape 18"/>
+          <p:cNvSpPr/>
+          <p:nvPr/>
+        </p:nvSpPr>
+        <p:spPr>
+          <a:xfrm>
+            <a:off x="640080" y="3913632"/>
+            <a:ext cx="10881360" cy="502920"/>
+          </a:xfrm>
+          <a:prstGeom prst="roundRect">
+            <a:avLst>
+              <a:gd name="adj" fmla="val 10909"/>
+            </a:avLst>
+          </a:prstGeom>
+          <a:solidFill>
+            <a:srgbClr val="FFF7E0"/>
+          </a:solidFill>
+          <a:ln w="12700">
+            <a:solidFill>
+              <a:srgbClr val="E7C15A"/>
+            </a:solidFill>
+            <a:prstDash val="solid"/>
+          </a:ln>
+        </p:spPr>
+      </p:sp>
+      <p:sp>
+        <p:nvSpPr>
+          <p:cNvPr id="21" name="Text 19"/>
+          <p:cNvSpPr/>
+          <p:nvPr/>
+        </p:nvSpPr>
+        <p:spPr>
+          <a:xfrm>
+            <a:off x="868680" y="3913632"/>
+            <a:ext cx="10424160" cy="502920"/>
+          </a:xfrm>
+          <a:prstGeom prst="rect">
+            <a:avLst/>
+          </a:prstGeom>
+          <a:noFill/>
+          <a:ln/>
+        </p:spPr>
+        <p:txBody>
+          <a:bodyPr wrap="square" lIns="0" tIns="0" rIns="0" bIns="0" rtlCol="0" anchor="ctr"/>
+          <a:lstStyle/>
+          <a:p>
+            <a:pPr indent="0" marL="0">
+              <a:buNone/>
+            </a:pPr>
+            <a:r>
+              <a:rPr lang="en-US" sz="1150" b="1" dirty="0">
+                <a:solidFill>
+                  <a:srgbClr val="B8860B"/>
+                </a:solidFill>
+                <a:latin typeface="Arial" pitchFamily="34" charset="0"/>
+                <a:ea typeface="Arial" pitchFamily="34" charset="-122"/>
+                <a:cs typeface="Arial" pitchFamily="34" charset="-120"/>
+              </a:rPr>
+              <a:t>⚠  Before uploading to Seller Lounge:  </a:t>
+            </a:r>
+            <a:pPr indent="0" marL="0">
+              <a:buNone/>
+            </a:pPr>
+            <a:r>
+              <a:rPr lang="en-US" sz="1150" dirty="0">
+                <a:solidFill>
+                  <a:srgbClr val="8A6A0A"/>
+                </a:solidFill>
+                <a:latin typeface="Arial" pitchFamily="34" charset="0"/>
+                <a:ea typeface="Arial" pitchFamily="34" charset="-122"/>
+                <a:cs typeface="Arial" pitchFamily="34" charset="-120"/>
+              </a:rPr>
+              <a:t>replace the highlighted fields above with a real test account and a sample playlist URL. QA cannot review playback without them.</a:t>
+            </a:r>
+            <a:endParaRPr lang="en-US" sz="1150" dirty="0"/>
           </a:p>
         </p:txBody>
       </p:sp>
@@ -23797,20 +23259,13 @@
             <a:prstDash val="solid"/>
           </a:ln>
           <a:effectLst>
-            <a:outerShdw blurRad="127000" dist="38100" dir="8100000" algn="bl" rotWithShape="0">
+            <a:outerShdw sx="100000" sy="100000" kx="0" ky="0" algn="bl" rotWithShape="0" blurRad="127000" dist="38100" dir="8100000">
               <a:srgbClr val="9AA6BC">
                 <a:alpha val="28000"/>
               </a:srgbClr>
             </a:outerShdw>
           </a:effectLst>
         </p:spPr>
-        <p:txBody>
-          <a:bodyPr/>
-          <a:lstStyle/>
-          <a:p>
-            <a:endParaRPr lang="en-EG"/>
-          </a:p>
-        </p:txBody>
       </p:sp>
       <p:sp>
         <p:nvSpPr>
@@ -23831,13 +23286,6 @@
           </a:solidFill>
           <a:ln/>
         </p:spPr>
-        <p:txBody>
-          <a:bodyPr/>
-          <a:lstStyle/>
-          <a:p>
-            <a:endParaRPr lang="en-EG"/>
-          </a:p>
-        </p:txBody>
       </p:sp>
       <p:sp>
         <p:nvSpPr>
@@ -23860,7 +23308,7 @@
           <a:bodyPr wrap="square" lIns="0" tIns="0" rIns="0" bIns="0" rtlCol="0" anchor="ctr"/>
           <a:lstStyle/>
           <a:p>
-            <a:pPr marL="0" indent="0">
+            <a:pPr indent="0" marL="0">
               <a:buNone/>
             </a:pPr>
             <a:r>
@@ -23899,7 +23347,7 @@
           <a:bodyPr wrap="square" lIns="0" tIns="0" rIns="0" bIns="0" rtlCol="0" anchor="t"/>
           <a:lstStyle/>
           <a:p>
-            <a:pPr marL="0" indent="0">
+            <a:pPr indent="0" marL="0">
               <a:lnSpc>
                 <a:spcPct val="110000"/>
               </a:lnSpc>
@@ -23919,7 +23367,7 @@
             <a:endParaRPr lang="en-US" sz="1100" dirty="0"/>
           </a:p>
           <a:p>
-            <a:pPr marL="0" indent="0">
+            <a:pPr indent="0" marL="0">
               <a:lnSpc>
                 <a:spcPct val="110000"/>
               </a:lnSpc>
@@ -23939,7 +23387,7 @@
             <a:endParaRPr lang="en-US" sz="1100" dirty="0"/>
           </a:p>
           <a:p>
-            <a:pPr marL="0" indent="0">
+            <a:pPr indent="0" marL="0">
               <a:lnSpc>
                 <a:spcPct val="110000"/>
               </a:lnSpc>
@@ -23954,12 +23402,12 @@
                 <a:ea typeface="Arial" pitchFamily="34" charset="-122"/>
                 <a:cs typeface="Arial" pitchFamily="34" charset="-120"/>
               </a:rPr>
-              <a:t>•  Lumen Player ships with no media. To exercise playback, add the sample playlist under Settings › Accounts.</a:t>
+              <a:t>•  Suvo ships with no media. To exercise playback, add the sample playlist under Settings › Accounts.</a:t>
             </a:r>
             <a:endParaRPr lang="en-US" sz="1100" dirty="0"/>
           </a:p>
           <a:p>
-            <a:pPr marL="0" indent="0">
+            <a:pPr indent="0" marL="0">
               <a:lnSpc>
                 <a:spcPct val="110000"/>
               </a:lnSpc>
@@ -24001,7 +23449,7 @@
           <a:bodyPr wrap="square" lIns="0" tIns="0" rIns="0" bIns="0" rtlCol="0" anchor="ctr"/>
           <a:lstStyle/>
           <a:p>
-            <a:pPr marL="0" indent="0" algn="r">
+            <a:pPr algn="r" indent="0" marL="0">
               <a:buNone/>
             </a:pPr>
             <a:r>
@@ -24040,7 +23488,7 @@
           <a:bodyPr wrap="square" lIns="0" tIns="0" rIns="0" bIns="0" rtlCol="0" anchor="ctr"/>
           <a:lstStyle/>
           <a:p>
-            <a:pPr marL="0" indent="0" algn="l">
+            <a:pPr algn="l" indent="0" marL="0">
               <a:buNone/>
             </a:pPr>
             <a:r>
@@ -24052,7 +23500,7 @@
                 <a:ea typeface="Arial" pitchFamily="34" charset="-122"/>
                 <a:cs typeface="Arial" pitchFamily="34" charset="-120"/>
               </a:rPr>
-              <a:t>Lumen Player · UX Scenario Document</a:t>
+              <a:t>Suvo · UX Scenario Document</a:t>
             </a:r>
             <a:endParaRPr lang="en-US" sz="900" dirty="0"/>
           </a:p>
@@ -24074,7 +23522,6 @@
         <a:solidFill>
           <a:srgbClr val="F5F7FB"/>
         </a:solidFill>
-        <a:effectLst/>
       </p:bgPr>
     </p:bg>
     <p:spTree>
@@ -24112,20 +23559,13 @@
           </a:solidFill>
           <a:ln/>
           <a:effectLst>
-            <a:outerShdw blurRad="127000" dist="38100" dir="8100000" algn="bl" rotWithShape="0">
+            <a:outerShdw sx="100000" sy="100000" kx="0" ky="0" algn="bl" rotWithShape="0" blurRad="127000" dist="38100" dir="8100000">
               <a:srgbClr val="9AA6BC">
                 <a:alpha val="28000"/>
               </a:srgbClr>
             </a:outerShdw>
           </a:effectLst>
         </p:spPr>
-        <p:txBody>
-          <a:bodyPr/>
-          <a:lstStyle/>
-          <a:p>
-            <a:endParaRPr lang="en-EG"/>
-          </a:p>
-        </p:txBody>
       </p:sp>
       <p:sp>
         <p:nvSpPr>
@@ -24148,7 +23588,7 @@
           <a:bodyPr wrap="square" lIns="0" tIns="0" rIns="0" bIns="0" rtlCol="0" anchor="ctr"/>
           <a:lstStyle/>
           <a:p>
-            <a:pPr marL="0" indent="0" algn="ctr">
+            <a:pPr algn="ctr" indent="0" marL="0">
               <a:buNone/>
             </a:pPr>
             <a:r>
@@ -24187,7 +23627,7 @@
           <a:bodyPr wrap="square" lIns="0" tIns="0" rIns="0" bIns="0" rtlCol="0" anchor="ctr"/>
           <a:lstStyle/>
           <a:p>
-            <a:pPr marL="0" indent="0" algn="l">
+            <a:pPr algn="l" indent="0" marL="0">
               <a:buNone/>
             </a:pPr>
             <a:r>
@@ -24226,7 +23666,7 @@
           <a:bodyPr wrap="square" lIns="0" tIns="0" rIns="0" bIns="0" rtlCol="0" anchor="ctr"/>
           <a:lstStyle/>
           <a:p>
-            <a:pPr marL="0" indent="0" algn="l">
+            <a:pPr algn="l" indent="0" marL="0">
               <a:buNone/>
             </a:pPr>
             <a:r>
@@ -24270,31 +23710,24 @@
             <a:prstDash val="solid"/>
           </a:ln>
           <a:effectLst>
-            <a:outerShdw blurRad="101600" dist="38100" dir="8100000" algn="bl" rotWithShape="0">
+            <a:outerShdw sx="100000" sy="100000" kx="0" ky="0" algn="bl" rotWithShape="0" blurRad="101600" dist="38100" dir="8100000">
               <a:srgbClr val="0F1320">
                 <a:alpha val="18000"/>
               </a:srgbClr>
             </a:outerShdw>
           </a:effectLst>
         </p:spPr>
-        <p:txBody>
-          <a:bodyPr/>
-          <a:lstStyle/>
-          <a:p>
-            <a:endParaRPr lang="en-EG"/>
-          </a:p>
-        </p:txBody>
       </p:sp>
       <p:pic>
         <p:nvPicPr>
-          <p:cNvPr id="7" name="Image 0" descr="Profile selection screen"/>
+          <p:cNvPr id="7" name="Image 0" descr="Profile selection screen">    </p:cNvPr>
           <p:cNvPicPr>
             <a:picLocks noChangeAspect="1"/>
           </p:cNvPicPr>
           <p:nvPr/>
         </p:nvPicPr>
         <p:blipFill>
-          <a:blip r:embed="rId3"/>
+          <a:blip r:embed="rId1"/>
           <a:stretch>
             <a:fillRect/>
           </a:stretch>
@@ -24333,20 +23766,13 @@
             <a:prstDash val="solid"/>
           </a:ln>
           <a:effectLst>
-            <a:outerShdw blurRad="101600" dist="38100" dir="8100000" algn="bl" rotWithShape="0">
+            <a:outerShdw sx="100000" sy="100000" kx="0" ky="0" algn="bl" rotWithShape="0" blurRad="101600" dist="38100" dir="8100000">
               <a:srgbClr val="0F1320">
                 <a:alpha val="18000"/>
               </a:srgbClr>
             </a:outerShdw>
           </a:effectLst>
         </p:spPr>
-        <p:txBody>
-          <a:bodyPr/>
-          <a:lstStyle/>
-          <a:p>
-            <a:endParaRPr lang="en-EG"/>
-          </a:p>
-        </p:txBody>
       </p:sp>
       <p:sp>
         <p:nvSpPr>
@@ -24369,7 +23795,7 @@
           <a:bodyPr wrap="square" lIns="0" tIns="0" rIns="0" bIns="0" rtlCol="0" anchor="ctr"/>
           <a:lstStyle/>
           <a:p>
-            <a:pPr marL="0" indent="0" algn="ctr">
+            <a:pPr algn="ctr" indent="0" marL="0">
               <a:buNone/>
             </a:pPr>
             <a:r>
@@ -24411,20 +23837,13 @@
             <a:prstDash val="solid"/>
           </a:ln>
           <a:effectLst>
-            <a:outerShdw blurRad="101600" dist="38100" dir="8100000" algn="bl" rotWithShape="0">
+            <a:outerShdw sx="100000" sy="100000" kx="0" ky="0" algn="bl" rotWithShape="0" blurRad="101600" dist="38100" dir="8100000">
               <a:srgbClr val="0F1320">
                 <a:alpha val="18000"/>
               </a:srgbClr>
             </a:outerShdw>
           </a:effectLst>
         </p:spPr>
-        <p:txBody>
-          <a:bodyPr/>
-          <a:lstStyle/>
-          <a:p>
-            <a:endParaRPr lang="en-EG"/>
-          </a:p>
-        </p:txBody>
       </p:sp>
       <p:sp>
         <p:nvSpPr>
@@ -24447,7 +23866,7 @@
           <a:bodyPr wrap="square" lIns="0" tIns="0" rIns="0" bIns="0" rtlCol="0" anchor="ctr"/>
           <a:lstStyle/>
           <a:p>
-            <a:pPr marL="0" indent="0" algn="ctr">
+            <a:pPr algn="ctr" indent="0" marL="0">
               <a:buNone/>
             </a:pPr>
             <a:r>
@@ -24489,20 +23908,13 @@
             <a:prstDash val="solid"/>
           </a:ln>
           <a:effectLst>
-            <a:outerShdw blurRad="101600" dist="38100" dir="8100000" algn="bl" rotWithShape="0">
+            <a:outerShdw sx="100000" sy="100000" kx="0" ky="0" algn="bl" rotWithShape="0" blurRad="101600" dist="38100" dir="8100000">
               <a:srgbClr val="0F1320">
                 <a:alpha val="18000"/>
               </a:srgbClr>
             </a:outerShdw>
           </a:effectLst>
         </p:spPr>
-        <p:txBody>
-          <a:bodyPr/>
-          <a:lstStyle/>
-          <a:p>
-            <a:endParaRPr lang="en-EG"/>
-          </a:p>
-        </p:txBody>
       </p:sp>
       <p:sp>
         <p:nvSpPr>
@@ -24525,7 +23937,7 @@
           <a:bodyPr wrap="square" lIns="0" tIns="0" rIns="0" bIns="0" rtlCol="0" anchor="ctr"/>
           <a:lstStyle/>
           <a:p>
-            <a:pPr marL="0" indent="0" algn="ctr">
+            <a:pPr algn="ctr" indent="0" marL="0">
               <a:buNone/>
             </a:pPr>
             <a:r>
@@ -24567,20 +23979,13 @@
             <a:prstDash val="solid"/>
           </a:ln>
           <a:effectLst>
-            <a:outerShdw blurRad="101600" dist="38100" dir="8100000" algn="bl" rotWithShape="0">
+            <a:outerShdw sx="100000" sy="100000" kx="0" ky="0" algn="bl" rotWithShape="0" blurRad="101600" dist="38100" dir="8100000">
               <a:srgbClr val="0F1320">
                 <a:alpha val="18000"/>
               </a:srgbClr>
             </a:outerShdw>
           </a:effectLst>
         </p:spPr>
-        <p:txBody>
-          <a:bodyPr/>
-          <a:lstStyle/>
-          <a:p>
-            <a:endParaRPr lang="en-EG"/>
-          </a:p>
-        </p:txBody>
       </p:sp>
       <p:sp>
         <p:nvSpPr>
@@ -24603,7 +24008,7 @@
           <a:bodyPr wrap="square" lIns="0" tIns="0" rIns="0" bIns="0" rtlCol="0" anchor="ctr"/>
           <a:lstStyle/>
           <a:p>
-            <a:pPr marL="0" indent="0" algn="ctr">
+            <a:pPr algn="ctr" indent="0" marL="0">
               <a:buNone/>
             </a:pPr>
             <a:r>
@@ -24640,13 +24045,6 @@
           </a:solidFill>
           <a:ln/>
         </p:spPr>
-        <p:txBody>
-          <a:bodyPr/>
-          <a:lstStyle/>
-          <a:p>
-            <a:endParaRPr lang="en-EG"/>
-          </a:p>
-        </p:txBody>
       </p:sp>
       <p:sp>
         <p:nvSpPr>
@@ -24669,7 +24067,7 @@
           <a:bodyPr wrap="square" lIns="0" tIns="0" rIns="0" bIns="0" rtlCol="0" anchor="ctr"/>
           <a:lstStyle/>
           <a:p>
-            <a:pPr marL="0" indent="0" algn="ctr">
+            <a:pPr algn="ctr" indent="0" marL="0">
               <a:buNone/>
             </a:pPr>
             <a:r>
@@ -24708,7 +24106,7 @@
           <a:bodyPr wrap="square" lIns="0" tIns="0" rIns="0" bIns="0" rtlCol="0" anchor="t"/>
           <a:lstStyle/>
           <a:p>
-            <a:pPr marL="0" indent="0" algn="l">
+            <a:pPr algn="l" indent="0" marL="0">
               <a:lnSpc>
                 <a:spcPct val="102000"/>
               </a:lnSpc>
@@ -24725,6 +24123,12 @@
               </a:rPr>
               <a:t>Profile tile  </a:t>
             </a:r>
+            <a:pPr algn="l" indent="0" marL="0">
+              <a:lnSpc>
+                <a:spcPct val="102000"/>
+              </a:lnSpc>
+              <a:buNone/>
+            </a:pPr>
             <a:r>
               <a:rPr lang="en-US" sz="1250" dirty="0">
                 <a:solidFill>
@@ -24759,13 +24163,6 @@
           </a:solidFill>
           <a:ln/>
         </p:spPr>
-        <p:txBody>
-          <a:bodyPr/>
-          <a:lstStyle/>
-          <a:p>
-            <a:endParaRPr lang="en-EG"/>
-          </a:p>
-        </p:txBody>
       </p:sp>
       <p:sp>
         <p:nvSpPr>
@@ -24788,7 +24185,7 @@
           <a:bodyPr wrap="square" lIns="0" tIns="0" rIns="0" bIns="0" rtlCol="0" anchor="ctr"/>
           <a:lstStyle/>
           <a:p>
-            <a:pPr marL="0" indent="0" algn="ctr">
+            <a:pPr algn="ctr" indent="0" marL="0">
               <a:buNone/>
             </a:pPr>
             <a:r>
@@ -24827,7 +24224,7 @@
           <a:bodyPr wrap="square" lIns="0" tIns="0" rIns="0" bIns="0" rtlCol="0" anchor="t"/>
           <a:lstStyle/>
           <a:p>
-            <a:pPr marL="0" indent="0" algn="l">
+            <a:pPr algn="l" indent="0" marL="0">
               <a:lnSpc>
                 <a:spcPct val="102000"/>
               </a:lnSpc>
@@ -24844,6 +24241,12 @@
               </a:rPr>
               <a:t>Add Profile  </a:t>
             </a:r>
+            <a:pPr algn="l" indent="0" marL="0">
+              <a:lnSpc>
+                <a:spcPct val="102000"/>
+              </a:lnSpc>
+              <a:buNone/>
+            </a:pPr>
             <a:r>
               <a:rPr lang="en-US" sz="1250" dirty="0">
                 <a:solidFill>
@@ -24878,13 +24281,6 @@
           </a:solidFill>
           <a:ln/>
         </p:spPr>
-        <p:txBody>
-          <a:bodyPr/>
-          <a:lstStyle/>
-          <a:p>
-            <a:endParaRPr lang="en-EG"/>
-          </a:p>
-        </p:txBody>
       </p:sp>
       <p:sp>
         <p:nvSpPr>
@@ -24907,7 +24303,7 @@
           <a:bodyPr wrap="square" lIns="0" tIns="0" rIns="0" bIns="0" rtlCol="0" anchor="ctr"/>
           <a:lstStyle/>
           <a:p>
-            <a:pPr marL="0" indent="0" algn="ctr">
+            <a:pPr algn="ctr" indent="0" marL="0">
               <a:buNone/>
             </a:pPr>
             <a:r>
@@ -24946,7 +24342,7 @@
           <a:bodyPr wrap="square" lIns="0" tIns="0" rIns="0" bIns="0" rtlCol="0" anchor="t"/>
           <a:lstStyle/>
           <a:p>
-            <a:pPr marL="0" indent="0" algn="l">
+            <a:pPr algn="l" indent="0" marL="0">
               <a:lnSpc>
                 <a:spcPct val="102000"/>
               </a:lnSpc>
@@ -24963,6 +24359,12 @@
               </a:rPr>
               <a:t>Manage Profiles  </a:t>
             </a:r>
+            <a:pPr algn="l" indent="0" marL="0">
+              <a:lnSpc>
+                <a:spcPct val="102000"/>
+              </a:lnSpc>
+              <a:buNone/>
+            </a:pPr>
             <a:r>
               <a:rPr lang="en-US" sz="1250" dirty="0">
                 <a:solidFill>
@@ -24997,13 +24399,6 @@
           </a:solidFill>
           <a:ln/>
         </p:spPr>
-        <p:txBody>
-          <a:bodyPr/>
-          <a:lstStyle/>
-          <a:p>
-            <a:endParaRPr lang="en-EG"/>
-          </a:p>
-        </p:txBody>
       </p:sp>
       <p:sp>
         <p:nvSpPr>
@@ -25026,7 +24421,7 @@
           <a:bodyPr wrap="square" lIns="0" tIns="0" rIns="0" bIns="0" rtlCol="0" anchor="ctr"/>
           <a:lstStyle/>
           <a:p>
-            <a:pPr marL="0" indent="0" algn="ctr">
+            <a:pPr algn="ctr" indent="0" marL="0">
               <a:buNone/>
             </a:pPr>
             <a:r>
@@ -25065,7 +24460,7 @@
           <a:bodyPr wrap="square" lIns="0" tIns="0" rIns="0" bIns="0" rtlCol="0" anchor="t"/>
           <a:lstStyle/>
           <a:p>
-            <a:pPr marL="0" indent="0" algn="l">
+            <a:pPr algn="l" indent="0" marL="0">
               <a:lnSpc>
                 <a:spcPct val="102000"/>
               </a:lnSpc>
@@ -25082,6 +24477,12 @@
               </a:rPr>
               <a:t>Sign Out  </a:t>
             </a:r>
+            <a:pPr algn="l" indent="0" marL="0">
+              <a:lnSpc>
+                <a:spcPct val="102000"/>
+              </a:lnSpc>
+              <a:buNone/>
+            </a:pPr>
             <a:r>
               <a:rPr lang="en-US" sz="1250" dirty="0">
                 <a:solidFill>
@@ -25118,7 +24519,7 @@
           <a:bodyPr wrap="square" lIns="0" tIns="0" rIns="0" bIns="0" rtlCol="0" anchor="t"/>
           <a:lstStyle/>
           <a:p>
-            <a:pPr marL="0" indent="0">
+            <a:pPr indent="0" marL="0">
               <a:lnSpc>
                 <a:spcPct val="104000"/>
               </a:lnSpc>
@@ -25160,7 +24561,7 @@
           <a:bodyPr wrap="square" lIns="0" tIns="0" rIns="0" bIns="0" rtlCol="0" anchor="ctr"/>
           <a:lstStyle/>
           <a:p>
-            <a:pPr marL="0" indent="0" algn="r">
+            <a:pPr algn="r" indent="0" marL="0">
               <a:buNone/>
             </a:pPr>
             <a:r>
@@ -25199,7 +24600,7 @@
           <a:bodyPr wrap="square" lIns="0" tIns="0" rIns="0" bIns="0" rtlCol="0" anchor="ctr"/>
           <a:lstStyle/>
           <a:p>
-            <a:pPr marL="0" indent="0" algn="l">
+            <a:pPr algn="l" indent="0" marL="0">
               <a:buNone/>
             </a:pPr>
             <a:r>
@@ -25211,7 +24612,7 @@
                 <a:ea typeface="Arial" pitchFamily="34" charset="-122"/>
                 <a:cs typeface="Arial" pitchFamily="34" charset="-120"/>
               </a:rPr>
-              <a:t>Lumen Player · UX Scenario Document</a:t>
+              <a:t>Suvo · UX Scenario Document</a:t>
             </a:r>
             <a:endParaRPr lang="en-US" sz="900" dirty="0"/>
           </a:p>
@@ -25518,319 +24919,4 @@
     </a:ext>
   </a:extLst>
 </a:theme>
-</file>
-
-<file path=ppt/theme/theme2.xml><?xml version="1.0" encoding="utf-8"?>
-<a:theme xmlns:a="http://schemas.openxmlformats.org/drawingml/2006/main" name="Office Theme">
-  <a:themeElements>
-    <a:clrScheme name="Office">
-      <a:dk1>
-        <a:sysClr val="windowText" lastClr="000000"/>
-      </a:dk1>
-      <a:lt1>
-        <a:sysClr val="window" lastClr="FFFFFF"/>
-      </a:lt1>
-      <a:dk2>
-        <a:srgbClr val="0E2841"/>
-      </a:dk2>
-      <a:lt2>
-        <a:srgbClr val="E8E8E8"/>
-      </a:lt2>
-      <a:accent1>
-        <a:srgbClr val="156082"/>
-      </a:accent1>
-      <a:accent2>
-        <a:srgbClr val="E97132"/>
-      </a:accent2>
-      <a:accent3>
-        <a:srgbClr val="196B24"/>
-      </a:accent3>
-      <a:accent4>
-        <a:srgbClr val="0F9ED5"/>
-      </a:accent4>
-      <a:accent5>
-        <a:srgbClr val="A02B93"/>
-      </a:accent5>
-      <a:accent6>
-        <a:srgbClr val="4EA72E"/>
-      </a:accent6>
-      <a:hlink>
-        <a:srgbClr val="467886"/>
-      </a:hlink>
-      <a:folHlink>
-        <a:srgbClr val="96607D"/>
-      </a:folHlink>
-    </a:clrScheme>
-    <a:fontScheme name="Office">
-      <a:majorFont>
-        <a:latin typeface="Aptos Display" panose="02110004020202020204"/>
-        <a:ea typeface=""/>
-        <a:cs typeface=""/>
-        <a:font script="Jpan" typeface="游ゴシック Light"/>
-        <a:font script="Hang" typeface="맑은 고딕"/>
-        <a:font script="Hans" typeface="等线 Light"/>
-        <a:font script="Hant" typeface="新細明體"/>
-        <a:font script="Arab" typeface="Times New Roman"/>
-        <a:font script="Hebr" typeface="Times New Roman"/>
-        <a:font script="Thai" typeface="Angsana New"/>
-        <a:font script="Ethi" typeface="Nyala"/>
-        <a:font script="Beng" typeface="Vrinda"/>
-        <a:font script="Gujr" typeface="Shruti"/>
-        <a:font script="Khmr" typeface="MoolBoran"/>
-        <a:font script="Knda" typeface="Tunga"/>
-        <a:font script="Guru" typeface="Raavi"/>
-        <a:font script="Cans" typeface="Euphemia"/>
-        <a:font script="Cher" typeface="Plantagenet Cherokee"/>
-        <a:font script="Yiii" typeface="Microsoft Yi Baiti"/>
-        <a:font script="Tibt" typeface="Microsoft Himalaya"/>
-        <a:font script="Thaa" typeface="MV Boli"/>
-        <a:font script="Deva" typeface="Mangal"/>
-        <a:font script="Telu" typeface="Gautami"/>
-        <a:font script="Taml" typeface="Latha"/>
-        <a:font script="Syrc" typeface="Estrangelo Edessa"/>
-        <a:font script="Orya" typeface="Kalinga"/>
-        <a:font script="Mlym" typeface="Kartika"/>
-        <a:font script="Laoo" typeface="DokChampa"/>
-        <a:font script="Sinh" typeface="Iskoola Pota"/>
-        <a:font script="Mong" typeface="Mongolian Baiti"/>
-        <a:font script="Viet" typeface="Times New Roman"/>
-        <a:font script="Uigh" typeface="Microsoft Uighur"/>
-        <a:font script="Geor" typeface="Sylfaen"/>
-        <a:font script="Armn" typeface="Arial"/>
-        <a:font script="Bugi" typeface="Leelawadee UI"/>
-        <a:font script="Bopo" typeface="Microsoft JhengHei"/>
-        <a:font script="Java" typeface="Javanese Text"/>
-        <a:font script="Lisu" typeface="Segoe UI"/>
-        <a:font script="Mymr" typeface="Myanmar Text"/>
-        <a:font script="Nkoo" typeface="Ebrima"/>
-        <a:font script="Olck" typeface="Nirmala UI"/>
-        <a:font script="Osma" typeface="Ebrima"/>
-        <a:font script="Phag" typeface="Phagspa"/>
-        <a:font script="Syrn" typeface="Estrangelo Edessa"/>
-        <a:font script="Syrj" typeface="Estrangelo Edessa"/>
-        <a:font script="Syre" typeface="Estrangelo Edessa"/>
-        <a:font script="Sora" typeface="Nirmala UI"/>
-        <a:font script="Tale" typeface="Microsoft Tai Le"/>
-        <a:font script="Talu" typeface="Microsoft New Tai Lue"/>
-        <a:font script="Tfng" typeface="Ebrima"/>
-      </a:majorFont>
-      <a:minorFont>
-        <a:latin typeface="Aptos" panose="02110004020202020204"/>
-        <a:ea typeface=""/>
-        <a:cs typeface=""/>
-        <a:font script="Jpan" typeface="游ゴシック"/>
-        <a:font script="Hang" typeface="맑은 고딕"/>
-        <a:font script="Hans" typeface="等线"/>
-        <a:font script="Hant" typeface="新細明體"/>
-        <a:font script="Arab" typeface="Arial"/>
-        <a:font script="Hebr" typeface="Arial"/>
-        <a:font script="Thai" typeface="Cordia New"/>
-        <a:font script="Ethi" typeface="Nyala"/>
-        <a:font script="Beng" typeface="Vrinda"/>
-        <a:font script="Gujr" typeface="Shruti"/>
-        <a:font script="Khmr" typeface="DaunPenh"/>
-        <a:font script="Knda" typeface="Tunga"/>
-        <a:font script="Guru" typeface="Raavi"/>
-        <a:font script="Cans" typeface="Euphemia"/>
-        <a:font script="Cher" typeface="Plantagenet Cherokee"/>
-        <a:font script="Yiii" typeface="Microsoft Yi Baiti"/>
-        <a:font script="Tibt" typeface="Microsoft Himalaya"/>
-        <a:font script="Thaa" typeface="MV Boli"/>
-        <a:font script="Deva" typeface="Mangal"/>
-        <a:font script="Telu" typeface="Gautami"/>
-        <a:font script="Taml" typeface="Latha"/>
-        <a:font script="Syrc" typeface="Estrangelo Edessa"/>
-        <a:font script="Orya" typeface="Kalinga"/>
-        <a:font script="Mlym" typeface="Kartika"/>
-        <a:font script="Laoo" typeface="DokChampa"/>
-        <a:font script="Sinh" typeface="Iskoola Pota"/>
-        <a:font script="Mong" typeface="Mongolian Baiti"/>
-        <a:font script="Viet" typeface="Arial"/>
-        <a:font script="Uigh" typeface="Microsoft Uighur"/>
-        <a:font script="Geor" typeface="Sylfaen"/>
-        <a:font script="Armn" typeface="Arial"/>
-        <a:font script="Bugi" typeface="Leelawadee UI"/>
-        <a:font script="Bopo" typeface="Microsoft JhengHei"/>
-        <a:font script="Java" typeface="Javanese Text"/>
-        <a:font script="Lisu" typeface="Segoe UI"/>
-        <a:font script="Mymr" typeface="Myanmar Text"/>
-        <a:font script="Nkoo" typeface="Ebrima"/>
-        <a:font script="Olck" typeface="Nirmala UI"/>
-        <a:font script="Osma" typeface="Ebrima"/>
-        <a:font script="Phag" typeface="Phagspa"/>
-        <a:font script="Syrn" typeface="Estrangelo Edessa"/>
-        <a:font script="Syrj" typeface="Estrangelo Edessa"/>
-        <a:font script="Syre" typeface="Estrangelo Edessa"/>
-        <a:font script="Sora" typeface="Nirmala UI"/>
-        <a:font script="Tale" typeface="Microsoft Tai Le"/>
-        <a:font script="Talu" typeface="Microsoft New Tai Lue"/>
-        <a:font script="Tfng" typeface="Ebrima"/>
-      </a:minorFont>
-    </a:fontScheme>
-    <a:fmtScheme name="Office">
-      <a:fillStyleLst>
-        <a:solidFill>
-          <a:schemeClr val="phClr"/>
-        </a:solidFill>
-        <a:gradFill rotWithShape="1">
-          <a:gsLst>
-            <a:gs pos="0">
-              <a:schemeClr val="phClr">
-                <a:lumMod val="110000"/>
-                <a:satMod val="105000"/>
-                <a:tint val="67000"/>
-              </a:schemeClr>
-            </a:gs>
-            <a:gs pos="50000">
-              <a:schemeClr val="phClr">
-                <a:lumMod val="105000"/>
-                <a:satMod val="103000"/>
-                <a:tint val="73000"/>
-              </a:schemeClr>
-            </a:gs>
-            <a:gs pos="100000">
-              <a:schemeClr val="phClr">
-                <a:lumMod val="105000"/>
-                <a:satMod val="109000"/>
-                <a:tint val="81000"/>
-              </a:schemeClr>
-            </a:gs>
-          </a:gsLst>
-          <a:lin ang="5400000" scaled="0"/>
-        </a:gradFill>
-        <a:gradFill rotWithShape="1">
-          <a:gsLst>
-            <a:gs pos="0">
-              <a:schemeClr val="phClr">
-                <a:satMod val="103000"/>
-                <a:lumMod val="102000"/>
-                <a:tint val="94000"/>
-              </a:schemeClr>
-            </a:gs>
-            <a:gs pos="50000">
-              <a:schemeClr val="phClr">
-                <a:satMod val="110000"/>
-                <a:lumMod val="100000"/>
-                <a:shade val="100000"/>
-              </a:schemeClr>
-            </a:gs>
-            <a:gs pos="100000">
-              <a:schemeClr val="phClr">
-                <a:lumMod val="99000"/>
-                <a:satMod val="120000"/>
-                <a:shade val="78000"/>
-              </a:schemeClr>
-            </a:gs>
-          </a:gsLst>
-          <a:lin ang="5400000" scaled="0"/>
-        </a:gradFill>
-      </a:fillStyleLst>
-      <a:lnStyleLst>
-        <a:ln w="12700" cap="flat" cmpd="sng" algn="ctr">
-          <a:solidFill>
-            <a:schemeClr val="phClr"/>
-          </a:solidFill>
-          <a:prstDash val="solid"/>
-          <a:miter lim="800000"/>
-        </a:ln>
-        <a:ln w="19050" cap="flat" cmpd="sng" algn="ctr">
-          <a:solidFill>
-            <a:schemeClr val="phClr"/>
-          </a:solidFill>
-          <a:prstDash val="solid"/>
-          <a:miter lim="800000"/>
-        </a:ln>
-        <a:ln w="25400" cap="flat" cmpd="sng" algn="ctr">
-          <a:solidFill>
-            <a:schemeClr val="phClr"/>
-          </a:solidFill>
-          <a:prstDash val="solid"/>
-          <a:miter lim="800000"/>
-        </a:ln>
-      </a:lnStyleLst>
-      <a:effectStyleLst>
-        <a:effectStyle>
-          <a:effectLst/>
-        </a:effectStyle>
-        <a:effectStyle>
-          <a:effectLst/>
-        </a:effectStyle>
-        <a:effectStyle>
-          <a:effectLst>
-            <a:outerShdw blurRad="57150" dist="19050" dir="5400000" algn="ctr" rotWithShape="0">
-              <a:srgbClr val="000000">
-                <a:alpha val="63000"/>
-              </a:srgbClr>
-            </a:outerShdw>
-          </a:effectLst>
-        </a:effectStyle>
-      </a:effectStyleLst>
-      <a:bgFillStyleLst>
-        <a:solidFill>
-          <a:schemeClr val="phClr"/>
-        </a:solidFill>
-        <a:solidFill>
-          <a:schemeClr val="phClr">
-            <a:tint val="95000"/>
-            <a:satMod val="170000"/>
-          </a:schemeClr>
-        </a:solidFill>
-        <a:gradFill rotWithShape="1">
-          <a:gsLst>
-            <a:gs pos="0">
-              <a:schemeClr val="phClr">
-                <a:tint val="93000"/>
-                <a:satMod val="150000"/>
-                <a:shade val="98000"/>
-                <a:lumMod val="102000"/>
-              </a:schemeClr>
-            </a:gs>
-            <a:gs pos="50000">
-              <a:schemeClr val="phClr">
-                <a:tint val="98000"/>
-                <a:satMod val="130000"/>
-                <a:shade val="90000"/>
-                <a:lumMod val="103000"/>
-              </a:schemeClr>
-            </a:gs>
-            <a:gs pos="100000">
-              <a:schemeClr val="phClr">
-                <a:shade val="63000"/>
-                <a:satMod val="120000"/>
-              </a:schemeClr>
-            </a:gs>
-          </a:gsLst>
-          <a:lin ang="5400000" scaled="0"/>
-        </a:gradFill>
-      </a:bgFillStyleLst>
-    </a:fmtScheme>
-  </a:themeElements>
-  <a:objectDefaults>
-    <a:lnDef>
-      <a:spPr/>
-      <a:bodyPr/>
-      <a:lstStyle/>
-      <a:style>
-        <a:lnRef idx="2">
-          <a:schemeClr val="accent1"/>
-        </a:lnRef>
-        <a:fillRef idx="0">
-          <a:schemeClr val="accent1"/>
-        </a:fillRef>
-        <a:effectRef idx="1">
-          <a:schemeClr val="accent1"/>
-        </a:effectRef>
-        <a:fontRef idx="minor">
-          <a:schemeClr val="tx1"/>
-        </a:fontRef>
-      </a:style>
-    </a:lnDef>
-  </a:objectDefaults>
-  <a:extraClrSchemeLst/>
-  <a:extLst>
-    <a:ext uri="{05A4C25C-085E-4340-85A3-A5531E510DB2}">
-      <thm15:themeFamily xmlns:thm15="http://schemas.microsoft.com/office/thememl/2012/main" name="Office Theme" id="{2E142A2C-CD16-42D6-873A-C26D2A0506FA}" vid="{1BDDFF52-6CD6-40A5-AB3C-68EB2F1E4D0A}"/>
-    </a:ext>
-  </a:extLst>
-</a:theme>
 </file>